--- a/slide/CA3060-4-Pipeline.pptx
+++ b/slide/CA3060-4-Pipeline.pptx
@@ -6,10 +6,10 @@
     <p:sldMasterId id="2147483660" r:id="rId2"/>
   </p:sldMasterIdLst>
   <p:notesMasterIdLst>
-    <p:notesMasterId r:id="rId36"/>
+    <p:notesMasterId r:id="rId39"/>
   </p:notesMasterIdLst>
   <p:handoutMasterIdLst>
-    <p:handoutMasterId r:id="rId37"/>
+    <p:handoutMasterId r:id="rId40"/>
   </p:handoutMasterIdLst>
   <p:sldIdLst>
     <p:sldId id="256" r:id="rId3"/>
@@ -18,33 +18,36 @@
     <p:sldId id="665" r:id="rId6"/>
     <p:sldId id="663" r:id="rId7"/>
     <p:sldId id="696" r:id="rId8"/>
-    <p:sldId id="666" r:id="rId9"/>
-    <p:sldId id="667" r:id="rId10"/>
-    <p:sldId id="668" r:id="rId11"/>
-    <p:sldId id="671" r:id="rId12"/>
-    <p:sldId id="669" r:id="rId13"/>
-    <p:sldId id="682" r:id="rId14"/>
-    <p:sldId id="658" r:id="rId15"/>
-    <p:sldId id="527" r:id="rId16"/>
-    <p:sldId id="528" r:id="rId17"/>
-    <p:sldId id="293" r:id="rId18"/>
-    <p:sldId id="693" r:id="rId19"/>
-    <p:sldId id="659" r:id="rId20"/>
-    <p:sldId id="660" r:id="rId21"/>
-    <p:sldId id="661" r:id="rId22"/>
-    <p:sldId id="662" r:id="rId23"/>
-    <p:sldId id="672" r:id="rId24"/>
-    <p:sldId id="673" r:id="rId25"/>
-    <p:sldId id="674" r:id="rId26"/>
-    <p:sldId id="681" r:id="rId27"/>
-    <p:sldId id="695" r:id="rId28"/>
-    <p:sldId id="694" r:id="rId29"/>
-    <p:sldId id="675" r:id="rId30"/>
-    <p:sldId id="676" r:id="rId31"/>
-    <p:sldId id="677" r:id="rId32"/>
-    <p:sldId id="678" r:id="rId33"/>
-    <p:sldId id="679" r:id="rId34"/>
-    <p:sldId id="680" r:id="rId35"/>
+    <p:sldId id="697" r:id="rId9"/>
+    <p:sldId id="666" r:id="rId10"/>
+    <p:sldId id="667" r:id="rId11"/>
+    <p:sldId id="668" r:id="rId12"/>
+    <p:sldId id="671" r:id="rId13"/>
+    <p:sldId id="669" r:id="rId14"/>
+    <p:sldId id="682" r:id="rId15"/>
+    <p:sldId id="658" r:id="rId16"/>
+    <p:sldId id="527" r:id="rId17"/>
+    <p:sldId id="528" r:id="rId18"/>
+    <p:sldId id="293" r:id="rId19"/>
+    <p:sldId id="693" r:id="rId20"/>
+    <p:sldId id="659" r:id="rId21"/>
+    <p:sldId id="660" r:id="rId22"/>
+    <p:sldId id="661" r:id="rId23"/>
+    <p:sldId id="662" r:id="rId24"/>
+    <p:sldId id="672" r:id="rId25"/>
+    <p:sldId id="673" r:id="rId26"/>
+    <p:sldId id="674" r:id="rId27"/>
+    <p:sldId id="681" r:id="rId28"/>
+    <p:sldId id="695" r:id="rId29"/>
+    <p:sldId id="694" r:id="rId30"/>
+    <p:sldId id="698" r:id="rId31"/>
+    <p:sldId id="675" r:id="rId32"/>
+    <p:sldId id="676" r:id="rId33"/>
+    <p:sldId id="677" r:id="rId34"/>
+    <p:sldId id="678" r:id="rId35"/>
+    <p:sldId id="679" r:id="rId36"/>
+    <p:sldId id="699" r:id="rId37"/>
+    <p:sldId id="680" r:id="rId38"/>
   </p:sldIdLst>
   <p:sldSz cx="12192000" cy="6858000"/>
   <p:notesSz cx="6858000" cy="9144000"/>
@@ -154,6 +157,65 @@
 </p:presentation>
 </file>
 
+<file path=ppt/changesInfos/changesInfo1.xml><?xml version="1.0" encoding="utf-8"?>
+<pc:chgInfo xmlns:a="http://schemas.openxmlformats.org/drawingml/2006/main" xmlns:r="http://schemas.openxmlformats.org/officeDocument/2006/relationships" xmlns:ac="http://schemas.microsoft.com/office/drawing/2013/main/command" xmlns:pc="http://schemas.microsoft.com/office/powerpoint/2013/main/command">
+  <pc:docChgLst>
+    <pc:chgData name="Chaoyi Sun (SDS,124090550)" userId="7336b744-5857-42bc-9fde-1c1347a32774" providerId="ADAL" clId="{3A35FEB6-D186-4DFE-8550-C935A8639321}"/>
+    <pc:docChg chg="undo custSel modSld">
+      <pc:chgData name="Chaoyi Sun (SDS,124090550)" userId="7336b744-5857-42bc-9fde-1c1347a32774" providerId="ADAL" clId="{3A35FEB6-D186-4DFE-8550-C935A8639321}" dt="2026-03-17T13:37:45.988" v="5" actId="207"/>
+      <pc:docMkLst>
+        <pc:docMk/>
+      </pc:docMkLst>
+      <pc:sldChg chg="modSp mod">
+        <pc:chgData name="Chaoyi Sun (SDS,124090550)" userId="7336b744-5857-42bc-9fde-1c1347a32774" providerId="ADAL" clId="{3A35FEB6-D186-4DFE-8550-C935A8639321}" dt="2026-03-17T13:03:38.869" v="2" actId="20577"/>
+        <pc:sldMkLst>
+          <pc:docMk/>
+          <pc:sldMk cId="0" sldId="293"/>
+        </pc:sldMkLst>
+        <pc:spChg chg="mod">
+          <ac:chgData name="Chaoyi Sun (SDS,124090550)" userId="7336b744-5857-42bc-9fde-1c1347a32774" providerId="ADAL" clId="{3A35FEB6-D186-4DFE-8550-C935A8639321}" dt="2026-03-17T13:03:38.869" v="2" actId="20577"/>
+          <ac:spMkLst>
+            <pc:docMk/>
+            <pc:sldMk cId="0" sldId="293"/>
+            <ac:spMk id="353283" creationId="{00000000-0000-0000-0000-000000000000}"/>
+          </ac:spMkLst>
+        </pc:spChg>
+      </pc:sldChg>
+      <pc:sldChg chg="modSp mod">
+        <pc:chgData name="Chaoyi Sun (SDS,124090550)" userId="7336b744-5857-42bc-9fde-1c1347a32774" providerId="ADAL" clId="{3A35FEB6-D186-4DFE-8550-C935A8639321}" dt="2026-03-17T13:37:45.988" v="5" actId="207"/>
+        <pc:sldMkLst>
+          <pc:docMk/>
+          <pc:sldMk cId="0" sldId="527"/>
+        </pc:sldMkLst>
+        <pc:spChg chg="mod">
+          <ac:chgData name="Chaoyi Sun (SDS,124090550)" userId="7336b744-5857-42bc-9fde-1c1347a32774" providerId="ADAL" clId="{3A35FEB6-D186-4DFE-8550-C935A8639321}" dt="2026-03-17T13:37:45.988" v="5" actId="207"/>
+          <ac:spMkLst>
+            <pc:docMk/>
+            <pc:sldMk cId="0" sldId="527"/>
+            <ac:spMk id="3" creationId="{00000000-0000-0000-0000-000000000000}"/>
+          </ac:spMkLst>
+        </pc:spChg>
+      </pc:sldChg>
+      <pc:sldChg chg="modSp mod">
+        <pc:chgData name="Chaoyi Sun (SDS,124090550)" userId="7336b744-5857-42bc-9fde-1c1347a32774" providerId="ADAL" clId="{3A35FEB6-D186-4DFE-8550-C935A8639321}" dt="2026-03-17T13:37:45.854" v="4" actId="1076"/>
+        <pc:sldMkLst>
+          <pc:docMk/>
+          <pc:sldMk cId="220217435" sldId="673"/>
+        </pc:sldMkLst>
+        <pc:picChg chg="mod">
+          <ac:chgData name="Chaoyi Sun (SDS,124090550)" userId="7336b744-5857-42bc-9fde-1c1347a32774" providerId="ADAL" clId="{3A35FEB6-D186-4DFE-8550-C935A8639321}" dt="2026-03-17T13:37:45.854" v="4" actId="1076"/>
+          <ac:picMkLst>
+            <pc:docMk/>
+            <pc:sldMk cId="220217435" sldId="673"/>
+            <ac:picMk id="3" creationId="{E6005C9C-58FB-4DC1-B70D-7DDB4755C520}"/>
+          </ac:picMkLst>
+        </pc:picChg>
+      </pc:sldChg>
+    </pc:docChg>
+  </pc:docChgLst>
+</pc:chgInfo>
+</file>
+
 <file path=ppt/handoutMasters/handoutMaster1.xml><?xml version="1.0" encoding="utf-8"?>
 <p:handoutMaster xmlns:a="http://schemas.openxmlformats.org/drawingml/2006/main" xmlns:r="http://schemas.openxmlformats.org/officeDocument/2006/relationships" xmlns:p="http://schemas.openxmlformats.org/presentationml/2006/main">
   <p:cSld>
@@ -248,7 +310,7 @@
           <a:p>
             <a:fld id="{2F43A5A2-ABA0-4772-A51C-C5F6F247E980}" type="datetimeFigureOut">
               <a:rPr lang="en-US" smtClean="0"/>
-              <a:t>3/12/2026</a:t>
+              <a:t>3/17/2026</a:t>
             </a:fld>
             <a:endParaRPr lang="en-US"/>
           </a:p>
@@ -425,7 +487,7 @@
           <a:p>
             <a:fld id="{3C1F4A7B-8284-4E61-88F9-84C6CA6E31E8}" type="datetimeFigureOut">
               <a:rPr lang="zh-TW" altLang="en-US" smtClean="0"/>
-              <a:t>2026/3/12</a:t>
+              <a:t>2026/3/17</a:t>
             </a:fld>
             <a:endParaRPr lang="zh-TW" altLang="en-US"/>
           </a:p>
@@ -1004,6 +1066,113 @@
     <p:extLst>
       <p:ext uri="{BB962C8B-B14F-4D97-AF65-F5344CB8AC3E}">
         <p14:creationId xmlns:p14="http://schemas.microsoft.com/office/powerpoint/2010/main" val="1960106137"/>
+      </p:ext>
+    </p:extLst>
+  </p:cSld>
+  <p:clrMapOvr>
+    <a:masterClrMapping/>
+  </p:clrMapOvr>
+</p:notes>
+</file>
+
+<file path=ppt/notesSlides/notesSlide13.xml><?xml version="1.0" encoding="utf-8"?>
+<p:notes xmlns:a="http://schemas.openxmlformats.org/drawingml/2006/main" xmlns:r="http://schemas.openxmlformats.org/officeDocument/2006/relationships" xmlns:p="http://schemas.openxmlformats.org/presentationml/2006/main">
+  <p:cSld>
+    <p:spTree>
+      <p:nvGrpSpPr>
+        <p:cNvPr id="1" name=""/>
+        <p:cNvGrpSpPr/>
+        <p:nvPr/>
+      </p:nvGrpSpPr>
+      <p:grpSpPr>
+        <a:xfrm>
+          <a:off x="0" y="0"/>
+          <a:ext cx="0" cy="0"/>
+          <a:chOff x="0" y="0"/>
+          <a:chExt cx="0" cy="0"/>
+        </a:xfrm>
+      </p:grpSpPr>
+      <p:sp>
+        <p:nvSpPr>
+          <p:cNvPr id="153602" name="Rectangle 2"/>
+          <p:cNvSpPr>
+            <a:spLocks noGrp="1" noChangeArrowheads="1"/>
+          </p:cNvSpPr>
+          <p:nvPr>
+            <p:ph type="body" idx="1"/>
+          </p:nvPr>
+        </p:nvSpPr>
+        <p:spPr>
+          <a:xfrm>
+            <a:off x="742950" y="3227388"/>
+            <a:ext cx="8537575" cy="3057525"/>
+          </a:xfrm>
+          <a:noFill/>
+          <a:extLst>
+            <a:ext uri="{909E8E84-426E-40DD-AFC4-6F175D3DCCD1}">
+              <a14:hiddenFill xmlns:a14="http://schemas.microsoft.com/office/drawing/2010/main">
+                <a:solidFill>
+                  <a:srgbClr val="FFFFFF"/>
+                </a:solidFill>
+              </a14:hiddenFill>
+            </a:ext>
+            <a:ext uri="{91240B29-F687-4F45-9708-019B960494DF}">
+              <a14:hiddenLine xmlns:a14="http://schemas.microsoft.com/office/drawing/2010/main" w="9525">
+                <a:solidFill>
+                  <a:srgbClr val="000000"/>
+                </a:solidFill>
+                <a:miter lim="800000"/>
+                <a:headEnd/>
+                <a:tailEnd/>
+              </a14:hiddenLine>
+            </a:ext>
+          </a:extLst>
+        </p:spPr>
+        <p:txBody>
+          <a:bodyPr lIns="92075" tIns="46038" rIns="92075" bIns="46038"/>
+          <a:lstStyle/>
+          <a:p>
+            <a:endParaRPr lang="zh-TW" altLang="en-US"/>
+          </a:p>
+        </p:txBody>
+      </p:sp>
+      <p:sp>
+        <p:nvSpPr>
+          <p:cNvPr id="153603" name="Rectangle 3"/>
+          <p:cNvSpPr>
+            <a:spLocks noGrp="1" noRot="1" noChangeAspect="1" noChangeArrowheads="1" noTextEdit="1"/>
+          </p:cNvSpPr>
+          <p:nvPr>
+            <p:ph type="sldImg"/>
+          </p:nvPr>
+        </p:nvSpPr>
+        <p:spPr>
+          <a:xfrm>
+            <a:off x="2706688" y="436563"/>
+            <a:ext cx="4511675" cy="2538412"/>
+          </a:xfrm>
+          <a:noFill/>
+          <a:ln>
+            <a:noFill/>
+          </a:ln>
+          <a:extLst>
+            <a:ext uri="{91240B29-F687-4F45-9708-019B960494DF}">
+              <a14:hiddenLine xmlns:a14="http://schemas.microsoft.com/office/drawing/2010/main" w="12700">
+                <a:solidFill>
+                  <a:srgbClr val="000000"/>
+                </a:solidFill>
+                <a:miter lim="800000"/>
+                <a:headEnd/>
+                <a:tailEnd/>
+              </a14:hiddenLine>
+            </a:ext>
+          </a:extLst>
+        </p:spPr>
+      </p:sp>
+    </p:spTree>
+    <p:extLst>
+      <p:ext uri="{BB962C8B-B14F-4D97-AF65-F5344CB8AC3E}">
+        <p14:creationId xmlns:p14="http://schemas.microsoft.com/office/powerpoint/2010/main" val="3209440588"/>
       </p:ext>
     </p:extLst>
   </p:cSld>
@@ -7776,6 +7945,111 @@
         </p:blipFill>
         <p:spPr>
           <a:xfrm>
+            <a:off x="1047045" y="1070042"/>
+            <a:ext cx="10097909" cy="5077839"/>
+          </a:xfrm>
+          <a:prstGeom prst="rect">
+            <a:avLst/>
+          </a:prstGeom>
+        </p:spPr>
+      </p:pic>
+    </p:spTree>
+    <p:extLst>
+      <p:ext uri="{BB962C8B-B14F-4D97-AF65-F5344CB8AC3E}">
+        <p14:creationId xmlns:p14="http://schemas.microsoft.com/office/powerpoint/2010/main" val="2377473766"/>
+      </p:ext>
+    </p:extLst>
+  </p:cSld>
+  <p:clrMapOvr>
+    <a:masterClrMapping/>
+  </p:clrMapOvr>
+</p:sld>
+</file>
+
+<file path=ppt/slides/slide11.xml><?xml version="1.0" encoding="utf-8"?>
+<p:sld xmlns:a="http://schemas.openxmlformats.org/drawingml/2006/main" xmlns:r="http://schemas.openxmlformats.org/officeDocument/2006/relationships" xmlns:p="http://schemas.openxmlformats.org/presentationml/2006/main">
+  <p:cSld>
+    <p:spTree>
+      <p:nvGrpSpPr>
+        <p:cNvPr id="1" name=""/>
+        <p:cNvGrpSpPr/>
+        <p:nvPr/>
+      </p:nvGrpSpPr>
+      <p:grpSpPr>
+        <a:xfrm>
+          <a:off x="0" y="0"/>
+          <a:ext cx="0" cy="0"/>
+          <a:chOff x="0" y="0"/>
+          <a:chExt cx="0" cy="0"/>
+        </a:xfrm>
+      </p:grpSpPr>
+      <p:sp>
+        <p:nvSpPr>
+          <p:cNvPr id="2" name="Title 1"/>
+          <p:cNvSpPr>
+            <a:spLocks noGrp="1"/>
+          </p:cNvSpPr>
+          <p:nvPr>
+            <p:ph type="title"/>
+          </p:nvPr>
+        </p:nvSpPr>
+        <p:spPr/>
+        <p:txBody>
+          <a:bodyPr/>
+          <a:lstStyle/>
+          <a:p>
+            <a:r>
+              <a:rPr lang="en-US" dirty="0"/>
+              <a:t>Pipelined Laundry </a:t>
+            </a:r>
+          </a:p>
+        </p:txBody>
+      </p:sp>
+      <p:sp>
+        <p:nvSpPr>
+          <p:cNvPr id="6" name="灯片编号占位符 5"/>
+          <p:cNvSpPr>
+            <a:spLocks noGrp="1"/>
+          </p:cNvSpPr>
+          <p:nvPr>
+            <p:ph type="sldNum" sz="quarter" idx="10"/>
+          </p:nvPr>
+        </p:nvSpPr>
+        <p:spPr/>
+        <p:txBody>
+          <a:bodyPr/>
+          <a:lstStyle/>
+          <a:p>
+            <a:fld id="{D9B6BDF2-6896-4B98-8776-C18582F63BA5}" type="slidenum">
+              <a:rPr lang="zh-TW" altLang="en-US" smtClean="0"/>
+              <a:t>11</a:t>
+            </a:fld>
+            <a:endParaRPr lang="zh-TW" altLang="en-US"/>
+          </a:p>
+        </p:txBody>
+      </p:sp>
+      <p:pic>
+        <p:nvPicPr>
+          <p:cNvPr id="4" name="Picture 3">
+            <a:extLst>
+              <a:ext uri="{FF2B5EF4-FFF2-40B4-BE49-F238E27FC236}">
+                <a16:creationId xmlns:a16="http://schemas.microsoft.com/office/drawing/2014/main" id="{ADE6F661-4336-4D02-81B3-80A2E34D112C}"/>
+              </a:ext>
+            </a:extLst>
+          </p:cNvPr>
+          <p:cNvPicPr>
+            <a:picLocks noChangeAspect="1"/>
+          </p:cNvPicPr>
+          <p:nvPr/>
+        </p:nvPicPr>
+        <p:blipFill>
+          <a:blip r:embed="rId3"/>
+          <a:stretch>
+            <a:fillRect/>
+          </a:stretch>
+        </p:blipFill>
+        <p:spPr>
+          <a:xfrm>
             <a:off x="1124867" y="1107656"/>
             <a:ext cx="10097909" cy="5077839"/>
           </a:xfrm>
@@ -8061,7 +8335,7 @@
 </p:sld>
 </file>
 
-<file path=ppt/slides/slide11.xml><?xml version="1.0" encoding="utf-8"?>
+<file path=ppt/slides/slide12.xml><?xml version="1.0" encoding="utf-8"?>
 <p:sld xmlns:a="http://schemas.openxmlformats.org/drawingml/2006/main" xmlns:r="http://schemas.openxmlformats.org/officeDocument/2006/relationships" xmlns:p="http://schemas.openxmlformats.org/presentationml/2006/main">
   <p:cSld>
     <p:spTree>
@@ -8366,7 +8640,7 @@
           <a:p>
             <a:fld id="{D9B6BDF2-6896-4B98-8776-C18582F63BA5}" type="slidenum">
               <a:rPr lang="zh-TW" altLang="en-US" smtClean="0"/>
-              <a:t>11</a:t>
+              <a:t>12</a:t>
             </a:fld>
             <a:endParaRPr lang="zh-TW" altLang="en-US"/>
           </a:p>
@@ -8517,7 +8791,7 @@
 </p:sld>
 </file>
 
-<file path=ppt/slides/slide12.xml><?xml version="1.0" encoding="utf-8"?>
+<file path=ppt/slides/slide13.xml><?xml version="1.0" encoding="utf-8"?>
 <p:sld xmlns:a="http://schemas.openxmlformats.org/drawingml/2006/main" xmlns:r="http://schemas.openxmlformats.org/officeDocument/2006/relationships" xmlns:p="http://schemas.openxmlformats.org/presentationml/2006/main">
   <p:cSld>
     <p:spTree>
@@ -8558,7 +8832,7 @@
             <a:fld id="{D9B6BDF2-6896-4B98-8776-C18582F63BA5}" type="slidenum">
               <a:rPr lang="zh-TW" altLang="en-US" smtClean="0"/>
               <a:pPr/>
-              <a:t>12</a:t>
+              <a:t>13</a:t>
             </a:fld>
             <a:endParaRPr lang="zh-TW" altLang="en-US"/>
           </a:p>
@@ -8637,7 +8911,7 @@
 </p:sld>
 </file>
 
-<file path=ppt/slides/slide13.xml><?xml version="1.0" encoding="utf-8"?>
+<file path=ppt/slides/slide14.xml><?xml version="1.0" encoding="utf-8"?>
 <p:sld xmlns:a="http://schemas.openxmlformats.org/drawingml/2006/main" xmlns:r="http://schemas.openxmlformats.org/officeDocument/2006/relationships" xmlns:p="http://schemas.openxmlformats.org/presentationml/2006/main">
   <p:cSld>
     <p:spTree>
@@ -8693,7 +8967,7 @@
           <a:p>
             <a:fld id="{D9B6BDF2-6896-4B98-8776-C18582F63BA5}" type="slidenum">
               <a:rPr lang="zh-TW" altLang="en-US" smtClean="0"/>
-              <a:t>13</a:t>
+              <a:t>14</a:t>
             </a:fld>
             <a:endParaRPr lang="zh-TW" altLang="en-US"/>
           </a:p>
@@ -16238,7 +16512,7 @@
               <a:buNone/>
             </a:pPr>
             <a:r>
-              <a:rPr kumimoji="1" lang="en-US" altLang="zh-TW" sz="1600">
+              <a:rPr kumimoji="1" lang="en-US" altLang="zh-TW" sz="1600" dirty="0">
                 <a:latin typeface="Times New Roman" panose="02020503050405090304" pitchFamily="18" charset="0"/>
                 <a:ea typeface="新細明體" panose="02020500000000000000" pitchFamily="18" charset="-120"/>
               </a:rPr>
@@ -31096,7 +31370,7 @@
 </p:sld>
 </file>
 
-<file path=ppt/slides/slide14.xml><?xml version="1.0" encoding="utf-8"?>
+<file path=ppt/slides/slide15.xml><?xml version="1.0" encoding="utf-8"?>
 <p:sld xmlns:a="http://schemas.openxmlformats.org/drawingml/2006/main" xmlns:r="http://schemas.openxmlformats.org/officeDocument/2006/relationships" xmlns:p="http://schemas.openxmlformats.org/presentationml/2006/main">
   <p:cSld>
     <p:spTree>
@@ -31449,7 +31723,7 @@
           <a:p>
             <a:fld id="{D9B6BDF2-6896-4B98-8776-C18582F63BA5}" type="slidenum">
               <a:rPr lang="zh-TW" altLang="en-US" smtClean="0"/>
-              <a:t>14</a:t>
+              <a:t>15</a:t>
             </a:fld>
             <a:endParaRPr lang="zh-TW" altLang="en-US"/>
           </a:p>
@@ -31463,7 +31737,7 @@
 </p:sld>
 </file>
 
-<file path=ppt/slides/slide15.xml><?xml version="1.0" encoding="utf-8"?>
+<file path=ppt/slides/slide16.xml><?xml version="1.0" encoding="utf-8"?>
 <p:sld xmlns:a="http://schemas.openxmlformats.org/drawingml/2006/main" xmlns:r="http://schemas.openxmlformats.org/officeDocument/2006/relationships" xmlns:p="http://schemas.openxmlformats.org/presentationml/2006/main">
   <p:cSld>
     <p:spTree>
@@ -31715,571 +31989,9 @@
           <a:p>
             <a:fld id="{D9B6BDF2-6896-4B98-8776-C18582F63BA5}" type="slidenum">
               <a:rPr lang="zh-TW" altLang="en-US" smtClean="0"/>
-              <a:t>15</a:t>
+              <a:t>16</a:t>
             </a:fld>
             <a:endParaRPr lang="zh-TW" altLang="en-US"/>
-          </a:p>
-        </p:txBody>
-      </p:sp>
-    </p:spTree>
-  </p:cSld>
-  <p:clrMapOvr>
-    <a:masterClrMapping/>
-  </p:clrMapOvr>
-</p:sld>
-</file>
-
-<file path=ppt/slides/slide16.xml><?xml version="1.0" encoding="utf-8"?>
-<p:sld xmlns:a="http://schemas.openxmlformats.org/drawingml/2006/main" xmlns:r="http://schemas.openxmlformats.org/officeDocument/2006/relationships" xmlns:p="http://schemas.openxmlformats.org/presentationml/2006/main" showMasterPhAnim="0">
-  <p:cSld>
-    <p:spTree>
-      <p:nvGrpSpPr>
-        <p:cNvPr id="1" name=""/>
-        <p:cNvGrpSpPr/>
-        <p:nvPr/>
-      </p:nvGrpSpPr>
-      <p:grpSpPr>
-        <a:xfrm>
-          <a:off x="0" y="0"/>
-          <a:ext cx="0" cy="0"/>
-          <a:chOff x="0" y="0"/>
-          <a:chExt cx="0" cy="0"/>
-        </a:xfrm>
-      </p:grpSpPr>
-      <p:sp>
-        <p:nvSpPr>
-          <p:cNvPr id="11266" name="Rectangle 2"/>
-          <p:cNvSpPr>
-            <a:spLocks noGrp="1" noChangeArrowheads="1"/>
-          </p:cNvSpPr>
-          <p:nvPr>
-            <p:ph type="title"/>
-          </p:nvPr>
-        </p:nvSpPr>
-        <p:spPr>
-          <a:noFill/>
-        </p:spPr>
-        <p:txBody>
-          <a:bodyPr vert="horz" wrap="square" lIns="92075" tIns="46039" rIns="92075" bIns="46039" numCol="1" anchor="ctr" anchorCtr="0" compatLnSpc="1">
-            <a:prstTxWarp prst="textNoShape">
-              <a:avLst/>
-            </a:prstTxWarp>
-          </a:bodyPr>
-          <a:lstStyle/>
-          <a:p>
-            <a:r>
-              <a:rPr lang="en-US" altLang="zh-TW" dirty="0"/>
-              <a:t>Pipeline Lessons</a:t>
-            </a:r>
-          </a:p>
-        </p:txBody>
-      </p:sp>
-      <p:sp>
-        <p:nvSpPr>
-          <p:cNvPr id="353283" name="Rectangle 3"/>
-          <p:cNvSpPr>
-            <a:spLocks noGrp="1" noChangeArrowheads="1"/>
-          </p:cNvSpPr>
-          <p:nvPr>
-            <p:ph idx="1"/>
-          </p:nvPr>
-        </p:nvSpPr>
-        <p:spPr>
-          <a:xfrm>
-            <a:off x="612844" y="1299861"/>
-            <a:ext cx="10954744" cy="4721560"/>
-          </a:xfrm>
-          <a:noFill/>
-        </p:spPr>
-        <p:txBody>
-          <a:bodyPr vert="horz" wrap="square" lIns="92075" tIns="46039" rIns="92075" bIns="46039" numCol="1" anchor="t" anchorCtr="0" compatLnSpc="1">
-            <a:prstTxWarp prst="textNoShape">
-              <a:avLst/>
-            </a:prstTxWarp>
-          </a:bodyPr>
-          <a:lstStyle/>
-          <a:p>
-            <a:pPr marL="480895" indent="-480895">
-              <a:lnSpc>
-                <a:spcPct val="80000"/>
-              </a:lnSpc>
-            </a:pPr>
-            <a:r>
-              <a:rPr lang="en-US" altLang="zh-TW" sz="3200" dirty="0"/>
-              <a:t>Pipeline does not help the </a:t>
-            </a:r>
-            <a:r>
-              <a:rPr lang="en-US" altLang="zh-TW" sz="3200" dirty="0">
-                <a:solidFill>
-                  <a:srgbClr val="FF0000"/>
-                </a:solidFill>
-              </a:rPr>
-              <a:t>latency</a:t>
-            </a:r>
-            <a:r>
-              <a:rPr lang="en-US" altLang="zh-TW" sz="3200" dirty="0"/>
-              <a:t> of a single instruction, but the </a:t>
-            </a:r>
-            <a:r>
-              <a:rPr lang="en-US" altLang="zh-TW" sz="3200" dirty="0">
-                <a:solidFill>
-                  <a:srgbClr val="FF0000"/>
-                </a:solidFill>
-              </a:rPr>
-              <a:t>throughput</a:t>
-            </a:r>
-            <a:r>
-              <a:rPr lang="en-US" altLang="zh-TW" sz="3200" dirty="0"/>
-              <a:t> of the entire program</a:t>
-            </a:r>
-          </a:p>
-          <a:p>
-            <a:pPr marL="480895" indent="-480895">
-              <a:lnSpc>
-                <a:spcPct val="80000"/>
-              </a:lnSpc>
-            </a:pPr>
-            <a:r>
-              <a:rPr lang="en-US" altLang="zh-TW" sz="3200" dirty="0"/>
-              <a:t>Pipeline rate is limited by the </a:t>
-            </a:r>
-            <a:r>
-              <a:rPr lang="en-US" altLang="zh-TW" sz="3200" dirty="0">
-                <a:solidFill>
-                  <a:srgbClr val="FF0000"/>
-                </a:solidFill>
-              </a:rPr>
-              <a:t>slowest</a:t>
-            </a:r>
-            <a:r>
-              <a:rPr lang="en-US" altLang="zh-TW" sz="3200" dirty="0"/>
-              <a:t> stage; unbalanced stage length limits the perfect speedup</a:t>
-            </a:r>
-            <a:endParaRPr lang="en-US" altLang="zh-TW" sz="3200" dirty="0">
-              <a:solidFill>
-                <a:srgbClr val="008000"/>
-              </a:solidFill>
-            </a:endParaRPr>
-          </a:p>
-          <a:p>
-            <a:pPr marL="480895" indent="-480895">
-              <a:lnSpc>
-                <a:spcPct val="80000"/>
-              </a:lnSpc>
-            </a:pPr>
-            <a:r>
-              <a:rPr lang="en-US" altLang="zh-TW" sz="3200" dirty="0">
-                <a:solidFill>
-                  <a:srgbClr val="FF0000"/>
-                </a:solidFill>
-              </a:rPr>
-              <a:t>Multiple</a:t>
-            </a:r>
-            <a:r>
-              <a:rPr lang="en-US" altLang="zh-TW" sz="3200" dirty="0"/>
-              <a:t> tasks are working at the same time using different resources</a:t>
-            </a:r>
-          </a:p>
-          <a:p>
-            <a:pPr marL="480895" indent="-480895">
-              <a:lnSpc>
-                <a:spcPct val="80000"/>
-              </a:lnSpc>
-            </a:pPr>
-            <a:r>
-              <a:rPr lang="en-US" altLang="zh-TW" sz="3200" dirty="0"/>
-              <a:t>Potential/Ideal speedup = </a:t>
-            </a:r>
-            <a:r>
-              <a:rPr lang="en-US" altLang="zh-TW" sz="3200" dirty="0">
-                <a:solidFill>
-                  <a:srgbClr val="FF0000"/>
-                </a:solidFill>
-              </a:rPr>
-              <a:t>Number of pipeline stages</a:t>
-            </a:r>
-          </a:p>
-          <a:p>
-            <a:pPr marL="480895" indent="-480895">
-              <a:lnSpc>
-                <a:spcPct val="80000"/>
-              </a:lnSpc>
-            </a:pPr>
-            <a:r>
-              <a:rPr lang="en-US" altLang="zh-CN" sz="3200" dirty="0"/>
-              <a:t>T</a:t>
-            </a:r>
-            <a:r>
-              <a:rPr lang="en-US" altLang="zh-TW" sz="3200" dirty="0"/>
-              <a:t>ime to </a:t>
-            </a:r>
-            <a:r>
-              <a:rPr lang="en-US" altLang="zh-TW" sz="3200" dirty="0">
-                <a:solidFill>
-                  <a:schemeClr val="hlink"/>
-                </a:solidFill>
-              </a:rPr>
-              <a:t>“</a:t>
-            </a:r>
-            <a:r>
-              <a:rPr lang="en-US" altLang="zh-TW" sz="3200" dirty="0">
-                <a:solidFill>
-                  <a:srgbClr val="FF0000"/>
-                </a:solidFill>
-              </a:rPr>
-              <a:t>fill</a:t>
-            </a:r>
-            <a:r>
-              <a:rPr lang="en-US" altLang="zh-TW" sz="3200" dirty="0">
-                <a:solidFill>
-                  <a:schemeClr val="hlink"/>
-                </a:solidFill>
-              </a:rPr>
-              <a:t>”</a:t>
-            </a:r>
-            <a:r>
-              <a:rPr lang="en-US" altLang="zh-TW" sz="3200" dirty="0"/>
-              <a:t> &amp; </a:t>
-            </a:r>
-            <a:r>
-              <a:rPr lang="en-US" altLang="zh-TW" sz="3200" dirty="0">
-                <a:solidFill>
-                  <a:schemeClr val="hlink"/>
-                </a:solidFill>
-              </a:rPr>
-              <a:t>“</a:t>
-            </a:r>
-            <a:r>
-              <a:rPr lang="en-US" altLang="zh-TW" sz="3200" dirty="0">
-                <a:solidFill>
-                  <a:srgbClr val="FF0000"/>
-                </a:solidFill>
-              </a:rPr>
-              <a:t>drain</a:t>
-            </a:r>
-            <a:r>
-              <a:rPr lang="en-US" altLang="zh-TW" sz="3200" dirty="0">
-                <a:solidFill>
-                  <a:schemeClr val="hlink"/>
-                </a:solidFill>
-              </a:rPr>
-              <a:t>”</a:t>
-            </a:r>
-            <a:r>
-              <a:rPr lang="en-US" altLang="zh-TW" sz="3200" dirty="0"/>
-              <a:t> the pipeline reduces speedup</a:t>
-            </a:r>
-          </a:p>
-          <a:p>
-            <a:pPr marL="880926" lvl="1" indent="-480895">
-              <a:lnSpc>
-                <a:spcPct val="80000"/>
-              </a:lnSpc>
-            </a:pPr>
-            <a:r>
-              <a:rPr lang="en-US" altLang="zh-TW" sz="2400" dirty="0"/>
-              <a:t>Need to reduce possible fill and drain (e.g., I-cache misses and branch </a:t>
-            </a:r>
-          </a:p>
-          <a:p>
-            <a:pPr marL="400031" lvl="1" indent="0">
-              <a:lnSpc>
-                <a:spcPct val="80000"/>
-              </a:lnSpc>
-              <a:buNone/>
-            </a:pPr>
-            <a:r>
-              <a:rPr lang="en-US" altLang="zh-TW" sz="2400" dirty="0"/>
-              <a:t>	misprediction)</a:t>
-            </a:r>
-          </a:p>
-          <a:p>
-            <a:pPr marL="480895" indent="-480895">
-              <a:lnSpc>
-                <a:spcPct val="80000"/>
-              </a:lnSpc>
-            </a:pPr>
-            <a:r>
-              <a:rPr lang="en-US" altLang="zh-TW" sz="3200" dirty="0"/>
-              <a:t>Avoid pipeline </a:t>
-            </a:r>
-            <a:r>
-              <a:rPr lang="en-US" altLang="zh-TW" sz="3200" dirty="0">
-                <a:solidFill>
-                  <a:srgbClr val="FF0000"/>
-                </a:solidFill>
-              </a:rPr>
-              <a:t>bubbles</a:t>
-            </a:r>
-            <a:r>
-              <a:rPr lang="en-US" altLang="zh-TW" sz="3200" dirty="0"/>
-              <a:t> from data and control dependencies</a:t>
-            </a:r>
-          </a:p>
-        </p:txBody>
-      </p:sp>
-      <p:sp>
-        <p:nvSpPr>
-          <p:cNvPr id="11283" name="投影片編號版面配置區 1"/>
-          <p:cNvSpPr>
-            <a:spLocks noGrp="1"/>
-          </p:cNvSpPr>
-          <p:nvPr>
-            <p:ph type="sldNum" sz="quarter" idx="10"/>
-          </p:nvPr>
-        </p:nvSpPr>
-        <p:spPr>
-          <a:noFill/>
-          <a:extLst>
-            <a:ext uri="{909E8E84-426E-40DD-AFC4-6F175D3DCCD1}">
-              <a14:hiddenFill xmlns:a14="http://schemas.microsoft.com/office/drawing/2010/main">
-                <a:solidFill>
-                  <a:srgbClr val="FFFFFF"/>
-                </a:solidFill>
-              </a14:hiddenFill>
-            </a:ext>
-            <a:ext uri="{91240B29-F687-4F45-9708-019B960494DF}">
-              <a14:hiddenLine xmlns:a14="http://schemas.microsoft.com/office/drawing/2010/main" w="9525">
-                <a:solidFill>
-                  <a:srgbClr val="000000"/>
-                </a:solidFill>
-                <a:miter lim="800000"/>
-                <a:headEnd/>
-                <a:tailEnd/>
-              </a14:hiddenLine>
-            </a:ext>
-          </a:extLst>
-        </p:spPr>
-        <p:txBody>
-          <a:bodyPr/>
-          <a:lstStyle>
-            <a:lvl1pPr>
-              <a:lnSpc>
-                <a:spcPct val="90000"/>
-              </a:lnSpc>
-              <a:spcBef>
-                <a:spcPct val="15000"/>
-              </a:spcBef>
-              <a:buClr>
-                <a:schemeClr val="folHlink"/>
-              </a:buClr>
-              <a:buSzPct val="75000"/>
-              <a:buFont typeface="Wingdings" panose="05000000000000000000" pitchFamily="2" charset="2"/>
-              <a:buChar char="t"/>
-              <a:defRPr sz="2400" b="1">
-                <a:solidFill>
-                  <a:schemeClr val="tx1"/>
-                </a:solidFill>
-                <a:latin typeface="Century Gothic" panose="020B0502020202020204" pitchFamily="34" charset="0"/>
-                <a:ea typeface="標楷體" panose="02010601000101010101" pitchFamily="65" charset="-128"/>
-              </a:defRPr>
-            </a:lvl1pPr>
-            <a:lvl2pPr marL="743355" indent="-286166">
-              <a:lnSpc>
-                <a:spcPct val="90000"/>
-              </a:lnSpc>
-              <a:spcBef>
-                <a:spcPct val="15000"/>
-              </a:spcBef>
-              <a:buClr>
-                <a:srgbClr val="FF9900"/>
-              </a:buClr>
-              <a:buSzPct val="75000"/>
-              <a:buFont typeface="Wingdings" panose="05000000000000000000" pitchFamily="2" charset="2"/>
-              <a:buChar char="l"/>
-              <a:defRPr sz="2200" b="1">
-                <a:solidFill>
-                  <a:schemeClr val="tx1"/>
-                </a:solidFill>
-                <a:latin typeface="Century Gothic" panose="020B0502020202020204" pitchFamily="34" charset="0"/>
-                <a:ea typeface="標楷體" panose="02010601000101010101" pitchFamily="65" charset="-128"/>
-              </a:defRPr>
-            </a:lvl2pPr>
-            <a:lvl3pPr marL="1142971" indent="-228594">
-              <a:lnSpc>
-                <a:spcPct val="90000"/>
-              </a:lnSpc>
-              <a:spcBef>
-                <a:spcPct val="15000"/>
-              </a:spcBef>
-              <a:buClr>
-                <a:schemeClr val="accent2"/>
-              </a:buClr>
-              <a:buSzPct val="75000"/>
-              <a:buFont typeface="Wingdings" panose="05000000000000000000" pitchFamily="2" charset="2"/>
-              <a:buChar char="n"/>
-              <a:defRPr sz="2000" b="1">
-                <a:solidFill>
-                  <a:schemeClr val="tx1"/>
-                </a:solidFill>
-                <a:latin typeface="Century Gothic" panose="020B0502020202020204" pitchFamily="34" charset="0"/>
-                <a:ea typeface="標楷體" panose="02010601000101010101" pitchFamily="65" charset="-128"/>
-              </a:defRPr>
-            </a:lvl3pPr>
-            <a:lvl4pPr marL="1600160" indent="-228594">
-              <a:lnSpc>
-                <a:spcPct val="90000"/>
-              </a:lnSpc>
-              <a:spcBef>
-                <a:spcPct val="15000"/>
-              </a:spcBef>
-              <a:buClr>
-                <a:schemeClr val="hlink"/>
-              </a:buClr>
-              <a:buSzPct val="75000"/>
-              <a:buFont typeface="Monotype Sorts" pitchFamily="2" charset="2"/>
-              <a:buChar char="T"/>
-              <a:defRPr sz="2000">
-                <a:solidFill>
-                  <a:schemeClr val="tx1"/>
-                </a:solidFill>
-                <a:latin typeface="Century Gothic" panose="020B0502020202020204" pitchFamily="34" charset="0"/>
-                <a:ea typeface="標楷體" panose="02010601000101010101" pitchFamily="65" charset="-128"/>
-              </a:defRPr>
-            </a:lvl4pPr>
-            <a:lvl5pPr marL="2057349" indent="-228594">
-              <a:lnSpc>
-                <a:spcPct val="90000"/>
-              </a:lnSpc>
-              <a:spcBef>
-                <a:spcPct val="15000"/>
-              </a:spcBef>
-              <a:buClr>
-                <a:schemeClr val="accent1"/>
-              </a:buClr>
-              <a:buSzPct val="100000"/>
-              <a:buChar char="–"/>
-              <a:defRPr sz="2000">
-                <a:solidFill>
-                  <a:schemeClr val="tx1"/>
-                </a:solidFill>
-                <a:latin typeface="Century Gothic" panose="020B0502020202020204" pitchFamily="34" charset="0"/>
-                <a:ea typeface="標楷體" panose="02010601000101010101" pitchFamily="65" charset="-128"/>
-              </a:defRPr>
-            </a:lvl5pPr>
-            <a:lvl6pPr marL="2514537" indent="-228594" eaLnBrk="0" fontAlgn="base" hangingPunct="0">
-              <a:lnSpc>
-                <a:spcPct val="90000"/>
-              </a:lnSpc>
-              <a:spcBef>
-                <a:spcPct val="15000"/>
-              </a:spcBef>
-              <a:spcAft>
-                <a:spcPct val="0"/>
-              </a:spcAft>
-              <a:buClr>
-                <a:schemeClr val="accent1"/>
-              </a:buClr>
-              <a:buSzPct val="100000"/>
-              <a:buChar char="–"/>
-              <a:defRPr sz="2000">
-                <a:solidFill>
-                  <a:schemeClr val="tx1"/>
-                </a:solidFill>
-                <a:latin typeface="Century Gothic" panose="020B0502020202020204" pitchFamily="34" charset="0"/>
-                <a:ea typeface="標楷體" panose="02010601000101010101" pitchFamily="65" charset="-128"/>
-              </a:defRPr>
-            </a:lvl6pPr>
-            <a:lvl7pPr marL="2971726" indent="-228594" eaLnBrk="0" fontAlgn="base" hangingPunct="0">
-              <a:lnSpc>
-                <a:spcPct val="90000"/>
-              </a:lnSpc>
-              <a:spcBef>
-                <a:spcPct val="15000"/>
-              </a:spcBef>
-              <a:spcAft>
-                <a:spcPct val="0"/>
-              </a:spcAft>
-              <a:buClr>
-                <a:schemeClr val="accent1"/>
-              </a:buClr>
-              <a:buSzPct val="100000"/>
-              <a:buChar char="–"/>
-              <a:defRPr sz="2000">
-                <a:solidFill>
-                  <a:schemeClr val="tx1"/>
-                </a:solidFill>
-                <a:latin typeface="Century Gothic" panose="020B0502020202020204" pitchFamily="34" charset="0"/>
-                <a:ea typeface="標楷體" panose="02010601000101010101" pitchFamily="65" charset="-128"/>
-              </a:defRPr>
-            </a:lvl7pPr>
-            <a:lvl8pPr marL="3428914" indent="-228594" eaLnBrk="0" fontAlgn="base" hangingPunct="0">
-              <a:lnSpc>
-                <a:spcPct val="90000"/>
-              </a:lnSpc>
-              <a:spcBef>
-                <a:spcPct val="15000"/>
-              </a:spcBef>
-              <a:spcAft>
-                <a:spcPct val="0"/>
-              </a:spcAft>
-              <a:buClr>
-                <a:schemeClr val="accent1"/>
-              </a:buClr>
-              <a:buSzPct val="100000"/>
-              <a:buChar char="–"/>
-              <a:defRPr sz="2000">
-                <a:solidFill>
-                  <a:schemeClr val="tx1"/>
-                </a:solidFill>
-                <a:latin typeface="Century Gothic" panose="020B0502020202020204" pitchFamily="34" charset="0"/>
-                <a:ea typeface="標楷體" panose="02010601000101010101" pitchFamily="65" charset="-128"/>
-              </a:defRPr>
-            </a:lvl8pPr>
-            <a:lvl9pPr marL="3886103" indent="-228594" eaLnBrk="0" fontAlgn="base" hangingPunct="0">
-              <a:lnSpc>
-                <a:spcPct val="90000"/>
-              </a:lnSpc>
-              <a:spcBef>
-                <a:spcPct val="15000"/>
-              </a:spcBef>
-              <a:spcAft>
-                <a:spcPct val="0"/>
-              </a:spcAft>
-              <a:buClr>
-                <a:schemeClr val="accent1"/>
-              </a:buClr>
-              <a:buSzPct val="100000"/>
-              <a:buChar char="–"/>
-              <a:defRPr sz="2000">
-                <a:solidFill>
-                  <a:schemeClr val="tx1"/>
-                </a:solidFill>
-                <a:latin typeface="Century Gothic" panose="020B0502020202020204" pitchFamily="34" charset="0"/>
-                <a:ea typeface="標楷體" panose="02010601000101010101" pitchFamily="65" charset="-128"/>
-              </a:defRPr>
-            </a:lvl9pPr>
-          </a:lstStyle>
-          <a:p>
-            <a:pPr>
-              <a:lnSpc>
-                <a:spcPct val="100000"/>
-              </a:lnSpc>
-              <a:spcBef>
-                <a:spcPct val="0"/>
-              </a:spcBef>
-              <a:buClrTx/>
-              <a:buSzTx/>
-              <a:buFontTx/>
-              <a:buNone/>
-            </a:pPr>
-            <a:fld id="{3B372B80-DEA1-4621-B194-1DB2F08AB0C3}" type="slidenum">
-              <a:rPr lang="zh-TW" altLang="en-US" sz="1400" b="0">
-                <a:solidFill>
-                  <a:schemeClr val="bg1"/>
-                </a:solidFill>
-                <a:latin typeface="Arial" panose="020B0604020202090204" pitchFamily="34" charset="0"/>
-                <a:ea typeface="新細明體" panose="02020500000000000000" pitchFamily="18" charset="-120"/>
-              </a:rPr>
-              <a:t>16</a:t>
-            </a:fld>
-            <a:endParaRPr lang="en-US" altLang="zh-TW" sz="1400" b="0" dirty="0">
-              <a:solidFill>
-                <a:schemeClr val="bg1"/>
-              </a:solidFill>
-              <a:latin typeface="Arial" panose="020B0604020202090204" pitchFamily="34" charset="0"/>
-              <a:ea typeface="新細明體" panose="02020500000000000000" pitchFamily="18" charset="-120"/>
-            </a:endParaRPr>
           </a:p>
         </p:txBody>
       </p:sp>
@@ -32331,7 +32043,7 @@
           <a:p>
             <a:r>
               <a:rPr lang="en-US" altLang="zh-TW" dirty="0"/>
-              <a:t>Pipeline Everywhere</a:t>
+              <a:t>Pipeline Lessons</a:t>
             </a:r>
           </a:p>
         </p:txBody>
@@ -32368,7 +32080,168 @@
             </a:pPr>
             <a:r>
               <a:rPr lang="en-US" altLang="zh-TW" sz="3200" dirty="0"/>
-              <a:t>Aside from the instruction pipeline, many other areas have implemented pipelined architectures.</a:t>
+              <a:t>Pipeline does not help the </a:t>
+            </a:r>
+            <a:r>
+              <a:rPr lang="en-US" altLang="zh-TW" sz="3200" dirty="0">
+                <a:solidFill>
+                  <a:srgbClr val="FF0000"/>
+                </a:solidFill>
+              </a:rPr>
+              <a:t>latency</a:t>
+            </a:r>
+            <a:r>
+              <a:rPr lang="en-US" altLang="zh-TW" sz="3200" dirty="0"/>
+              <a:t> of a single instruction, but the </a:t>
+            </a:r>
+            <a:r>
+              <a:rPr lang="en-US" altLang="zh-TW" sz="3200" dirty="0">
+                <a:solidFill>
+                  <a:srgbClr val="FF0000"/>
+                </a:solidFill>
+              </a:rPr>
+              <a:t>throughput</a:t>
+            </a:r>
+            <a:r>
+              <a:rPr lang="en-US" altLang="zh-TW" sz="3200" dirty="0"/>
+              <a:t> of the entire program</a:t>
+            </a:r>
+          </a:p>
+          <a:p>
+            <a:pPr marL="480895" indent="-480895">
+              <a:lnSpc>
+                <a:spcPct val="80000"/>
+              </a:lnSpc>
+            </a:pPr>
+            <a:r>
+              <a:rPr lang="en-US" altLang="zh-TW" sz="3200" dirty="0"/>
+              <a:t>Pipeline rate is limited by the </a:t>
+            </a:r>
+            <a:r>
+              <a:rPr lang="en-US" altLang="zh-TW" sz="3200" dirty="0">
+                <a:solidFill>
+                  <a:srgbClr val="FF0000"/>
+                </a:solidFill>
+              </a:rPr>
+              <a:t>slowest</a:t>
+            </a:r>
+            <a:r>
+              <a:rPr lang="en-US" altLang="zh-TW" sz="3200" dirty="0"/>
+              <a:t> stage; unbalanced stage length limits the perfect speedup</a:t>
+            </a:r>
+            <a:endParaRPr lang="en-US" altLang="zh-TW" sz="3200" dirty="0">
+              <a:solidFill>
+                <a:srgbClr val="008000"/>
+              </a:solidFill>
+            </a:endParaRPr>
+          </a:p>
+          <a:p>
+            <a:pPr marL="480895" indent="-480895">
+              <a:lnSpc>
+                <a:spcPct val="80000"/>
+              </a:lnSpc>
+            </a:pPr>
+            <a:r>
+              <a:rPr lang="en-US" altLang="zh-TW" sz="3200" dirty="0">
+                <a:solidFill>
+                  <a:srgbClr val="FF0000"/>
+                </a:solidFill>
+              </a:rPr>
+              <a:t>Multiple</a:t>
+            </a:r>
+            <a:r>
+              <a:rPr lang="en-US" altLang="zh-TW" sz="3200" dirty="0"/>
+              <a:t> tasks are working at the same time using different resources</a:t>
+            </a:r>
+          </a:p>
+          <a:p>
+            <a:pPr marL="480895" indent="-480895">
+              <a:lnSpc>
+                <a:spcPct val="80000"/>
+              </a:lnSpc>
+            </a:pPr>
+            <a:r>
+              <a:rPr lang="en-US" altLang="zh-TW" sz="3200" dirty="0"/>
+              <a:t>Potential/Ideal speedup = </a:t>
+            </a:r>
+            <a:r>
+              <a:rPr lang="en-US" altLang="zh-TW" sz="3200" dirty="0">
+                <a:solidFill>
+                  <a:srgbClr val="FF0000"/>
+                </a:solidFill>
+              </a:rPr>
+              <a:t>Number of pipeline stages</a:t>
+            </a:r>
+          </a:p>
+          <a:p>
+            <a:pPr marL="480895" indent="-480895">
+              <a:lnSpc>
+                <a:spcPct val="80000"/>
+              </a:lnSpc>
+            </a:pPr>
+            <a:r>
+              <a:rPr lang="en-US" altLang="zh-CN" sz="3200" dirty="0"/>
+              <a:t>T</a:t>
+            </a:r>
+            <a:r>
+              <a:rPr lang="en-US" altLang="zh-TW" sz="3200" dirty="0"/>
+              <a:t>ime to </a:t>
+            </a:r>
+            <a:r>
+              <a:rPr lang="en-US" altLang="zh-TW" sz="3200" dirty="0">
+                <a:solidFill>
+                  <a:schemeClr val="hlink"/>
+                </a:solidFill>
+              </a:rPr>
+              <a:t>“</a:t>
+            </a:r>
+            <a:r>
+              <a:rPr lang="en-US" altLang="zh-TW" sz="3200" dirty="0">
+                <a:solidFill>
+                  <a:srgbClr val="FF0000"/>
+                </a:solidFill>
+              </a:rPr>
+              <a:t>fill</a:t>
+            </a:r>
+            <a:r>
+              <a:rPr lang="en-US" altLang="zh-TW" sz="3200" dirty="0">
+                <a:solidFill>
+                  <a:schemeClr val="hlink"/>
+                </a:solidFill>
+              </a:rPr>
+              <a:t>”</a:t>
+            </a:r>
+            <a:r>
+              <a:rPr lang="en-US" altLang="zh-TW" sz="3200" dirty="0"/>
+              <a:t> &amp; </a:t>
+            </a:r>
+            <a:r>
+              <a:rPr lang="en-US" altLang="zh-TW" sz="3200" dirty="0">
+                <a:solidFill>
+                  <a:schemeClr val="hlink"/>
+                </a:solidFill>
+              </a:rPr>
+              <a:t>“</a:t>
+            </a:r>
+            <a:r>
+              <a:rPr lang="en-US" altLang="zh-TW" sz="3200" dirty="0">
+                <a:solidFill>
+                  <a:srgbClr val="FF0000"/>
+                </a:solidFill>
+              </a:rPr>
+              <a:t>drain</a:t>
+            </a:r>
+            <a:r>
+              <a:rPr lang="en-US" altLang="zh-TW" sz="3200" dirty="0">
+                <a:solidFill>
+                  <a:schemeClr val="hlink"/>
+                </a:solidFill>
+              </a:rPr>
+              <a:t>”</a:t>
+            </a:r>
+            <a:r>
+              <a:rPr lang="en-US" altLang="zh-TW" sz="3200" dirty="0"/>
+              <a:t> the pipeline reduces speedup</a:t>
             </a:r>
           </a:p>
           <a:p>
@@ -32379,112 +32252,19 @@
             </a:pPr>
             <a:r>
               <a:rPr lang="en-US" altLang="zh-TW" sz="2400" dirty="0"/>
-              <a:t>DRAM pipeline</a:t>
-            </a:r>
-          </a:p>
-          <a:p>
-            <a:pPr marL="1142961" lvl="2" indent="-342900">
+              <a:t>Need to reduce possible fill and drain (e.g., I-cache misses and branch </a:t>
+            </a:r>
+          </a:p>
+          <a:p>
+            <a:pPr marL="400031" lvl="1" indent="0">
               <a:lnSpc>
                 <a:spcPct val="80000"/>
               </a:lnSpc>
-              <a:buFont typeface="Arial" panose="020B0604020202020204" pitchFamily="34" charset="0"/>
-              <a:buChar char="•"/>
+              <a:buNone/>
             </a:pPr>
             <a:r>
-              <a:rPr lang="en-US" altLang="zh-TW" sz="2000" dirty="0"/>
-              <a:t>Row activation, column selection, data transfer</a:t>
-            </a:r>
-          </a:p>
-          <a:p>
-            <a:pPr marL="880926" lvl="1" indent="-480895">
-              <a:lnSpc>
-                <a:spcPct val="80000"/>
-              </a:lnSpc>
-            </a:pPr>
-            <a:r>
               <a:rPr lang="en-US" altLang="zh-TW" sz="2400" dirty="0"/>
-              <a:t>Cache pipeline</a:t>
-            </a:r>
-          </a:p>
-          <a:p>
-            <a:pPr marL="1142961" lvl="2" indent="-342900">
-              <a:lnSpc>
-                <a:spcPct val="80000"/>
-              </a:lnSpc>
-              <a:buFont typeface="Arial" panose="020B0604020202020204" pitchFamily="34" charset="0"/>
-              <a:buChar char="•"/>
-            </a:pPr>
-            <a:r>
-              <a:rPr lang="en-US" altLang="zh-TW" sz="2000" dirty="0"/>
-              <a:t>Address decoding, Way selection, tag match, data retrieval</a:t>
-            </a:r>
-          </a:p>
-          <a:p>
-            <a:pPr marL="880926" lvl="1" indent="-480895">
-              <a:lnSpc>
-                <a:spcPct val="80000"/>
-              </a:lnSpc>
-            </a:pPr>
-            <a:r>
-              <a:rPr lang="en-US" altLang="zh-TW" sz="2400" dirty="0"/>
-              <a:t>Floating point unit pipeline</a:t>
-            </a:r>
-          </a:p>
-          <a:p>
-            <a:pPr marL="1280956" lvl="2" indent="-480895">
-              <a:lnSpc>
-                <a:spcPct val="80000"/>
-              </a:lnSpc>
-            </a:pPr>
-            <a:r>
-              <a:rPr lang="en-US" altLang="zh-TW" sz="2000" dirty="0"/>
-              <a:t>Exponent alignment, operation, normalization, rounding, …</a:t>
-            </a:r>
-          </a:p>
-          <a:p>
-            <a:pPr marL="880926" lvl="1" indent="-480895">
-              <a:lnSpc>
-                <a:spcPct val="80000"/>
-              </a:lnSpc>
-            </a:pPr>
-            <a:r>
-              <a:rPr lang="en-US" altLang="zh-TW" sz="2400" dirty="0"/>
-              <a:t>GPU pipeline</a:t>
-            </a:r>
-          </a:p>
-          <a:p>
-            <a:pPr marL="1280956" lvl="2" indent="-480895">
-              <a:lnSpc>
-                <a:spcPct val="80000"/>
-              </a:lnSpc>
-              <a:buFont typeface="Arial" panose="020B0604020202020204" pitchFamily="34" charset="0"/>
-              <a:buChar char="•"/>
-            </a:pPr>
-            <a:r>
-              <a:rPr lang="en-US" altLang="zh-TW" sz="2000" dirty="0"/>
-              <a:t>vertex processing, rasterization, fragment processing</a:t>
-            </a:r>
-          </a:p>
-          <a:p>
-            <a:pPr marL="880926" lvl="1" indent="-480895">
-              <a:lnSpc>
-                <a:spcPct val="80000"/>
-              </a:lnSpc>
-            </a:pPr>
-            <a:r>
-              <a:rPr lang="en-US" altLang="zh-TW" sz="2400" dirty="0"/>
-              <a:t>Network pipeline</a:t>
-            </a:r>
-          </a:p>
-          <a:p>
-            <a:pPr marL="1280956" lvl="2" indent="-480895">
-              <a:lnSpc>
-                <a:spcPct val="80000"/>
-              </a:lnSpc>
-            </a:pPr>
-            <a:r>
-              <a:rPr lang="en-US" sz="2000" dirty="0"/>
-              <a:t>packet header processing, routing table lookup, and packet forwarding</a:t>
+              <a:t>	misprediction)</a:t>
             </a:r>
           </a:p>
           <a:p>
@@ -32494,8 +32274,20 @@
               </a:lnSpc>
             </a:pPr>
             <a:r>
-              <a:rPr lang="en-US" altLang="zh-TW" sz="3066" dirty="0"/>
-              <a:t>If you need to have a higher throughput, think about pipelining.</a:t>
+              <a:rPr lang="en-US" altLang="zh-TW" sz="3200" dirty="0"/>
+              <a:t>Avoid pipeline </a:t>
+            </a:r>
+            <a:r>
+              <a:rPr lang="en-US" altLang="zh-TW" sz="3200" dirty="0">
+                <a:solidFill>
+                  <a:srgbClr val="FF0000"/>
+                </a:solidFill>
+              </a:rPr>
+              <a:t>bubbles</a:t>
+            </a:r>
+            <a:r>
+              <a:rPr lang="en-US" altLang="zh-TW" sz="3200" dirty="0"/>
+              <a:t> from data and control dependencies</a:t>
             </a:r>
           </a:p>
         </p:txBody>
@@ -32766,6 +32558,488 @@
         </p:txBody>
       </p:sp>
     </p:spTree>
+  </p:cSld>
+  <p:clrMapOvr>
+    <a:masterClrMapping/>
+  </p:clrMapOvr>
+</p:sld>
+</file>
+
+<file path=ppt/slides/slide18.xml><?xml version="1.0" encoding="utf-8"?>
+<p:sld xmlns:a="http://schemas.openxmlformats.org/drawingml/2006/main" xmlns:r="http://schemas.openxmlformats.org/officeDocument/2006/relationships" xmlns:p="http://schemas.openxmlformats.org/presentationml/2006/main" showMasterPhAnim="0">
+  <p:cSld>
+    <p:spTree>
+      <p:nvGrpSpPr>
+        <p:cNvPr id="1" name=""/>
+        <p:cNvGrpSpPr/>
+        <p:nvPr/>
+      </p:nvGrpSpPr>
+      <p:grpSpPr>
+        <a:xfrm>
+          <a:off x="0" y="0"/>
+          <a:ext cx="0" cy="0"/>
+          <a:chOff x="0" y="0"/>
+          <a:chExt cx="0" cy="0"/>
+        </a:xfrm>
+      </p:grpSpPr>
+      <p:sp>
+        <p:nvSpPr>
+          <p:cNvPr id="11266" name="Rectangle 2"/>
+          <p:cNvSpPr>
+            <a:spLocks noGrp="1" noChangeArrowheads="1"/>
+          </p:cNvSpPr>
+          <p:nvPr>
+            <p:ph type="title"/>
+          </p:nvPr>
+        </p:nvSpPr>
+        <p:spPr>
+          <a:noFill/>
+        </p:spPr>
+        <p:txBody>
+          <a:bodyPr vert="horz" wrap="square" lIns="92075" tIns="46039" rIns="92075" bIns="46039" numCol="1" anchor="ctr" anchorCtr="0" compatLnSpc="1">
+            <a:prstTxWarp prst="textNoShape">
+              <a:avLst/>
+            </a:prstTxWarp>
+          </a:bodyPr>
+          <a:lstStyle/>
+          <a:p>
+            <a:r>
+              <a:rPr lang="en-US" altLang="zh-TW" dirty="0"/>
+              <a:t>Pipeline Everywhere</a:t>
+            </a:r>
+          </a:p>
+        </p:txBody>
+      </p:sp>
+      <p:sp>
+        <p:nvSpPr>
+          <p:cNvPr id="353283" name="Rectangle 3"/>
+          <p:cNvSpPr>
+            <a:spLocks noGrp="1" noChangeArrowheads="1"/>
+          </p:cNvSpPr>
+          <p:nvPr>
+            <p:ph idx="1"/>
+          </p:nvPr>
+        </p:nvSpPr>
+        <p:spPr>
+          <a:xfrm>
+            <a:off x="612844" y="1299861"/>
+            <a:ext cx="10954744" cy="4721560"/>
+          </a:xfrm>
+          <a:noFill/>
+        </p:spPr>
+        <p:txBody>
+          <a:bodyPr vert="horz" wrap="square" lIns="92075" tIns="46039" rIns="92075" bIns="46039" numCol="1" anchor="t" anchorCtr="0" compatLnSpc="1">
+            <a:prstTxWarp prst="textNoShape">
+              <a:avLst/>
+            </a:prstTxWarp>
+          </a:bodyPr>
+          <a:lstStyle/>
+          <a:p>
+            <a:pPr marL="480895" indent="-480895">
+              <a:lnSpc>
+                <a:spcPct val="80000"/>
+              </a:lnSpc>
+            </a:pPr>
+            <a:r>
+              <a:rPr lang="en-US" altLang="zh-TW" sz="3200" dirty="0"/>
+              <a:t>Aside from the instruction pipeline, many other areas have implemented pipelined architectures.</a:t>
+            </a:r>
+          </a:p>
+          <a:p>
+            <a:pPr marL="880926" lvl="1" indent="-480895">
+              <a:lnSpc>
+                <a:spcPct val="80000"/>
+              </a:lnSpc>
+            </a:pPr>
+            <a:r>
+              <a:rPr lang="en-US" altLang="zh-TW" sz="2400" dirty="0"/>
+              <a:t>DRAM pipeline</a:t>
+            </a:r>
+          </a:p>
+          <a:p>
+            <a:pPr marL="1142961" lvl="2" indent="-342900">
+              <a:lnSpc>
+                <a:spcPct val="80000"/>
+              </a:lnSpc>
+              <a:buFont typeface="Arial" panose="020B0604020202020204" pitchFamily="34" charset="0"/>
+              <a:buChar char="•"/>
+            </a:pPr>
+            <a:r>
+              <a:rPr lang="en-US" altLang="zh-TW" sz="2000" dirty="0"/>
+              <a:t>Row activation, column selection, data transfer</a:t>
+            </a:r>
+          </a:p>
+          <a:p>
+            <a:pPr marL="880926" lvl="1" indent="-480895">
+              <a:lnSpc>
+                <a:spcPct val="80000"/>
+              </a:lnSpc>
+            </a:pPr>
+            <a:r>
+              <a:rPr lang="en-US" altLang="zh-TW" sz="2400" dirty="0"/>
+              <a:t>Cache pipeline</a:t>
+            </a:r>
+          </a:p>
+          <a:p>
+            <a:pPr marL="1142961" lvl="2" indent="-342900">
+              <a:lnSpc>
+                <a:spcPct val="80000"/>
+              </a:lnSpc>
+              <a:buFont typeface="Arial" panose="020B0604020202020204" pitchFamily="34" charset="0"/>
+              <a:buChar char="•"/>
+            </a:pPr>
+            <a:r>
+              <a:rPr lang="en-US" altLang="zh-TW" sz="2000" dirty="0"/>
+              <a:t>Address decoding, Way selection, tag match, data retrieval</a:t>
+            </a:r>
+          </a:p>
+          <a:p>
+            <a:pPr marL="880926" lvl="1" indent="-480895">
+              <a:lnSpc>
+                <a:spcPct val="80000"/>
+              </a:lnSpc>
+            </a:pPr>
+            <a:r>
+              <a:rPr lang="en-US" altLang="zh-TW" sz="2400" dirty="0"/>
+              <a:t>Floating point unit pipeline</a:t>
+            </a:r>
+          </a:p>
+          <a:p>
+            <a:pPr marL="1280956" lvl="2" indent="-480895">
+              <a:lnSpc>
+                <a:spcPct val="80000"/>
+              </a:lnSpc>
+            </a:pPr>
+            <a:r>
+              <a:rPr lang="en-US" altLang="zh-TW" sz="2000" dirty="0"/>
+              <a:t>Exponent alignment, operation, normalization, rounding, …</a:t>
+            </a:r>
+          </a:p>
+          <a:p>
+            <a:pPr marL="880926" lvl="1" indent="-480895">
+              <a:lnSpc>
+                <a:spcPct val="80000"/>
+              </a:lnSpc>
+            </a:pPr>
+            <a:r>
+              <a:rPr lang="en-US" altLang="zh-TW" sz="2400" dirty="0"/>
+              <a:t>GPU pipeline</a:t>
+            </a:r>
+          </a:p>
+          <a:p>
+            <a:pPr marL="1280956" lvl="2" indent="-480895">
+              <a:lnSpc>
+                <a:spcPct val="80000"/>
+              </a:lnSpc>
+              <a:buFont typeface="Arial" panose="020B0604020202020204" pitchFamily="34" charset="0"/>
+              <a:buChar char="•"/>
+            </a:pPr>
+            <a:r>
+              <a:rPr lang="en-US" altLang="zh-TW" sz="2000" dirty="0"/>
+              <a:t>vertex processing, rasterization, fragment processing</a:t>
+            </a:r>
+          </a:p>
+          <a:p>
+            <a:pPr marL="880926" lvl="1" indent="-480895">
+              <a:lnSpc>
+                <a:spcPct val="80000"/>
+              </a:lnSpc>
+            </a:pPr>
+            <a:r>
+              <a:rPr lang="en-US" altLang="zh-TW" sz="2400" dirty="0"/>
+              <a:t>Network pipeline</a:t>
+            </a:r>
+          </a:p>
+          <a:p>
+            <a:pPr marL="1280956" lvl="2" indent="-480895">
+              <a:lnSpc>
+                <a:spcPct val="80000"/>
+              </a:lnSpc>
+            </a:pPr>
+            <a:r>
+              <a:rPr lang="en-US" sz="2000" dirty="0"/>
+              <a:t>packet header processing, routing table lookup, and packet forwarding</a:t>
+            </a:r>
+          </a:p>
+          <a:p>
+            <a:pPr marL="480895" indent="-480895">
+              <a:lnSpc>
+                <a:spcPct val="80000"/>
+              </a:lnSpc>
+            </a:pPr>
+            <a:r>
+              <a:rPr lang="en-US" altLang="zh-TW" sz="3066" dirty="0"/>
+              <a:t>If you need to have a higher throughput, think about pipelining.</a:t>
+            </a:r>
+          </a:p>
+        </p:txBody>
+      </p:sp>
+      <p:sp>
+        <p:nvSpPr>
+          <p:cNvPr id="11283" name="投影片編號版面配置區 1"/>
+          <p:cNvSpPr>
+            <a:spLocks noGrp="1"/>
+          </p:cNvSpPr>
+          <p:nvPr>
+            <p:ph type="sldNum" sz="quarter" idx="10"/>
+          </p:nvPr>
+        </p:nvSpPr>
+        <p:spPr>
+          <a:noFill/>
+          <a:extLst>
+            <a:ext uri="{909E8E84-426E-40DD-AFC4-6F175D3DCCD1}">
+              <a14:hiddenFill xmlns:a14="http://schemas.microsoft.com/office/drawing/2010/main">
+                <a:solidFill>
+                  <a:srgbClr val="FFFFFF"/>
+                </a:solidFill>
+              </a14:hiddenFill>
+            </a:ext>
+            <a:ext uri="{91240B29-F687-4F45-9708-019B960494DF}">
+              <a14:hiddenLine xmlns:a14="http://schemas.microsoft.com/office/drawing/2010/main" w="9525">
+                <a:solidFill>
+                  <a:srgbClr val="000000"/>
+                </a:solidFill>
+                <a:miter lim="800000"/>
+                <a:headEnd/>
+                <a:tailEnd/>
+              </a14:hiddenLine>
+            </a:ext>
+          </a:extLst>
+        </p:spPr>
+        <p:txBody>
+          <a:bodyPr/>
+          <a:lstStyle>
+            <a:lvl1pPr>
+              <a:lnSpc>
+                <a:spcPct val="90000"/>
+              </a:lnSpc>
+              <a:spcBef>
+                <a:spcPct val="15000"/>
+              </a:spcBef>
+              <a:buClr>
+                <a:schemeClr val="folHlink"/>
+              </a:buClr>
+              <a:buSzPct val="75000"/>
+              <a:buFont typeface="Wingdings" panose="05000000000000000000" pitchFamily="2" charset="2"/>
+              <a:buChar char="t"/>
+              <a:defRPr sz="2400" b="1">
+                <a:solidFill>
+                  <a:schemeClr val="tx1"/>
+                </a:solidFill>
+                <a:latin typeface="Century Gothic" panose="020B0502020202020204" pitchFamily="34" charset="0"/>
+                <a:ea typeface="標楷體" panose="02010601000101010101" pitchFamily="65" charset="-128"/>
+              </a:defRPr>
+            </a:lvl1pPr>
+            <a:lvl2pPr marL="743355" indent="-286166">
+              <a:lnSpc>
+                <a:spcPct val="90000"/>
+              </a:lnSpc>
+              <a:spcBef>
+                <a:spcPct val="15000"/>
+              </a:spcBef>
+              <a:buClr>
+                <a:srgbClr val="FF9900"/>
+              </a:buClr>
+              <a:buSzPct val="75000"/>
+              <a:buFont typeface="Wingdings" panose="05000000000000000000" pitchFamily="2" charset="2"/>
+              <a:buChar char="l"/>
+              <a:defRPr sz="2200" b="1">
+                <a:solidFill>
+                  <a:schemeClr val="tx1"/>
+                </a:solidFill>
+                <a:latin typeface="Century Gothic" panose="020B0502020202020204" pitchFamily="34" charset="0"/>
+                <a:ea typeface="標楷體" panose="02010601000101010101" pitchFamily="65" charset="-128"/>
+              </a:defRPr>
+            </a:lvl2pPr>
+            <a:lvl3pPr marL="1142971" indent="-228594">
+              <a:lnSpc>
+                <a:spcPct val="90000"/>
+              </a:lnSpc>
+              <a:spcBef>
+                <a:spcPct val="15000"/>
+              </a:spcBef>
+              <a:buClr>
+                <a:schemeClr val="accent2"/>
+              </a:buClr>
+              <a:buSzPct val="75000"/>
+              <a:buFont typeface="Wingdings" panose="05000000000000000000" pitchFamily="2" charset="2"/>
+              <a:buChar char="n"/>
+              <a:defRPr sz="2000" b="1">
+                <a:solidFill>
+                  <a:schemeClr val="tx1"/>
+                </a:solidFill>
+                <a:latin typeface="Century Gothic" panose="020B0502020202020204" pitchFamily="34" charset="0"/>
+                <a:ea typeface="標楷體" panose="02010601000101010101" pitchFamily="65" charset="-128"/>
+              </a:defRPr>
+            </a:lvl3pPr>
+            <a:lvl4pPr marL="1600160" indent="-228594">
+              <a:lnSpc>
+                <a:spcPct val="90000"/>
+              </a:lnSpc>
+              <a:spcBef>
+                <a:spcPct val="15000"/>
+              </a:spcBef>
+              <a:buClr>
+                <a:schemeClr val="hlink"/>
+              </a:buClr>
+              <a:buSzPct val="75000"/>
+              <a:buFont typeface="Monotype Sorts" pitchFamily="2" charset="2"/>
+              <a:buChar char="T"/>
+              <a:defRPr sz="2000">
+                <a:solidFill>
+                  <a:schemeClr val="tx1"/>
+                </a:solidFill>
+                <a:latin typeface="Century Gothic" panose="020B0502020202020204" pitchFamily="34" charset="0"/>
+                <a:ea typeface="標楷體" panose="02010601000101010101" pitchFamily="65" charset="-128"/>
+              </a:defRPr>
+            </a:lvl4pPr>
+            <a:lvl5pPr marL="2057349" indent="-228594">
+              <a:lnSpc>
+                <a:spcPct val="90000"/>
+              </a:lnSpc>
+              <a:spcBef>
+                <a:spcPct val="15000"/>
+              </a:spcBef>
+              <a:buClr>
+                <a:schemeClr val="accent1"/>
+              </a:buClr>
+              <a:buSzPct val="100000"/>
+              <a:buChar char="–"/>
+              <a:defRPr sz="2000">
+                <a:solidFill>
+                  <a:schemeClr val="tx1"/>
+                </a:solidFill>
+                <a:latin typeface="Century Gothic" panose="020B0502020202020204" pitchFamily="34" charset="0"/>
+                <a:ea typeface="標楷體" panose="02010601000101010101" pitchFamily="65" charset="-128"/>
+              </a:defRPr>
+            </a:lvl5pPr>
+            <a:lvl6pPr marL="2514537" indent="-228594" eaLnBrk="0" fontAlgn="base" hangingPunct="0">
+              <a:lnSpc>
+                <a:spcPct val="90000"/>
+              </a:lnSpc>
+              <a:spcBef>
+                <a:spcPct val="15000"/>
+              </a:spcBef>
+              <a:spcAft>
+                <a:spcPct val="0"/>
+              </a:spcAft>
+              <a:buClr>
+                <a:schemeClr val="accent1"/>
+              </a:buClr>
+              <a:buSzPct val="100000"/>
+              <a:buChar char="–"/>
+              <a:defRPr sz="2000">
+                <a:solidFill>
+                  <a:schemeClr val="tx1"/>
+                </a:solidFill>
+                <a:latin typeface="Century Gothic" panose="020B0502020202020204" pitchFamily="34" charset="0"/>
+                <a:ea typeface="標楷體" panose="02010601000101010101" pitchFamily="65" charset="-128"/>
+              </a:defRPr>
+            </a:lvl6pPr>
+            <a:lvl7pPr marL="2971726" indent="-228594" eaLnBrk="0" fontAlgn="base" hangingPunct="0">
+              <a:lnSpc>
+                <a:spcPct val="90000"/>
+              </a:lnSpc>
+              <a:spcBef>
+                <a:spcPct val="15000"/>
+              </a:spcBef>
+              <a:spcAft>
+                <a:spcPct val="0"/>
+              </a:spcAft>
+              <a:buClr>
+                <a:schemeClr val="accent1"/>
+              </a:buClr>
+              <a:buSzPct val="100000"/>
+              <a:buChar char="–"/>
+              <a:defRPr sz="2000">
+                <a:solidFill>
+                  <a:schemeClr val="tx1"/>
+                </a:solidFill>
+                <a:latin typeface="Century Gothic" panose="020B0502020202020204" pitchFamily="34" charset="0"/>
+                <a:ea typeface="標楷體" panose="02010601000101010101" pitchFamily="65" charset="-128"/>
+              </a:defRPr>
+            </a:lvl7pPr>
+            <a:lvl8pPr marL="3428914" indent="-228594" eaLnBrk="0" fontAlgn="base" hangingPunct="0">
+              <a:lnSpc>
+                <a:spcPct val="90000"/>
+              </a:lnSpc>
+              <a:spcBef>
+                <a:spcPct val="15000"/>
+              </a:spcBef>
+              <a:spcAft>
+                <a:spcPct val="0"/>
+              </a:spcAft>
+              <a:buClr>
+                <a:schemeClr val="accent1"/>
+              </a:buClr>
+              <a:buSzPct val="100000"/>
+              <a:buChar char="–"/>
+              <a:defRPr sz="2000">
+                <a:solidFill>
+                  <a:schemeClr val="tx1"/>
+                </a:solidFill>
+                <a:latin typeface="Century Gothic" panose="020B0502020202020204" pitchFamily="34" charset="0"/>
+                <a:ea typeface="標楷體" panose="02010601000101010101" pitchFamily="65" charset="-128"/>
+              </a:defRPr>
+            </a:lvl8pPr>
+            <a:lvl9pPr marL="3886103" indent="-228594" eaLnBrk="0" fontAlgn="base" hangingPunct="0">
+              <a:lnSpc>
+                <a:spcPct val="90000"/>
+              </a:lnSpc>
+              <a:spcBef>
+                <a:spcPct val="15000"/>
+              </a:spcBef>
+              <a:spcAft>
+                <a:spcPct val="0"/>
+              </a:spcAft>
+              <a:buClr>
+                <a:schemeClr val="accent1"/>
+              </a:buClr>
+              <a:buSzPct val="100000"/>
+              <a:buChar char="–"/>
+              <a:defRPr sz="2000">
+                <a:solidFill>
+                  <a:schemeClr val="tx1"/>
+                </a:solidFill>
+                <a:latin typeface="Century Gothic" panose="020B0502020202020204" pitchFamily="34" charset="0"/>
+                <a:ea typeface="標楷體" panose="02010601000101010101" pitchFamily="65" charset="-128"/>
+              </a:defRPr>
+            </a:lvl9pPr>
+          </a:lstStyle>
+          <a:p>
+            <a:pPr>
+              <a:lnSpc>
+                <a:spcPct val="100000"/>
+              </a:lnSpc>
+              <a:spcBef>
+                <a:spcPct val="0"/>
+              </a:spcBef>
+              <a:buClrTx/>
+              <a:buSzTx/>
+              <a:buFontTx/>
+              <a:buNone/>
+            </a:pPr>
+            <a:fld id="{3B372B80-DEA1-4621-B194-1DB2F08AB0C3}" type="slidenum">
+              <a:rPr lang="zh-TW" altLang="en-US" sz="1400" b="0">
+                <a:solidFill>
+                  <a:schemeClr val="bg1"/>
+                </a:solidFill>
+                <a:latin typeface="Arial" panose="020B0604020202090204" pitchFamily="34" charset="0"/>
+                <a:ea typeface="新細明體" panose="02020500000000000000" pitchFamily="18" charset="-120"/>
+              </a:rPr>
+              <a:t>18</a:t>
+            </a:fld>
+            <a:endParaRPr lang="en-US" altLang="zh-TW" sz="1400" b="0" dirty="0">
+              <a:solidFill>
+                <a:schemeClr val="bg1"/>
+              </a:solidFill>
+              <a:latin typeface="Arial" panose="020B0604020202090204" pitchFamily="34" charset="0"/>
+              <a:ea typeface="新細明體" panose="02020500000000000000" pitchFamily="18" charset="-120"/>
+            </a:endParaRPr>
+          </a:p>
+        </p:txBody>
+      </p:sp>
+    </p:spTree>
     <p:extLst>
       <p:ext uri="{BB962C8B-B14F-4D97-AF65-F5344CB8AC3E}">
         <p14:creationId xmlns:p14="http://schemas.microsoft.com/office/powerpoint/2010/main" val="2183282046"/>
@@ -32778,7 +33052,7 @@
 </p:sld>
 </file>
 
-<file path=ppt/slides/slide18.xml><?xml version="1.0" encoding="utf-8"?>
+<file path=ppt/slides/slide19.xml><?xml version="1.0" encoding="utf-8"?>
 <p:sld xmlns:a="http://schemas.openxmlformats.org/drawingml/2006/main" xmlns:r="http://schemas.openxmlformats.org/officeDocument/2006/relationships" xmlns:p="http://schemas.openxmlformats.org/presentationml/2006/main">
   <p:cSld>
     <p:spTree>
@@ -32873,7 +33147,7 @@
           <a:p>
             <a:fld id="{D9B6BDF2-6896-4B98-8776-C18582F63BA5}" type="slidenum">
               <a:rPr lang="zh-TW" altLang="en-US" smtClean="0"/>
-              <a:t>18</a:t>
+              <a:t>19</a:t>
             </a:fld>
             <a:endParaRPr lang="zh-TW" altLang="en-US"/>
           </a:p>
@@ -33612,7 +33886,459 @@
 </p:sld>
 </file>
 
-<file path=ppt/slides/slide19.xml><?xml version="1.0" encoding="utf-8"?>
+<file path=ppt/slides/slide2.xml><?xml version="1.0" encoding="utf-8"?>
+<p:sld xmlns:a="http://schemas.openxmlformats.org/drawingml/2006/main" xmlns:r="http://schemas.openxmlformats.org/officeDocument/2006/relationships" xmlns:p="http://schemas.openxmlformats.org/presentationml/2006/main">
+  <p:cSld>
+    <p:spTree>
+      <p:nvGrpSpPr>
+        <p:cNvPr id="1" name=""/>
+        <p:cNvGrpSpPr/>
+        <p:nvPr/>
+      </p:nvGrpSpPr>
+      <p:grpSpPr>
+        <a:xfrm>
+          <a:off x="0" y="0"/>
+          <a:ext cx="0" cy="0"/>
+          <a:chOff x="0" y="0"/>
+          <a:chExt cx="0" cy="0"/>
+        </a:xfrm>
+      </p:grpSpPr>
+      <p:sp>
+        <p:nvSpPr>
+          <p:cNvPr id="2" name="Title 1"/>
+          <p:cNvSpPr>
+            <a:spLocks noGrp="1"/>
+          </p:cNvSpPr>
+          <p:nvPr>
+            <p:ph type="title"/>
+          </p:nvPr>
+        </p:nvSpPr>
+        <p:spPr/>
+        <p:txBody>
+          <a:bodyPr>
+            <a:noAutofit/>
+          </a:bodyPr>
+          <a:lstStyle/>
+          <a:p>
+            <a:pPr algn="ctr"/>
+            <a:r>
+              <a:rPr lang="en-US" dirty="0"/>
+              <a:t>Pipelining</a:t>
+            </a:r>
+          </a:p>
+        </p:txBody>
+      </p:sp>
+      <p:sp>
+        <p:nvSpPr>
+          <p:cNvPr id="6" name="灯片编号占位符 5"/>
+          <p:cNvSpPr>
+            <a:spLocks noGrp="1"/>
+          </p:cNvSpPr>
+          <p:nvPr>
+            <p:ph type="sldNum" sz="quarter" idx="10"/>
+          </p:nvPr>
+        </p:nvSpPr>
+        <p:spPr/>
+        <p:txBody>
+          <a:bodyPr/>
+          <a:lstStyle/>
+          <a:p>
+            <a:fld id="{D9B6BDF2-6896-4B98-8776-C18582F63BA5}" type="slidenum">
+              <a:rPr lang="zh-TW" altLang="en-US" smtClean="0"/>
+              <a:t>2</a:t>
+            </a:fld>
+            <a:endParaRPr lang="zh-TW" altLang="en-US"/>
+          </a:p>
+        </p:txBody>
+      </p:sp>
+      <p:sp>
+        <p:nvSpPr>
+          <p:cNvPr id="33" name="Content Placeholder 2">
+            <a:extLst>
+              <a:ext uri="{FF2B5EF4-FFF2-40B4-BE49-F238E27FC236}">
+                <a16:creationId xmlns:a16="http://schemas.microsoft.com/office/drawing/2014/main" id="{4E71CA5F-387A-4354-9522-8963C055260A}"/>
+              </a:ext>
+            </a:extLst>
+          </p:cNvPr>
+          <p:cNvSpPr>
+            <a:spLocks noGrp="1"/>
+          </p:cNvSpPr>
+          <p:nvPr>
+            <p:ph idx="1"/>
+          </p:nvPr>
+        </p:nvSpPr>
+        <p:spPr>
+          <a:xfrm>
+            <a:off x="116730" y="1105722"/>
+            <a:ext cx="11886873" cy="1967831"/>
+          </a:xfrm>
+        </p:spPr>
+        <p:txBody>
+          <a:bodyPr>
+            <a:normAutofit/>
+          </a:bodyPr>
+          <a:lstStyle/>
+          <a:p>
+            <a:r>
+              <a:rPr lang="en-US" dirty="0"/>
+              <a:t>Pipelining is an implementation technique in which multiple instructions are </a:t>
+            </a:r>
+            <a:r>
+              <a:rPr lang="en-US" dirty="0">
+                <a:solidFill>
+                  <a:srgbClr val="FF0000"/>
+                </a:solidFill>
+              </a:rPr>
+              <a:t>overlapped</a:t>
+            </a:r>
+            <a:r>
+              <a:rPr lang="en-US" dirty="0"/>
+              <a:t> in execution, much like an assembly line.</a:t>
+            </a:r>
+          </a:p>
+        </p:txBody>
+      </p:sp>
+      <p:pic>
+        <p:nvPicPr>
+          <p:cNvPr id="3" name="Picture 2">
+            <a:extLst>
+              <a:ext uri="{FF2B5EF4-FFF2-40B4-BE49-F238E27FC236}">
+                <a16:creationId xmlns:a16="http://schemas.microsoft.com/office/drawing/2014/main" id="{63B973CD-802E-46A9-A32A-BA2B3E19532A}"/>
+              </a:ext>
+            </a:extLst>
+          </p:cNvPr>
+          <p:cNvPicPr>
+            <a:picLocks noChangeAspect="1"/>
+          </p:cNvPicPr>
+          <p:nvPr/>
+        </p:nvPicPr>
+        <p:blipFill>
+          <a:blip r:embed="rId2"/>
+          <a:stretch>
+            <a:fillRect/>
+          </a:stretch>
+        </p:blipFill>
+        <p:spPr>
+          <a:xfrm>
+            <a:off x="1687014" y="4440316"/>
+            <a:ext cx="3468925" cy="1146319"/>
+          </a:xfrm>
+          <a:prstGeom prst="rect">
+            <a:avLst/>
+          </a:prstGeom>
+        </p:spPr>
+      </p:pic>
+      <p:pic>
+        <p:nvPicPr>
+          <p:cNvPr id="4" name="Picture 3">
+            <a:extLst>
+              <a:ext uri="{FF2B5EF4-FFF2-40B4-BE49-F238E27FC236}">
+                <a16:creationId xmlns:a16="http://schemas.microsoft.com/office/drawing/2014/main" id="{BB4C9D14-8041-480A-9472-A66B76CC5837}"/>
+              </a:ext>
+            </a:extLst>
+          </p:cNvPr>
+          <p:cNvPicPr>
+            <a:picLocks noChangeAspect="1"/>
+          </p:cNvPicPr>
+          <p:nvPr/>
+        </p:nvPicPr>
+        <p:blipFill>
+          <a:blip r:embed="rId3"/>
+          <a:stretch>
+            <a:fillRect/>
+          </a:stretch>
+        </p:blipFill>
+        <p:spPr>
+          <a:xfrm>
+            <a:off x="1687014" y="3955021"/>
+            <a:ext cx="6093696" cy="339725"/>
+          </a:xfrm>
+          <a:prstGeom prst="rect">
+            <a:avLst/>
+          </a:prstGeom>
+        </p:spPr>
+      </p:pic>
+      <p:pic>
+        <p:nvPicPr>
+          <p:cNvPr id="5" name="Picture 4">
+            <a:extLst>
+              <a:ext uri="{FF2B5EF4-FFF2-40B4-BE49-F238E27FC236}">
+                <a16:creationId xmlns:a16="http://schemas.microsoft.com/office/drawing/2014/main" id="{D47ED950-FCA4-48A9-ACA5-88D9024B4102}"/>
+              </a:ext>
+            </a:extLst>
+          </p:cNvPr>
+          <p:cNvPicPr>
+            <a:picLocks noChangeAspect="1"/>
+          </p:cNvPicPr>
+          <p:nvPr/>
+        </p:nvPicPr>
+        <p:blipFill>
+          <a:blip r:embed="rId4"/>
+          <a:stretch>
+            <a:fillRect/>
+          </a:stretch>
+        </p:blipFill>
+        <p:spPr>
+          <a:xfrm>
+            <a:off x="1687014" y="3342658"/>
+            <a:ext cx="7650121" cy="339725"/>
+          </a:xfrm>
+          <a:prstGeom prst="rect">
+            <a:avLst/>
+          </a:prstGeom>
+        </p:spPr>
+      </p:pic>
+      <p:sp>
+        <p:nvSpPr>
+          <p:cNvPr id="21" name="TextBox 20">
+            <a:extLst>
+              <a:ext uri="{FF2B5EF4-FFF2-40B4-BE49-F238E27FC236}">
+                <a16:creationId xmlns:a16="http://schemas.microsoft.com/office/drawing/2014/main" id="{11DBCAFA-A59D-4CC8-83AB-20FFA388CDC0}"/>
+              </a:ext>
+            </a:extLst>
+          </p:cNvPr>
+          <p:cNvSpPr txBox="1"/>
+          <p:nvPr/>
+        </p:nvSpPr>
+        <p:spPr>
+          <a:xfrm>
+            <a:off x="183406" y="3297662"/>
+            <a:ext cx="1569660" cy="400110"/>
+          </a:xfrm>
+          <a:prstGeom prst="rect">
+            <a:avLst/>
+          </a:prstGeom>
+          <a:noFill/>
+        </p:spPr>
+        <p:txBody>
+          <a:bodyPr wrap="none" rtlCol="0" anchor="ctr" anchorCtr="1">
+            <a:spAutoFit/>
+          </a:bodyPr>
+          <a:lstStyle/>
+          <a:p>
+            <a:r>
+              <a:rPr lang="en-US" sz="2000" dirty="0">
+                <a:ea typeface="標楷體" pitchFamily="65" charset="-120"/>
+                <a:cs typeface="Calibri" pitchFamily="34" charset="0"/>
+              </a:rPr>
+              <a:t>Single-cycle</a:t>
+            </a:r>
+          </a:p>
+        </p:txBody>
+      </p:sp>
+      <p:sp>
+        <p:nvSpPr>
+          <p:cNvPr id="23" name="TextBox 22">
+            <a:extLst>
+              <a:ext uri="{FF2B5EF4-FFF2-40B4-BE49-F238E27FC236}">
+                <a16:creationId xmlns:a16="http://schemas.microsoft.com/office/drawing/2014/main" id="{C52E0BA1-ECDF-4475-97EE-777A3D534B52}"/>
+              </a:ext>
+            </a:extLst>
+          </p:cNvPr>
+          <p:cNvSpPr txBox="1"/>
+          <p:nvPr/>
+        </p:nvSpPr>
+        <p:spPr>
+          <a:xfrm>
+            <a:off x="230673" y="3992586"/>
+            <a:ext cx="1396536" cy="400110"/>
+          </a:xfrm>
+          <a:prstGeom prst="rect">
+            <a:avLst/>
+          </a:prstGeom>
+          <a:noFill/>
+        </p:spPr>
+        <p:txBody>
+          <a:bodyPr wrap="none" rtlCol="0" anchor="ctr" anchorCtr="1">
+            <a:spAutoFit/>
+          </a:bodyPr>
+          <a:lstStyle/>
+          <a:p>
+            <a:r>
+              <a:rPr lang="en-US" sz="2000" dirty="0">
+                <a:ea typeface="標楷體" pitchFamily="65" charset="-120"/>
+                <a:cs typeface="Calibri" pitchFamily="34" charset="0"/>
+              </a:rPr>
+              <a:t>Multi-cycle</a:t>
+            </a:r>
+          </a:p>
+        </p:txBody>
+      </p:sp>
+      <p:sp>
+        <p:nvSpPr>
+          <p:cNvPr id="24" name="TextBox 23">
+            <a:extLst>
+              <a:ext uri="{FF2B5EF4-FFF2-40B4-BE49-F238E27FC236}">
+                <a16:creationId xmlns:a16="http://schemas.microsoft.com/office/drawing/2014/main" id="{CE40FD92-A3C0-482B-A1F2-41A27406B6DF}"/>
+              </a:ext>
+            </a:extLst>
+          </p:cNvPr>
+          <p:cNvSpPr txBox="1"/>
+          <p:nvPr/>
+        </p:nvSpPr>
+        <p:spPr>
+          <a:xfrm>
+            <a:off x="301205" y="4772465"/>
+            <a:ext cx="1242648" cy="400110"/>
+          </a:xfrm>
+          <a:prstGeom prst="rect">
+            <a:avLst/>
+          </a:prstGeom>
+          <a:noFill/>
+        </p:spPr>
+        <p:txBody>
+          <a:bodyPr wrap="none" rtlCol="0" anchor="ctr" anchorCtr="1">
+            <a:spAutoFit/>
+          </a:bodyPr>
+          <a:lstStyle/>
+          <a:p>
+            <a:r>
+              <a:rPr lang="en-US" sz="2000" dirty="0">
+                <a:ea typeface="標楷體" pitchFamily="65" charset="-120"/>
+                <a:cs typeface="Calibri" pitchFamily="34" charset="0"/>
+              </a:rPr>
+              <a:t>Pipelined</a:t>
+            </a:r>
+          </a:p>
+        </p:txBody>
+      </p:sp>
+      <p:sp>
+        <p:nvSpPr>
+          <p:cNvPr id="22" name="TextBox 21">
+            <a:extLst>
+              <a:ext uri="{FF2B5EF4-FFF2-40B4-BE49-F238E27FC236}">
+                <a16:creationId xmlns:a16="http://schemas.microsoft.com/office/drawing/2014/main" id="{7439248C-391E-4D99-9AA2-991039A40734}"/>
+              </a:ext>
+            </a:extLst>
+          </p:cNvPr>
+          <p:cNvSpPr txBox="1"/>
+          <p:nvPr/>
+        </p:nvSpPr>
+        <p:spPr>
+          <a:xfrm>
+            <a:off x="9949186" y="3189355"/>
+            <a:ext cx="2121093" cy="646331"/>
+          </a:xfrm>
+          <a:prstGeom prst="rect">
+            <a:avLst/>
+          </a:prstGeom>
+          <a:noFill/>
+        </p:spPr>
+        <p:txBody>
+          <a:bodyPr wrap="none" rtlCol="0" anchor="ctr" anchorCtr="1">
+            <a:spAutoFit/>
+          </a:bodyPr>
+          <a:lstStyle/>
+          <a:p>
+            <a:r>
+              <a:rPr lang="en-US" dirty="0">
+                <a:ea typeface="標楷體" pitchFamily="65" charset="-120"/>
+                <a:cs typeface="Calibri" pitchFamily="34" charset="0"/>
+              </a:rPr>
+              <a:t>4 X long cycles</a:t>
+            </a:r>
+          </a:p>
+          <a:p>
+            <a:r>
+              <a:rPr lang="en-US" dirty="0">
+                <a:ea typeface="標楷體" pitchFamily="65" charset="-120"/>
+                <a:cs typeface="Calibri" pitchFamily="34" charset="0"/>
+              </a:rPr>
+              <a:t>(16 x short cycles) </a:t>
+            </a:r>
+          </a:p>
+        </p:txBody>
+      </p:sp>
+      <p:sp>
+        <p:nvSpPr>
+          <p:cNvPr id="26" name="TextBox 25">
+            <a:extLst>
+              <a:ext uri="{FF2B5EF4-FFF2-40B4-BE49-F238E27FC236}">
+                <a16:creationId xmlns:a16="http://schemas.microsoft.com/office/drawing/2014/main" id="{27504DD6-5718-46FD-8404-6CAC3CCA1A12}"/>
+              </a:ext>
+            </a:extLst>
+          </p:cNvPr>
+          <p:cNvSpPr txBox="1"/>
+          <p:nvPr/>
+        </p:nvSpPr>
+        <p:spPr>
+          <a:xfrm>
+            <a:off x="9945007" y="4058627"/>
+            <a:ext cx="2005677" cy="369332"/>
+          </a:xfrm>
+          <a:prstGeom prst="rect">
+            <a:avLst/>
+          </a:prstGeom>
+          <a:noFill/>
+        </p:spPr>
+        <p:txBody>
+          <a:bodyPr wrap="none" rtlCol="0" anchor="ctr" anchorCtr="1">
+            <a:spAutoFit/>
+          </a:bodyPr>
+          <a:lstStyle/>
+          <a:p>
+            <a:r>
+              <a:rPr lang="en-US" dirty="0">
+                <a:ea typeface="標楷體" pitchFamily="65" charset="-120"/>
+                <a:cs typeface="Calibri" pitchFamily="34" charset="0"/>
+              </a:rPr>
+              <a:t>13 X short cycles </a:t>
+            </a:r>
+          </a:p>
+        </p:txBody>
+      </p:sp>
+      <p:sp>
+        <p:nvSpPr>
+          <p:cNvPr id="27" name="TextBox 26">
+            <a:extLst>
+              <a:ext uri="{FF2B5EF4-FFF2-40B4-BE49-F238E27FC236}">
+                <a16:creationId xmlns:a16="http://schemas.microsoft.com/office/drawing/2014/main" id="{98764DFD-5ABE-4EDF-8170-1E7F22730C16}"/>
+              </a:ext>
+            </a:extLst>
+          </p:cNvPr>
+          <p:cNvSpPr txBox="1"/>
+          <p:nvPr/>
+        </p:nvSpPr>
+        <p:spPr>
+          <a:xfrm>
+            <a:off x="9945007" y="4828809"/>
+            <a:ext cx="1877437" cy="369332"/>
+          </a:xfrm>
+          <a:prstGeom prst="rect">
+            <a:avLst/>
+          </a:prstGeom>
+          <a:noFill/>
+        </p:spPr>
+        <p:txBody>
+          <a:bodyPr wrap="none" rtlCol="0" anchor="ctr" anchorCtr="1">
+            <a:spAutoFit/>
+          </a:bodyPr>
+          <a:lstStyle/>
+          <a:p>
+            <a:r>
+              <a:rPr lang="en-US" dirty="0">
+                <a:ea typeface="標楷體" pitchFamily="65" charset="-120"/>
+                <a:cs typeface="Calibri" pitchFamily="34" charset="0"/>
+              </a:rPr>
+              <a:t>7 X short cycles </a:t>
+            </a:r>
+          </a:p>
+        </p:txBody>
+      </p:sp>
+    </p:spTree>
+    <p:extLst>
+      <p:ext uri="{BB962C8B-B14F-4D97-AF65-F5344CB8AC3E}">
+        <p14:creationId xmlns:p14="http://schemas.microsoft.com/office/powerpoint/2010/main" val="661823402"/>
+      </p:ext>
+    </p:extLst>
+  </p:cSld>
+  <p:clrMapOvr>
+    <a:masterClrMapping/>
+  </p:clrMapOvr>
+</p:sld>
+</file>
+
+<file path=ppt/slides/slide20.xml><?xml version="1.0" encoding="utf-8"?>
 <p:sld xmlns:a="http://schemas.openxmlformats.org/drawingml/2006/main" xmlns:r="http://schemas.openxmlformats.org/officeDocument/2006/relationships" xmlns:p="http://schemas.openxmlformats.org/presentationml/2006/main">
   <p:cSld>
     <p:spTree>
@@ -33707,7 +34433,7 @@
           <a:p>
             <a:fld id="{D9B6BDF2-6896-4B98-8776-C18582F63BA5}" type="slidenum">
               <a:rPr lang="zh-TW" altLang="en-US" smtClean="0"/>
-              <a:t>19</a:t>
+              <a:t>20</a:t>
             </a:fld>
             <a:endParaRPr lang="zh-TW" altLang="en-US"/>
           </a:p>
@@ -34504,459 +35230,7 @@
 </p:sld>
 </file>
 
-<file path=ppt/slides/slide2.xml><?xml version="1.0" encoding="utf-8"?>
-<p:sld xmlns:a="http://schemas.openxmlformats.org/drawingml/2006/main" xmlns:r="http://schemas.openxmlformats.org/officeDocument/2006/relationships" xmlns:p="http://schemas.openxmlformats.org/presentationml/2006/main">
-  <p:cSld>
-    <p:spTree>
-      <p:nvGrpSpPr>
-        <p:cNvPr id="1" name=""/>
-        <p:cNvGrpSpPr/>
-        <p:nvPr/>
-      </p:nvGrpSpPr>
-      <p:grpSpPr>
-        <a:xfrm>
-          <a:off x="0" y="0"/>
-          <a:ext cx="0" cy="0"/>
-          <a:chOff x="0" y="0"/>
-          <a:chExt cx="0" cy="0"/>
-        </a:xfrm>
-      </p:grpSpPr>
-      <p:sp>
-        <p:nvSpPr>
-          <p:cNvPr id="2" name="Title 1"/>
-          <p:cNvSpPr>
-            <a:spLocks noGrp="1"/>
-          </p:cNvSpPr>
-          <p:nvPr>
-            <p:ph type="title"/>
-          </p:nvPr>
-        </p:nvSpPr>
-        <p:spPr/>
-        <p:txBody>
-          <a:bodyPr>
-            <a:noAutofit/>
-          </a:bodyPr>
-          <a:lstStyle/>
-          <a:p>
-            <a:pPr algn="ctr"/>
-            <a:r>
-              <a:rPr lang="en-US" dirty="0"/>
-              <a:t>Pipelining</a:t>
-            </a:r>
-          </a:p>
-        </p:txBody>
-      </p:sp>
-      <p:sp>
-        <p:nvSpPr>
-          <p:cNvPr id="6" name="灯片编号占位符 5"/>
-          <p:cNvSpPr>
-            <a:spLocks noGrp="1"/>
-          </p:cNvSpPr>
-          <p:nvPr>
-            <p:ph type="sldNum" sz="quarter" idx="10"/>
-          </p:nvPr>
-        </p:nvSpPr>
-        <p:spPr/>
-        <p:txBody>
-          <a:bodyPr/>
-          <a:lstStyle/>
-          <a:p>
-            <a:fld id="{D9B6BDF2-6896-4B98-8776-C18582F63BA5}" type="slidenum">
-              <a:rPr lang="zh-TW" altLang="en-US" smtClean="0"/>
-              <a:t>2</a:t>
-            </a:fld>
-            <a:endParaRPr lang="zh-TW" altLang="en-US"/>
-          </a:p>
-        </p:txBody>
-      </p:sp>
-      <p:sp>
-        <p:nvSpPr>
-          <p:cNvPr id="33" name="Content Placeholder 2">
-            <a:extLst>
-              <a:ext uri="{FF2B5EF4-FFF2-40B4-BE49-F238E27FC236}">
-                <a16:creationId xmlns:a16="http://schemas.microsoft.com/office/drawing/2014/main" id="{4E71CA5F-387A-4354-9522-8963C055260A}"/>
-              </a:ext>
-            </a:extLst>
-          </p:cNvPr>
-          <p:cNvSpPr>
-            <a:spLocks noGrp="1"/>
-          </p:cNvSpPr>
-          <p:nvPr>
-            <p:ph idx="1"/>
-          </p:nvPr>
-        </p:nvSpPr>
-        <p:spPr>
-          <a:xfrm>
-            <a:off x="116730" y="1105722"/>
-            <a:ext cx="11886873" cy="1967831"/>
-          </a:xfrm>
-        </p:spPr>
-        <p:txBody>
-          <a:bodyPr>
-            <a:normAutofit/>
-          </a:bodyPr>
-          <a:lstStyle/>
-          <a:p>
-            <a:r>
-              <a:rPr lang="en-US" dirty="0"/>
-              <a:t>Pipelining is an implementation technique in which multiple instructions are </a:t>
-            </a:r>
-            <a:r>
-              <a:rPr lang="en-US" dirty="0">
-                <a:solidFill>
-                  <a:srgbClr val="FF0000"/>
-                </a:solidFill>
-              </a:rPr>
-              <a:t>overlapped</a:t>
-            </a:r>
-            <a:r>
-              <a:rPr lang="en-US" dirty="0"/>
-              <a:t> in execution, much like an assembly line.</a:t>
-            </a:r>
-          </a:p>
-        </p:txBody>
-      </p:sp>
-      <p:pic>
-        <p:nvPicPr>
-          <p:cNvPr id="3" name="Picture 2">
-            <a:extLst>
-              <a:ext uri="{FF2B5EF4-FFF2-40B4-BE49-F238E27FC236}">
-                <a16:creationId xmlns:a16="http://schemas.microsoft.com/office/drawing/2014/main" id="{63B973CD-802E-46A9-A32A-BA2B3E19532A}"/>
-              </a:ext>
-            </a:extLst>
-          </p:cNvPr>
-          <p:cNvPicPr>
-            <a:picLocks noChangeAspect="1"/>
-          </p:cNvPicPr>
-          <p:nvPr/>
-        </p:nvPicPr>
-        <p:blipFill>
-          <a:blip r:embed="rId2"/>
-          <a:stretch>
-            <a:fillRect/>
-          </a:stretch>
-        </p:blipFill>
-        <p:spPr>
-          <a:xfrm>
-            <a:off x="1687014" y="4440316"/>
-            <a:ext cx="3468925" cy="1146319"/>
-          </a:xfrm>
-          <a:prstGeom prst="rect">
-            <a:avLst/>
-          </a:prstGeom>
-        </p:spPr>
-      </p:pic>
-      <p:pic>
-        <p:nvPicPr>
-          <p:cNvPr id="4" name="Picture 3">
-            <a:extLst>
-              <a:ext uri="{FF2B5EF4-FFF2-40B4-BE49-F238E27FC236}">
-                <a16:creationId xmlns:a16="http://schemas.microsoft.com/office/drawing/2014/main" id="{BB4C9D14-8041-480A-9472-A66B76CC5837}"/>
-              </a:ext>
-            </a:extLst>
-          </p:cNvPr>
-          <p:cNvPicPr>
-            <a:picLocks noChangeAspect="1"/>
-          </p:cNvPicPr>
-          <p:nvPr/>
-        </p:nvPicPr>
-        <p:blipFill>
-          <a:blip r:embed="rId3"/>
-          <a:stretch>
-            <a:fillRect/>
-          </a:stretch>
-        </p:blipFill>
-        <p:spPr>
-          <a:xfrm>
-            <a:off x="1687014" y="3955021"/>
-            <a:ext cx="6093696" cy="339725"/>
-          </a:xfrm>
-          <a:prstGeom prst="rect">
-            <a:avLst/>
-          </a:prstGeom>
-        </p:spPr>
-      </p:pic>
-      <p:pic>
-        <p:nvPicPr>
-          <p:cNvPr id="5" name="Picture 4">
-            <a:extLst>
-              <a:ext uri="{FF2B5EF4-FFF2-40B4-BE49-F238E27FC236}">
-                <a16:creationId xmlns:a16="http://schemas.microsoft.com/office/drawing/2014/main" id="{D47ED950-FCA4-48A9-ACA5-88D9024B4102}"/>
-              </a:ext>
-            </a:extLst>
-          </p:cNvPr>
-          <p:cNvPicPr>
-            <a:picLocks noChangeAspect="1"/>
-          </p:cNvPicPr>
-          <p:nvPr/>
-        </p:nvPicPr>
-        <p:blipFill>
-          <a:blip r:embed="rId4"/>
-          <a:stretch>
-            <a:fillRect/>
-          </a:stretch>
-        </p:blipFill>
-        <p:spPr>
-          <a:xfrm>
-            <a:off x="1687014" y="3342658"/>
-            <a:ext cx="7650121" cy="339725"/>
-          </a:xfrm>
-          <a:prstGeom prst="rect">
-            <a:avLst/>
-          </a:prstGeom>
-        </p:spPr>
-      </p:pic>
-      <p:sp>
-        <p:nvSpPr>
-          <p:cNvPr id="21" name="TextBox 20">
-            <a:extLst>
-              <a:ext uri="{FF2B5EF4-FFF2-40B4-BE49-F238E27FC236}">
-                <a16:creationId xmlns:a16="http://schemas.microsoft.com/office/drawing/2014/main" id="{11DBCAFA-A59D-4CC8-83AB-20FFA388CDC0}"/>
-              </a:ext>
-            </a:extLst>
-          </p:cNvPr>
-          <p:cNvSpPr txBox="1"/>
-          <p:nvPr/>
-        </p:nvSpPr>
-        <p:spPr>
-          <a:xfrm>
-            <a:off x="183406" y="3297662"/>
-            <a:ext cx="1569660" cy="400110"/>
-          </a:xfrm>
-          <a:prstGeom prst="rect">
-            <a:avLst/>
-          </a:prstGeom>
-          <a:noFill/>
-        </p:spPr>
-        <p:txBody>
-          <a:bodyPr wrap="none" rtlCol="0" anchor="ctr" anchorCtr="1">
-            <a:spAutoFit/>
-          </a:bodyPr>
-          <a:lstStyle/>
-          <a:p>
-            <a:r>
-              <a:rPr lang="en-US" sz="2000" dirty="0">
-                <a:ea typeface="標楷體" pitchFamily="65" charset="-120"/>
-                <a:cs typeface="Calibri" pitchFamily="34" charset="0"/>
-              </a:rPr>
-              <a:t>Single-cycle</a:t>
-            </a:r>
-          </a:p>
-        </p:txBody>
-      </p:sp>
-      <p:sp>
-        <p:nvSpPr>
-          <p:cNvPr id="23" name="TextBox 22">
-            <a:extLst>
-              <a:ext uri="{FF2B5EF4-FFF2-40B4-BE49-F238E27FC236}">
-                <a16:creationId xmlns:a16="http://schemas.microsoft.com/office/drawing/2014/main" id="{C52E0BA1-ECDF-4475-97EE-777A3D534B52}"/>
-              </a:ext>
-            </a:extLst>
-          </p:cNvPr>
-          <p:cNvSpPr txBox="1"/>
-          <p:nvPr/>
-        </p:nvSpPr>
-        <p:spPr>
-          <a:xfrm>
-            <a:off x="230673" y="3992586"/>
-            <a:ext cx="1396536" cy="400110"/>
-          </a:xfrm>
-          <a:prstGeom prst="rect">
-            <a:avLst/>
-          </a:prstGeom>
-          <a:noFill/>
-        </p:spPr>
-        <p:txBody>
-          <a:bodyPr wrap="none" rtlCol="0" anchor="ctr" anchorCtr="1">
-            <a:spAutoFit/>
-          </a:bodyPr>
-          <a:lstStyle/>
-          <a:p>
-            <a:r>
-              <a:rPr lang="en-US" sz="2000" dirty="0">
-                <a:ea typeface="標楷體" pitchFamily="65" charset="-120"/>
-                <a:cs typeface="Calibri" pitchFamily="34" charset="0"/>
-              </a:rPr>
-              <a:t>Multi-cycle</a:t>
-            </a:r>
-          </a:p>
-        </p:txBody>
-      </p:sp>
-      <p:sp>
-        <p:nvSpPr>
-          <p:cNvPr id="24" name="TextBox 23">
-            <a:extLst>
-              <a:ext uri="{FF2B5EF4-FFF2-40B4-BE49-F238E27FC236}">
-                <a16:creationId xmlns:a16="http://schemas.microsoft.com/office/drawing/2014/main" id="{CE40FD92-A3C0-482B-A1F2-41A27406B6DF}"/>
-              </a:ext>
-            </a:extLst>
-          </p:cNvPr>
-          <p:cNvSpPr txBox="1"/>
-          <p:nvPr/>
-        </p:nvSpPr>
-        <p:spPr>
-          <a:xfrm>
-            <a:off x="301205" y="4772465"/>
-            <a:ext cx="1242648" cy="400110"/>
-          </a:xfrm>
-          <a:prstGeom prst="rect">
-            <a:avLst/>
-          </a:prstGeom>
-          <a:noFill/>
-        </p:spPr>
-        <p:txBody>
-          <a:bodyPr wrap="none" rtlCol="0" anchor="ctr" anchorCtr="1">
-            <a:spAutoFit/>
-          </a:bodyPr>
-          <a:lstStyle/>
-          <a:p>
-            <a:r>
-              <a:rPr lang="en-US" sz="2000" dirty="0">
-                <a:ea typeface="標楷體" pitchFamily="65" charset="-120"/>
-                <a:cs typeface="Calibri" pitchFamily="34" charset="0"/>
-              </a:rPr>
-              <a:t>Pipelined</a:t>
-            </a:r>
-          </a:p>
-        </p:txBody>
-      </p:sp>
-      <p:sp>
-        <p:nvSpPr>
-          <p:cNvPr id="22" name="TextBox 21">
-            <a:extLst>
-              <a:ext uri="{FF2B5EF4-FFF2-40B4-BE49-F238E27FC236}">
-                <a16:creationId xmlns:a16="http://schemas.microsoft.com/office/drawing/2014/main" id="{7439248C-391E-4D99-9AA2-991039A40734}"/>
-              </a:ext>
-            </a:extLst>
-          </p:cNvPr>
-          <p:cNvSpPr txBox="1"/>
-          <p:nvPr/>
-        </p:nvSpPr>
-        <p:spPr>
-          <a:xfrm>
-            <a:off x="9949186" y="3189355"/>
-            <a:ext cx="2121093" cy="646331"/>
-          </a:xfrm>
-          <a:prstGeom prst="rect">
-            <a:avLst/>
-          </a:prstGeom>
-          <a:noFill/>
-        </p:spPr>
-        <p:txBody>
-          <a:bodyPr wrap="none" rtlCol="0" anchor="ctr" anchorCtr="1">
-            <a:spAutoFit/>
-          </a:bodyPr>
-          <a:lstStyle/>
-          <a:p>
-            <a:r>
-              <a:rPr lang="en-US" dirty="0">
-                <a:ea typeface="標楷體" pitchFamily="65" charset="-120"/>
-                <a:cs typeface="Calibri" pitchFamily="34" charset="0"/>
-              </a:rPr>
-              <a:t>4 X long cycles</a:t>
-            </a:r>
-          </a:p>
-          <a:p>
-            <a:r>
-              <a:rPr lang="en-US" dirty="0">
-                <a:ea typeface="標楷體" pitchFamily="65" charset="-120"/>
-                <a:cs typeface="Calibri" pitchFamily="34" charset="0"/>
-              </a:rPr>
-              <a:t>(16 x short cycles) </a:t>
-            </a:r>
-          </a:p>
-        </p:txBody>
-      </p:sp>
-      <p:sp>
-        <p:nvSpPr>
-          <p:cNvPr id="26" name="TextBox 25">
-            <a:extLst>
-              <a:ext uri="{FF2B5EF4-FFF2-40B4-BE49-F238E27FC236}">
-                <a16:creationId xmlns:a16="http://schemas.microsoft.com/office/drawing/2014/main" id="{27504DD6-5718-46FD-8404-6CAC3CCA1A12}"/>
-              </a:ext>
-            </a:extLst>
-          </p:cNvPr>
-          <p:cNvSpPr txBox="1"/>
-          <p:nvPr/>
-        </p:nvSpPr>
-        <p:spPr>
-          <a:xfrm>
-            <a:off x="9945007" y="4058627"/>
-            <a:ext cx="2005677" cy="369332"/>
-          </a:xfrm>
-          <a:prstGeom prst="rect">
-            <a:avLst/>
-          </a:prstGeom>
-          <a:noFill/>
-        </p:spPr>
-        <p:txBody>
-          <a:bodyPr wrap="none" rtlCol="0" anchor="ctr" anchorCtr="1">
-            <a:spAutoFit/>
-          </a:bodyPr>
-          <a:lstStyle/>
-          <a:p>
-            <a:r>
-              <a:rPr lang="en-US" dirty="0">
-                <a:ea typeface="標楷體" pitchFamily="65" charset="-120"/>
-                <a:cs typeface="Calibri" pitchFamily="34" charset="0"/>
-              </a:rPr>
-              <a:t>13 X short cycles </a:t>
-            </a:r>
-          </a:p>
-        </p:txBody>
-      </p:sp>
-      <p:sp>
-        <p:nvSpPr>
-          <p:cNvPr id="27" name="TextBox 26">
-            <a:extLst>
-              <a:ext uri="{FF2B5EF4-FFF2-40B4-BE49-F238E27FC236}">
-                <a16:creationId xmlns:a16="http://schemas.microsoft.com/office/drawing/2014/main" id="{98764DFD-5ABE-4EDF-8170-1E7F22730C16}"/>
-              </a:ext>
-            </a:extLst>
-          </p:cNvPr>
-          <p:cNvSpPr txBox="1"/>
-          <p:nvPr/>
-        </p:nvSpPr>
-        <p:spPr>
-          <a:xfrm>
-            <a:off x="9945007" y="4828809"/>
-            <a:ext cx="1877437" cy="369332"/>
-          </a:xfrm>
-          <a:prstGeom prst="rect">
-            <a:avLst/>
-          </a:prstGeom>
-          <a:noFill/>
-        </p:spPr>
-        <p:txBody>
-          <a:bodyPr wrap="none" rtlCol="0" anchor="ctr" anchorCtr="1">
-            <a:spAutoFit/>
-          </a:bodyPr>
-          <a:lstStyle/>
-          <a:p>
-            <a:r>
-              <a:rPr lang="en-US" dirty="0">
-                <a:ea typeface="標楷體" pitchFamily="65" charset="-120"/>
-                <a:cs typeface="Calibri" pitchFamily="34" charset="0"/>
-              </a:rPr>
-              <a:t>7 X short cycles </a:t>
-            </a:r>
-          </a:p>
-        </p:txBody>
-      </p:sp>
-    </p:spTree>
-    <p:extLst>
-      <p:ext uri="{BB962C8B-B14F-4D97-AF65-F5344CB8AC3E}">
-        <p14:creationId xmlns:p14="http://schemas.microsoft.com/office/powerpoint/2010/main" val="661823402"/>
-      </p:ext>
-    </p:extLst>
-  </p:cSld>
-  <p:clrMapOvr>
-    <a:masterClrMapping/>
-  </p:clrMapOvr>
-</p:sld>
-</file>
-
-<file path=ppt/slides/slide20.xml><?xml version="1.0" encoding="utf-8"?>
+<file path=ppt/slides/slide21.xml><?xml version="1.0" encoding="utf-8"?>
 <p:sld xmlns:a="http://schemas.openxmlformats.org/drawingml/2006/main" xmlns:r="http://schemas.openxmlformats.org/officeDocument/2006/relationships" xmlns:p="http://schemas.openxmlformats.org/presentationml/2006/main">
   <p:cSld>
     <p:spTree>
@@ -35051,7 +35325,7 @@
           <a:p>
             <a:fld id="{D9B6BDF2-6896-4B98-8776-C18582F63BA5}" type="slidenum">
               <a:rPr lang="zh-TW" altLang="en-US" smtClean="0"/>
-              <a:t>20</a:t>
+              <a:t>21</a:t>
             </a:fld>
             <a:endParaRPr lang="zh-TW" altLang="en-US"/>
           </a:p>
@@ -36282,7 +36556,7 @@
 </p:sld>
 </file>
 
-<file path=ppt/slides/slide21.xml><?xml version="1.0" encoding="utf-8"?>
+<file path=ppt/slides/slide22.xml><?xml version="1.0" encoding="utf-8"?>
 <p:sld xmlns:a="http://schemas.openxmlformats.org/drawingml/2006/main" xmlns:r="http://schemas.openxmlformats.org/officeDocument/2006/relationships" xmlns:p="http://schemas.openxmlformats.org/presentationml/2006/main">
   <p:cSld>
     <p:spTree>
@@ -36377,7 +36651,7 @@
           <a:p>
             <a:fld id="{D9B6BDF2-6896-4B98-8776-C18582F63BA5}" type="slidenum">
               <a:rPr lang="zh-TW" altLang="en-US" smtClean="0"/>
-              <a:t>21</a:t>
+              <a:t>22</a:t>
             </a:fld>
             <a:endParaRPr lang="zh-TW" altLang="en-US"/>
           </a:p>
@@ -38302,7 +38576,7 @@
 </p:sld>
 </file>
 
-<file path=ppt/slides/slide22.xml><?xml version="1.0" encoding="utf-8"?>
+<file path=ppt/slides/slide23.xml><?xml version="1.0" encoding="utf-8"?>
 <p:sld xmlns:a="http://schemas.openxmlformats.org/drawingml/2006/main" xmlns:r="http://schemas.openxmlformats.org/officeDocument/2006/relationships" xmlns:p="http://schemas.openxmlformats.org/presentationml/2006/main">
   <p:cSld>
     <p:spTree>
@@ -38358,7 +38632,7 @@
           <a:p>
             <a:fld id="{D9B6BDF2-6896-4B98-8776-C18582F63BA5}" type="slidenum">
               <a:rPr lang="zh-TW" altLang="en-US" smtClean="0"/>
-              <a:t>22</a:t>
+              <a:t>23</a:t>
             </a:fld>
             <a:endParaRPr lang="zh-TW" altLang="en-US"/>
           </a:p>
@@ -38716,7 +38990,7 @@
 </p:sld>
 </file>
 
-<file path=ppt/slides/slide23.xml><?xml version="1.0" encoding="utf-8"?>
+<file path=ppt/slides/slide24.xml><?xml version="1.0" encoding="utf-8"?>
 <p:sld xmlns:a="http://schemas.openxmlformats.org/drawingml/2006/main" xmlns:r="http://schemas.openxmlformats.org/officeDocument/2006/relationships" xmlns:p="http://schemas.openxmlformats.org/presentationml/2006/main">
   <p:cSld>
     <p:spTree>
@@ -38772,7 +39046,7 @@
           <a:p>
             <a:fld id="{D9B6BDF2-6896-4B98-8776-C18582F63BA5}" type="slidenum">
               <a:rPr lang="zh-TW" altLang="en-US" smtClean="0"/>
-              <a:t>23</a:t>
+              <a:t>24</a:t>
             </a:fld>
             <a:endParaRPr lang="zh-TW" altLang="en-US"/>
           </a:p>
@@ -38821,7 +39095,7 @@
 </p:sld>
 </file>
 
-<file path=ppt/slides/slide24.xml><?xml version="1.0" encoding="utf-8"?>
+<file path=ppt/slides/slide25.xml><?xml version="1.0" encoding="utf-8"?>
 <p:sld xmlns:a="http://schemas.openxmlformats.org/drawingml/2006/main" xmlns:r="http://schemas.openxmlformats.org/officeDocument/2006/relationships" xmlns:p="http://schemas.openxmlformats.org/presentationml/2006/main">
   <p:cSld>
     <p:spTree>
@@ -38877,7 +39151,7 @@
           <a:p>
             <a:fld id="{D9B6BDF2-6896-4B98-8776-C18582F63BA5}" type="slidenum">
               <a:rPr lang="zh-TW" altLang="en-US" smtClean="0"/>
-              <a:t>24</a:t>
+              <a:t>25</a:t>
             </a:fld>
             <a:endParaRPr lang="zh-TW" altLang="en-US"/>
           </a:p>
@@ -39133,7 +39407,7 @@
 </p:sld>
 </file>
 
-<file path=ppt/slides/slide25.xml><?xml version="1.0" encoding="utf-8"?>
+<file path=ppt/slides/slide26.xml><?xml version="1.0" encoding="utf-8"?>
 <p:sld xmlns:a="http://schemas.openxmlformats.org/drawingml/2006/main" xmlns:r="http://schemas.openxmlformats.org/officeDocument/2006/relationships" xmlns:p="http://schemas.openxmlformats.org/presentationml/2006/main">
   <p:cSld>
     <p:spTree>
@@ -39194,7 +39468,7 @@
           <a:p>
             <a:fld id="{D9B6BDF2-6896-4B98-8776-C18582F63BA5}" type="slidenum">
               <a:rPr lang="zh-TW" altLang="en-US" smtClean="0"/>
-              <a:t>25</a:t>
+              <a:t>26</a:t>
             </a:fld>
             <a:endParaRPr lang="zh-TW" altLang="en-US"/>
           </a:p>
@@ -39632,7 +39906,7 @@
 </p:sld>
 </file>
 
-<file path=ppt/slides/slide26.xml><?xml version="1.0" encoding="utf-8"?>
+<file path=ppt/slides/slide27.xml><?xml version="1.0" encoding="utf-8"?>
 <p:sld xmlns:a="http://schemas.openxmlformats.org/drawingml/2006/main" xmlns:r="http://schemas.openxmlformats.org/officeDocument/2006/relationships" xmlns:p="http://schemas.openxmlformats.org/presentationml/2006/main">
   <p:cSld>
     <p:spTree>
@@ -39690,7 +39964,7 @@
           <a:p>
             <a:fld id="{D9B6BDF2-6896-4B98-8776-C18582F63BA5}" type="slidenum">
               <a:rPr lang="zh-TW" altLang="en-US" smtClean="0"/>
-              <a:t>26</a:t>
+              <a:t>27</a:t>
             </a:fld>
             <a:endParaRPr lang="zh-TW" altLang="en-US"/>
           </a:p>
@@ -40671,7 +40945,7 @@
 </p:sld>
 </file>
 
-<file path=ppt/slides/slide27.xml><?xml version="1.0" encoding="utf-8"?>
+<file path=ppt/slides/slide28.xml><?xml version="1.0" encoding="utf-8"?>
 <p:sld xmlns:a="http://schemas.openxmlformats.org/drawingml/2006/main" xmlns:r="http://schemas.openxmlformats.org/officeDocument/2006/relationships" xmlns:p="http://schemas.openxmlformats.org/presentationml/2006/main">
   <p:cSld>
     <p:spTree>
@@ -40707,7 +40981,7 @@
           <a:p>
             <a:r>
               <a:rPr lang="en-US" sz="3733" dirty="0"/>
-              <a:t>Multiple Instructions On-the-Fly</a:t>
+              <a:t>Multiple Instructions On-the-Fly in Pipeline</a:t>
             </a:r>
           </a:p>
         </p:txBody>
@@ -40729,7 +41003,7 @@
           <a:p>
             <a:fld id="{D9B6BDF2-6896-4B98-8776-C18582F63BA5}" type="slidenum">
               <a:rPr lang="zh-TW" altLang="en-US" smtClean="0"/>
-              <a:t>27</a:t>
+              <a:t>28</a:t>
             </a:fld>
             <a:endParaRPr lang="zh-TW" altLang="en-US"/>
           </a:p>
@@ -41353,7 +41627,7 @@
 </p:sld>
 </file>
 
-<file path=ppt/slides/slide28.xml><?xml version="1.0" encoding="utf-8"?>
+<file path=ppt/slides/slide29.xml><?xml version="1.0" encoding="utf-8"?>
 <p:sld xmlns:a="http://schemas.openxmlformats.org/drawingml/2006/main" xmlns:r="http://schemas.openxmlformats.org/officeDocument/2006/relationships" xmlns:p="http://schemas.openxmlformats.org/presentationml/2006/main">
   <p:cSld>
     <p:spTree>
@@ -41389,7 +41663,7 @@
           <a:p>
             <a:r>
               <a:rPr lang="en-US" sz="3733" dirty="0"/>
-              <a:t>Key to Pipelining: Inserting Pipeline Registers</a:t>
+              <a:t>Multiple Instructions On-the-Fly in Pipeline</a:t>
             </a:r>
           </a:p>
         </p:txBody>
@@ -41411,7 +41685,929 @@
           <a:p>
             <a:fld id="{D9B6BDF2-6896-4B98-8776-C18582F63BA5}" type="slidenum">
               <a:rPr lang="zh-TW" altLang="en-US" smtClean="0"/>
-              <a:t>28</a:t>
+              <a:t>29</a:t>
+            </a:fld>
+            <a:endParaRPr lang="zh-TW" altLang="en-US"/>
+          </a:p>
+        </p:txBody>
+      </p:sp>
+      <p:pic>
+        <p:nvPicPr>
+          <p:cNvPr id="33" name="Picture 32">
+            <a:extLst>
+              <a:ext uri="{FF2B5EF4-FFF2-40B4-BE49-F238E27FC236}">
+                <a16:creationId xmlns:a16="http://schemas.microsoft.com/office/drawing/2014/main" id="{C51D2EDC-A3FC-4A0A-8B33-2D07FF8ECCD7}"/>
+              </a:ext>
+            </a:extLst>
+          </p:cNvPr>
+          <p:cNvPicPr>
+            <a:picLocks noChangeAspect="1"/>
+          </p:cNvPicPr>
+          <p:nvPr/>
+        </p:nvPicPr>
+        <p:blipFill>
+          <a:blip r:embed="rId2"/>
+          <a:stretch>
+            <a:fillRect/>
+          </a:stretch>
+        </p:blipFill>
+        <p:spPr>
+          <a:xfrm>
+            <a:off x="585889" y="1263138"/>
+            <a:ext cx="10875523" cy="4584604"/>
+          </a:xfrm>
+          <a:prstGeom prst="rect">
+            <a:avLst/>
+          </a:prstGeom>
+        </p:spPr>
+      </p:pic>
+      <p:sp>
+        <p:nvSpPr>
+          <p:cNvPr id="18" name="Oval 17">
+            <a:extLst>
+              <a:ext uri="{FF2B5EF4-FFF2-40B4-BE49-F238E27FC236}">
+                <a16:creationId xmlns:a16="http://schemas.microsoft.com/office/drawing/2014/main" id="{CD75EA83-F158-45CA-AAF0-FD02753A825D}"/>
+              </a:ext>
+            </a:extLst>
+          </p:cNvPr>
+          <p:cNvSpPr/>
+          <p:nvPr/>
+        </p:nvSpPr>
+        <p:spPr bwMode="auto">
+          <a:xfrm>
+            <a:off x="4286250" y="3057524"/>
+            <a:ext cx="914400" cy="371475"/>
+          </a:xfrm>
+          <a:prstGeom prst="ellipse">
+            <a:avLst/>
+          </a:prstGeom>
+          <a:noFill/>
+          <a:ln w="38100" cap="flat" cmpd="sng" algn="ctr">
+            <a:solidFill>
+              <a:srgbClr val="FFFF00"/>
+            </a:solidFill>
+            <a:prstDash val="solid"/>
+            <a:round/>
+            <a:headEnd type="none" w="med" len="med"/>
+            <a:tailEnd type="none" w="med" len="med"/>
+          </a:ln>
+          <a:effectLst/>
+        </p:spPr>
+        <p:txBody>
+          <a:bodyPr vert="horz" wrap="none" lIns="91440" tIns="45720" rIns="91440" bIns="45720" numCol="1" rtlCol="0" anchor="ctr" anchorCtr="0" compatLnSpc="1">
+            <a:prstTxWarp prst="textNoShape">
+              <a:avLst/>
+            </a:prstTxWarp>
+          </a:bodyPr>
+          <a:lstStyle/>
+          <a:p>
+            <a:pPr marL="0" marR="0" indent="0" algn="ctr" defTabSz="914400" rtl="0" eaLnBrk="1" fontAlgn="base" latinLnBrk="0" hangingPunct="1">
+              <a:lnSpc>
+                <a:spcPct val="100000"/>
+              </a:lnSpc>
+              <a:spcBef>
+                <a:spcPct val="0"/>
+              </a:spcBef>
+              <a:spcAft>
+                <a:spcPct val="0"/>
+              </a:spcAft>
+              <a:buClrTx/>
+              <a:buSzTx/>
+              <a:buFontTx/>
+              <a:buNone/>
+              <a:tabLst/>
+            </a:pPr>
+            <a:endParaRPr kumimoji="1" lang="en-US" sz="1800" b="1" i="0" u="none" strike="noStrike" cap="none" normalizeH="0" baseline="0">
+              <a:ln>
+                <a:noFill/>
+              </a:ln>
+              <a:solidFill>
+                <a:schemeClr val="tx1"/>
+              </a:solidFill>
+              <a:effectLst/>
+              <a:latin typeface="Arial" pitchFamily="34" charset="0"/>
+              <a:ea typeface="新細明體" pitchFamily="18" charset="-120"/>
+            </a:endParaRPr>
+          </a:p>
+        </p:txBody>
+      </p:sp>
+      <p:sp>
+        <p:nvSpPr>
+          <p:cNvPr id="19" name="TextBox 18">
+            <a:extLst>
+              <a:ext uri="{FF2B5EF4-FFF2-40B4-BE49-F238E27FC236}">
+                <a16:creationId xmlns:a16="http://schemas.microsoft.com/office/drawing/2014/main" id="{58AECDA1-5998-4DB0-A987-AA5EF3DEB044}"/>
+              </a:ext>
+            </a:extLst>
+          </p:cNvPr>
+          <p:cNvSpPr txBox="1"/>
+          <p:nvPr/>
+        </p:nvSpPr>
+        <p:spPr>
+          <a:xfrm>
+            <a:off x="585889" y="1698666"/>
+            <a:ext cx="4852610" cy="923330"/>
+          </a:xfrm>
+          <a:prstGeom prst="rect">
+            <a:avLst/>
+          </a:prstGeom>
+          <a:solidFill>
+            <a:srgbClr val="FFFF00"/>
+          </a:solidFill>
+        </p:spPr>
+        <p:txBody>
+          <a:bodyPr wrap="none" rtlCol="0" anchor="ctr" anchorCtr="1">
+            <a:spAutoFit/>
+          </a:bodyPr>
+          <a:lstStyle/>
+          <a:p>
+            <a:r>
+              <a:rPr lang="en-US" dirty="0">
+                <a:ea typeface="標楷體" pitchFamily="65" charset="-120"/>
+                <a:cs typeface="Calibri" pitchFamily="34" charset="0"/>
+              </a:rPr>
+              <a:t>Which Rd to write?</a:t>
+            </a:r>
+          </a:p>
+          <a:p>
+            <a:r>
+              <a:rPr lang="en-US" dirty="0">
+                <a:ea typeface="標楷體" pitchFamily="65" charset="-120"/>
+                <a:cs typeface="Calibri" pitchFamily="34" charset="0"/>
+              </a:rPr>
+              <a:t>The Rd from the instruction at the WB stage</a:t>
+            </a:r>
+          </a:p>
+          <a:p>
+            <a:r>
+              <a:rPr lang="en-US" dirty="0">
+                <a:ea typeface="標楷體" pitchFamily="65" charset="-120"/>
+                <a:cs typeface="Calibri" pitchFamily="34" charset="0"/>
+              </a:rPr>
+              <a:t>or the Rd from the instruction at the ID stage?</a:t>
+            </a:r>
+          </a:p>
+        </p:txBody>
+      </p:sp>
+      <p:cxnSp>
+        <p:nvCxnSpPr>
+          <p:cNvPr id="7" name="Straight Arrow Connector 6">
+            <a:extLst>
+              <a:ext uri="{FF2B5EF4-FFF2-40B4-BE49-F238E27FC236}">
+                <a16:creationId xmlns:a16="http://schemas.microsoft.com/office/drawing/2014/main" id="{E0F1C12D-CDC3-4966-B438-12C344C39691}"/>
+              </a:ext>
+            </a:extLst>
+          </p:cNvPr>
+          <p:cNvCxnSpPr>
+            <a:cxnSpLocks/>
+          </p:cNvCxnSpPr>
+          <p:nvPr/>
+        </p:nvCxnSpPr>
+        <p:spPr bwMode="auto">
+          <a:xfrm flipV="1">
+            <a:off x="5267325" y="4124325"/>
+            <a:ext cx="0" cy="498209"/>
+          </a:xfrm>
+          <a:prstGeom prst="straightConnector1">
+            <a:avLst/>
+          </a:prstGeom>
+          <a:noFill/>
+          <a:ln w="38100" cap="flat" cmpd="sng" algn="ctr">
+            <a:solidFill>
+              <a:srgbClr val="FFFF00"/>
+            </a:solidFill>
+            <a:prstDash val="solid"/>
+            <a:round/>
+            <a:headEnd type="none" w="med" len="med"/>
+            <a:tailEnd type="triangle"/>
+          </a:ln>
+          <a:effectLst/>
+        </p:spPr>
+      </p:cxnSp>
+      <p:sp>
+        <p:nvSpPr>
+          <p:cNvPr id="5" name="TextBox 4">
+            <a:extLst>
+              <a:ext uri="{FF2B5EF4-FFF2-40B4-BE49-F238E27FC236}">
+                <a16:creationId xmlns:a16="http://schemas.microsoft.com/office/drawing/2014/main" id="{EBF331E4-15FD-4FC5-80D4-09ECF96DA957}"/>
+              </a:ext>
+            </a:extLst>
+          </p:cNvPr>
+          <p:cNvSpPr txBox="1"/>
+          <p:nvPr/>
+        </p:nvSpPr>
+        <p:spPr>
+          <a:xfrm>
+            <a:off x="3255887" y="4928501"/>
+            <a:ext cx="1944763" cy="461665"/>
+          </a:xfrm>
+          <a:prstGeom prst="rect">
+            <a:avLst/>
+          </a:prstGeom>
+          <a:solidFill>
+            <a:srgbClr val="FFFF00"/>
+          </a:solidFill>
+          <a:ln>
+            <a:solidFill>
+              <a:srgbClr val="FF0000"/>
+            </a:solidFill>
+          </a:ln>
+        </p:spPr>
+        <p:txBody>
+          <a:bodyPr wrap="none" rtlCol="0" anchor="ctr" anchorCtr="1">
+            <a:spAutoFit/>
+          </a:bodyPr>
+          <a:lstStyle/>
+          <a:p>
+            <a:r>
+              <a:rPr lang="en-US" sz="2400" dirty="0">
+                <a:ea typeface="標楷體" pitchFamily="65" charset="-120"/>
+                <a:cs typeface="Calibri" pitchFamily="34" charset="0"/>
+              </a:rPr>
+              <a:t>ADD t0, t1,t2</a:t>
+            </a:r>
+          </a:p>
+        </p:txBody>
+      </p:sp>
+      <p:sp>
+        <p:nvSpPr>
+          <p:cNvPr id="11" name="TextBox 10">
+            <a:extLst>
+              <a:ext uri="{FF2B5EF4-FFF2-40B4-BE49-F238E27FC236}">
+                <a16:creationId xmlns:a16="http://schemas.microsoft.com/office/drawing/2014/main" id="{47AEBA4B-47E1-4366-AD7F-8E8940EE8CD7}"/>
+              </a:ext>
+            </a:extLst>
+          </p:cNvPr>
+          <p:cNvSpPr txBox="1"/>
+          <p:nvPr/>
+        </p:nvSpPr>
+        <p:spPr>
+          <a:xfrm>
+            <a:off x="9661348" y="4598035"/>
+            <a:ext cx="1800064" cy="461665"/>
+          </a:xfrm>
+          <a:prstGeom prst="rect">
+            <a:avLst/>
+          </a:prstGeom>
+          <a:solidFill>
+            <a:srgbClr val="FFFF00"/>
+          </a:solidFill>
+          <a:ln>
+            <a:solidFill>
+              <a:srgbClr val="FF0000"/>
+            </a:solidFill>
+          </a:ln>
+        </p:spPr>
+        <p:txBody>
+          <a:bodyPr wrap="square" rtlCol="0" anchor="ctr" anchorCtr="1">
+            <a:spAutoFit/>
+          </a:bodyPr>
+          <a:lstStyle/>
+          <a:p>
+            <a:r>
+              <a:rPr lang="en-US" sz="2400" dirty="0">
+                <a:ea typeface="標楷體" pitchFamily="65" charset="-120"/>
+                <a:cs typeface="Calibri" pitchFamily="34" charset="0"/>
+              </a:rPr>
+              <a:t>SW t0,8(t1) </a:t>
+            </a:r>
+          </a:p>
+        </p:txBody>
+      </p:sp>
+      <p:sp>
+        <p:nvSpPr>
+          <p:cNvPr id="12" name="TextBox 11">
+            <a:extLst>
+              <a:ext uri="{FF2B5EF4-FFF2-40B4-BE49-F238E27FC236}">
+                <a16:creationId xmlns:a16="http://schemas.microsoft.com/office/drawing/2014/main" id="{4F62F103-A8EE-4A5B-B7DC-9A75CC2EB2B3}"/>
+              </a:ext>
+            </a:extLst>
+          </p:cNvPr>
+          <p:cNvSpPr txBox="1"/>
+          <p:nvPr/>
+        </p:nvSpPr>
+        <p:spPr>
+          <a:xfrm>
+            <a:off x="5267325" y="4406979"/>
+            <a:ext cx="1004887" cy="369332"/>
+          </a:xfrm>
+          <a:prstGeom prst="rect">
+            <a:avLst/>
+          </a:prstGeom>
+          <a:solidFill>
+            <a:srgbClr val="FFFF00"/>
+          </a:solidFill>
+        </p:spPr>
+        <p:txBody>
+          <a:bodyPr wrap="square" rtlCol="0" anchor="ctr" anchorCtr="1">
+            <a:spAutoFit/>
+          </a:bodyPr>
+          <a:lstStyle/>
+          <a:p>
+            <a:r>
+              <a:rPr lang="en-US" b="1" dirty="0" err="1">
+                <a:ea typeface="標楷體" pitchFamily="65" charset="-120"/>
+                <a:cs typeface="Calibri" pitchFamily="34" charset="0"/>
+              </a:rPr>
+              <a:t>RegWr</a:t>
+            </a:r>
+            <a:endParaRPr lang="en-US" b="1" dirty="0">
+              <a:ea typeface="標楷體" pitchFamily="65" charset="-120"/>
+              <a:cs typeface="Calibri" pitchFamily="34" charset="0"/>
+            </a:endParaRPr>
+          </a:p>
+        </p:txBody>
+      </p:sp>
+      <p:sp>
+        <p:nvSpPr>
+          <p:cNvPr id="13" name="TextBox 12">
+            <a:extLst>
+              <a:ext uri="{FF2B5EF4-FFF2-40B4-BE49-F238E27FC236}">
+                <a16:creationId xmlns:a16="http://schemas.microsoft.com/office/drawing/2014/main" id="{DB261CB8-85A2-41A3-9265-BA575EB34001}"/>
+              </a:ext>
+            </a:extLst>
+          </p:cNvPr>
+          <p:cNvSpPr txBox="1"/>
+          <p:nvPr/>
+        </p:nvSpPr>
+        <p:spPr>
+          <a:xfrm>
+            <a:off x="9516649" y="5255388"/>
+            <a:ext cx="1944763" cy="461665"/>
+          </a:xfrm>
+          <a:prstGeom prst="rect">
+            <a:avLst/>
+          </a:prstGeom>
+          <a:solidFill>
+            <a:srgbClr val="FFFF00"/>
+          </a:solidFill>
+          <a:ln>
+            <a:solidFill>
+              <a:srgbClr val="FF0000"/>
+            </a:solidFill>
+          </a:ln>
+        </p:spPr>
+        <p:txBody>
+          <a:bodyPr wrap="none" rtlCol="0" anchor="ctr" anchorCtr="1">
+            <a:spAutoFit/>
+          </a:bodyPr>
+          <a:lstStyle/>
+          <a:p>
+            <a:r>
+              <a:rPr lang="en-US" sz="2400" dirty="0">
+                <a:ea typeface="標楷體" pitchFamily="65" charset="-120"/>
+                <a:cs typeface="Calibri" pitchFamily="34" charset="0"/>
+              </a:rPr>
+              <a:t>AND t3, t1,t2</a:t>
+            </a:r>
+          </a:p>
+        </p:txBody>
+      </p:sp>
+    </p:spTree>
+    <p:extLst>
+      <p:ext uri="{BB962C8B-B14F-4D97-AF65-F5344CB8AC3E}">
+        <p14:creationId xmlns:p14="http://schemas.microsoft.com/office/powerpoint/2010/main" val="1332155585"/>
+      </p:ext>
+    </p:extLst>
+  </p:cSld>
+  <p:clrMapOvr>
+    <a:masterClrMapping/>
+  </p:clrMapOvr>
+  <p:timing>
+    <p:tnLst>
+      <p:par>
+        <p:cTn id="1" dur="indefinite" restart="never" nodeType="tmRoot">
+          <p:childTnLst>
+            <p:seq concurrent="1" nextAc="seek">
+              <p:cTn id="2" dur="indefinite" nodeType="mainSeq">
+                <p:childTnLst>
+                  <p:par>
+                    <p:cTn id="3" fill="hold">
+                      <p:stCondLst>
+                        <p:cond delay="indefinite"/>
+                      </p:stCondLst>
+                      <p:childTnLst>
+                        <p:par>
+                          <p:cTn id="4" fill="hold">
+                            <p:stCondLst>
+                              <p:cond delay="0"/>
+                            </p:stCondLst>
+                            <p:childTnLst>
+                              <p:par>
+                                <p:cTn id="5" presetID="1" presetClass="entr" presetSubtype="0" fill="hold" grpId="0" nodeType="clickEffect">
+                                  <p:stCondLst>
+                                    <p:cond delay="0"/>
+                                  </p:stCondLst>
+                                  <p:childTnLst>
+                                    <p:set>
+                                      <p:cBhvr>
+                                        <p:cTn id="6" dur="1" fill="hold">
+                                          <p:stCondLst>
+                                            <p:cond delay="0"/>
+                                          </p:stCondLst>
+                                        </p:cTn>
+                                        <p:tgtEl>
+                                          <p:spTgt spid="5"/>
+                                        </p:tgtEl>
+                                        <p:attrNameLst>
+                                          <p:attrName>style.visibility</p:attrName>
+                                        </p:attrNameLst>
+                                      </p:cBhvr>
+                                      <p:to>
+                                        <p:strVal val="visible"/>
+                                      </p:to>
+                                    </p:set>
+                                  </p:childTnLst>
+                                </p:cTn>
+                              </p:par>
+                              <p:par>
+                                <p:cTn id="7" presetID="1" presetClass="entr" presetSubtype="0" fill="hold" grpId="0" nodeType="withEffect">
+                                  <p:stCondLst>
+                                    <p:cond delay="0"/>
+                                  </p:stCondLst>
+                                  <p:childTnLst>
+                                    <p:set>
+                                      <p:cBhvr>
+                                        <p:cTn id="8" dur="1" fill="hold">
+                                          <p:stCondLst>
+                                            <p:cond delay="0"/>
+                                          </p:stCondLst>
+                                        </p:cTn>
+                                        <p:tgtEl>
+                                          <p:spTgt spid="11"/>
+                                        </p:tgtEl>
+                                        <p:attrNameLst>
+                                          <p:attrName>style.visibility</p:attrName>
+                                        </p:attrNameLst>
+                                      </p:cBhvr>
+                                      <p:to>
+                                        <p:strVal val="visible"/>
+                                      </p:to>
+                                    </p:set>
+                                  </p:childTnLst>
+                                </p:cTn>
+                              </p:par>
+                            </p:childTnLst>
+                          </p:cTn>
+                        </p:par>
+                      </p:childTnLst>
+                    </p:cTn>
+                  </p:par>
+                  <p:par>
+                    <p:cTn id="9" fill="hold">
+                      <p:stCondLst>
+                        <p:cond delay="indefinite"/>
+                      </p:stCondLst>
+                      <p:childTnLst>
+                        <p:par>
+                          <p:cTn id="10" fill="hold">
+                            <p:stCondLst>
+                              <p:cond delay="0"/>
+                            </p:stCondLst>
+                            <p:childTnLst>
+                              <p:par>
+                                <p:cTn id="11" presetID="1" presetClass="entr" presetSubtype="0" fill="hold" grpId="0" nodeType="clickEffect">
+                                  <p:stCondLst>
+                                    <p:cond delay="0"/>
+                                  </p:stCondLst>
+                                  <p:childTnLst>
+                                    <p:set>
+                                      <p:cBhvr>
+                                        <p:cTn id="12" dur="1" fill="hold">
+                                          <p:stCondLst>
+                                            <p:cond delay="0"/>
+                                          </p:stCondLst>
+                                        </p:cTn>
+                                        <p:tgtEl>
+                                          <p:spTgt spid="13"/>
+                                        </p:tgtEl>
+                                        <p:attrNameLst>
+                                          <p:attrName>style.visibility</p:attrName>
+                                        </p:attrNameLst>
+                                      </p:cBhvr>
+                                      <p:to>
+                                        <p:strVal val="visible"/>
+                                      </p:to>
+                                    </p:set>
+                                  </p:childTnLst>
+                                </p:cTn>
+                              </p:par>
+                            </p:childTnLst>
+                          </p:cTn>
+                        </p:par>
+                      </p:childTnLst>
+                    </p:cTn>
+                  </p:par>
+                </p:childTnLst>
+              </p:cTn>
+              <p:prevCondLst>
+                <p:cond evt="onPrev" delay="0">
+                  <p:tgtEl>
+                    <p:sldTgt/>
+                  </p:tgtEl>
+                </p:cond>
+              </p:prevCondLst>
+              <p:nextCondLst>
+                <p:cond evt="onNext" delay="0">
+                  <p:tgtEl>
+                    <p:sldTgt/>
+                  </p:tgtEl>
+                </p:cond>
+              </p:nextCondLst>
+            </p:seq>
+          </p:childTnLst>
+        </p:cTn>
+      </p:par>
+    </p:tnLst>
+    <p:bldLst>
+      <p:bldP spid="5" grpId="0" animBg="1"/>
+      <p:bldP spid="11" grpId="0" animBg="1"/>
+      <p:bldP spid="13" grpId="0" animBg="1"/>
+    </p:bldLst>
+  </p:timing>
+</p:sld>
+</file>
+
+<file path=ppt/slides/slide3.xml><?xml version="1.0" encoding="utf-8"?>
+<p:sld xmlns:a="http://schemas.openxmlformats.org/drawingml/2006/main" xmlns:r="http://schemas.openxmlformats.org/officeDocument/2006/relationships" xmlns:p="http://schemas.openxmlformats.org/presentationml/2006/main">
+  <p:cSld>
+    <p:spTree>
+      <p:nvGrpSpPr>
+        <p:cNvPr id="1" name=""/>
+        <p:cNvGrpSpPr/>
+        <p:nvPr/>
+      </p:nvGrpSpPr>
+      <p:grpSpPr>
+        <a:xfrm>
+          <a:off x="0" y="0"/>
+          <a:ext cx="0" cy="0"/>
+          <a:chOff x="0" y="0"/>
+          <a:chExt cx="0" cy="0"/>
+        </a:xfrm>
+      </p:grpSpPr>
+      <p:sp>
+        <p:nvSpPr>
+          <p:cNvPr id="2" name="Title 1"/>
+          <p:cNvSpPr>
+            <a:spLocks noGrp="1"/>
+          </p:cNvSpPr>
+          <p:nvPr>
+            <p:ph type="title"/>
+          </p:nvPr>
+        </p:nvSpPr>
+        <p:spPr/>
+        <p:txBody>
+          <a:bodyPr/>
+          <a:lstStyle/>
+          <a:p>
+            <a:r>
+              <a:rPr lang="en-US" dirty="0"/>
+              <a:t>Five Stages of the Simple Data Path</a:t>
+            </a:r>
+          </a:p>
+        </p:txBody>
+      </p:sp>
+      <p:sp>
+        <p:nvSpPr>
+          <p:cNvPr id="3" name="Content Placeholder 2"/>
+          <p:cNvSpPr>
+            <a:spLocks noGrp="1"/>
+          </p:cNvSpPr>
+          <p:nvPr>
+            <p:ph idx="1"/>
+          </p:nvPr>
+        </p:nvSpPr>
+        <p:spPr>
+          <a:xfrm>
+            <a:off x="1331053" y="1125537"/>
+            <a:ext cx="10251347" cy="4895851"/>
+          </a:xfrm>
+        </p:spPr>
+        <p:txBody>
+          <a:bodyPr>
+            <a:normAutofit/>
+          </a:bodyPr>
+          <a:lstStyle/>
+          <a:p>
+            <a:r>
+              <a:rPr lang="en-US" dirty="0"/>
+              <a:t>Five stages, one step per stage</a:t>
+            </a:r>
+          </a:p>
+          <a:p>
+            <a:pPr marL="514760" indent="-514760">
+              <a:buFont typeface="+mj-lt"/>
+              <a:buAutoNum type="arabicPeriod"/>
+            </a:pPr>
+            <a:r>
+              <a:rPr lang="en-US" b="1" dirty="0">
+                <a:solidFill>
+                  <a:schemeClr val="accent1"/>
+                </a:solidFill>
+              </a:rPr>
+              <a:t>IF</a:t>
+            </a:r>
+            <a:r>
+              <a:rPr lang="en-US" dirty="0"/>
+              <a:t>: Instruction fetch from (instruction) memory</a:t>
+            </a:r>
+          </a:p>
+          <a:p>
+            <a:pPr marL="514760" indent="-514760">
+              <a:buFont typeface="+mj-lt"/>
+              <a:buAutoNum type="arabicPeriod"/>
+            </a:pPr>
+            <a:r>
+              <a:rPr lang="en-US" b="1" dirty="0">
+                <a:solidFill>
+                  <a:schemeClr val="accent1"/>
+                </a:solidFill>
+              </a:rPr>
+              <a:t>ID</a:t>
+            </a:r>
+            <a:r>
+              <a:rPr lang="en-US" dirty="0"/>
+              <a:t>: Instruction decode &amp; register read</a:t>
+            </a:r>
+          </a:p>
+          <a:p>
+            <a:pPr marL="514760" indent="-514760">
+              <a:buFont typeface="+mj-lt"/>
+              <a:buAutoNum type="arabicPeriod"/>
+            </a:pPr>
+            <a:r>
+              <a:rPr lang="en-US" b="1" dirty="0">
+                <a:solidFill>
+                  <a:schemeClr val="accent1"/>
+                </a:solidFill>
+              </a:rPr>
+              <a:t>EX</a:t>
+            </a:r>
+            <a:r>
+              <a:rPr lang="en-US" dirty="0"/>
+              <a:t>: Execute operation or calculate address</a:t>
+            </a:r>
+          </a:p>
+          <a:p>
+            <a:pPr marL="514760" indent="-514760">
+              <a:buFont typeface="+mj-lt"/>
+              <a:buAutoNum type="arabicPeriod"/>
+            </a:pPr>
+            <a:r>
+              <a:rPr lang="en-US" b="1" dirty="0">
+                <a:solidFill>
+                  <a:schemeClr val="accent1"/>
+                </a:solidFill>
+              </a:rPr>
+              <a:t>MEM</a:t>
+            </a:r>
+            <a:r>
+              <a:rPr lang="en-US" dirty="0"/>
+              <a:t>: Access (data) memory operand</a:t>
+            </a:r>
+          </a:p>
+          <a:p>
+            <a:pPr marL="514760" indent="-514760">
+              <a:buFont typeface="+mj-lt"/>
+              <a:buAutoNum type="arabicPeriod"/>
+            </a:pPr>
+            <a:r>
+              <a:rPr lang="en-US" b="1" dirty="0">
+                <a:solidFill>
+                  <a:schemeClr val="accent1"/>
+                </a:solidFill>
+              </a:rPr>
+              <a:t>WB</a:t>
+            </a:r>
+            <a:r>
+              <a:rPr lang="en-US" dirty="0"/>
+              <a:t>: Write the result back to register</a:t>
+            </a:r>
+          </a:p>
+        </p:txBody>
+      </p:sp>
+      <p:sp>
+        <p:nvSpPr>
+          <p:cNvPr id="6" name="灯片编号占位符 5"/>
+          <p:cNvSpPr>
+            <a:spLocks noGrp="1"/>
+          </p:cNvSpPr>
+          <p:nvPr>
+            <p:ph type="sldNum" sz="quarter" idx="10"/>
+          </p:nvPr>
+        </p:nvSpPr>
+        <p:spPr/>
+        <p:txBody>
+          <a:bodyPr/>
+          <a:lstStyle/>
+          <a:p>
+            <a:fld id="{D9B6BDF2-6896-4B98-8776-C18582F63BA5}" type="slidenum">
+              <a:rPr lang="zh-TW" altLang="en-US" smtClean="0"/>
+              <a:t>3</a:t>
+            </a:fld>
+            <a:endParaRPr lang="zh-TW" altLang="en-US"/>
+          </a:p>
+        </p:txBody>
+      </p:sp>
+      <p:sp>
+        <p:nvSpPr>
+          <p:cNvPr id="5" name="TextBox 4">
+            <a:extLst>
+              <a:ext uri="{FF2B5EF4-FFF2-40B4-BE49-F238E27FC236}">
+                <a16:creationId xmlns:a16="http://schemas.microsoft.com/office/drawing/2014/main" id="{8064FCDE-1E6C-4421-8097-317B854A4BCF}"/>
+              </a:ext>
+            </a:extLst>
+          </p:cNvPr>
+          <p:cNvSpPr txBox="1"/>
+          <p:nvPr/>
+        </p:nvSpPr>
+        <p:spPr>
+          <a:xfrm>
+            <a:off x="1410510" y="5316964"/>
+            <a:ext cx="8638161" cy="830997"/>
+          </a:xfrm>
+          <a:prstGeom prst="rect">
+            <a:avLst/>
+          </a:prstGeom>
+          <a:solidFill>
+            <a:srgbClr val="FFFF00"/>
+          </a:solidFill>
+          <a:ln>
+            <a:solidFill>
+              <a:srgbClr val="FF0000"/>
+            </a:solidFill>
+          </a:ln>
+        </p:spPr>
+        <p:txBody>
+          <a:bodyPr wrap="square" rtlCol="0" anchor="ctr" anchorCtr="1">
+            <a:spAutoFit/>
+          </a:bodyPr>
+          <a:lstStyle/>
+          <a:p>
+            <a:r>
+              <a:rPr lang="en-US" sz="2400" dirty="0">
+                <a:ea typeface="標楷體" pitchFamily="65" charset="-120"/>
+                <a:cs typeface="Calibri" pitchFamily="34" charset="0"/>
+              </a:rPr>
+              <a:t>Initially, this partition is for multi-cycle implementation:</a:t>
+            </a:r>
+          </a:p>
+          <a:p>
+            <a:r>
+              <a:rPr lang="en-US" sz="2400" dirty="0">
+                <a:ea typeface="標楷體" pitchFamily="65" charset="-120"/>
+                <a:cs typeface="Calibri" pitchFamily="34" charset="0"/>
+              </a:rPr>
+              <a:t>an instruction can finish at stage 3, stage 4 or stage 5 </a:t>
+            </a:r>
+          </a:p>
+        </p:txBody>
+      </p:sp>
+    </p:spTree>
+  </p:cSld>
+  <p:clrMapOvr>
+    <a:masterClrMapping/>
+  </p:clrMapOvr>
+  <p:timing>
+    <p:tnLst>
+      <p:par>
+        <p:cTn id="1" dur="indefinite" restart="never" nodeType="tmRoot">
+          <p:childTnLst>
+            <p:seq concurrent="1" nextAc="seek">
+              <p:cTn id="2" dur="indefinite" nodeType="mainSeq">
+                <p:childTnLst>
+                  <p:par>
+                    <p:cTn id="3" fill="hold">
+                      <p:stCondLst>
+                        <p:cond delay="indefinite"/>
+                      </p:stCondLst>
+                      <p:childTnLst>
+                        <p:par>
+                          <p:cTn id="4" fill="hold">
+                            <p:stCondLst>
+                              <p:cond delay="0"/>
+                            </p:stCondLst>
+                            <p:childTnLst>
+                              <p:par>
+                                <p:cTn id="5" presetID="1" presetClass="entr" presetSubtype="0" fill="hold" grpId="0" nodeType="clickEffect">
+                                  <p:stCondLst>
+                                    <p:cond delay="0"/>
+                                  </p:stCondLst>
+                                  <p:childTnLst>
+                                    <p:set>
+                                      <p:cBhvr>
+                                        <p:cTn id="6" dur="1" fill="hold">
+                                          <p:stCondLst>
+                                            <p:cond delay="0"/>
+                                          </p:stCondLst>
+                                        </p:cTn>
+                                        <p:tgtEl>
+                                          <p:spTgt spid="5"/>
+                                        </p:tgtEl>
+                                        <p:attrNameLst>
+                                          <p:attrName>style.visibility</p:attrName>
+                                        </p:attrNameLst>
+                                      </p:cBhvr>
+                                      <p:to>
+                                        <p:strVal val="visible"/>
+                                      </p:to>
+                                    </p:set>
+                                  </p:childTnLst>
+                                </p:cTn>
+                              </p:par>
+                            </p:childTnLst>
+                          </p:cTn>
+                        </p:par>
+                      </p:childTnLst>
+                    </p:cTn>
+                  </p:par>
+                </p:childTnLst>
+              </p:cTn>
+              <p:prevCondLst>
+                <p:cond evt="onPrev" delay="0">
+                  <p:tgtEl>
+                    <p:sldTgt/>
+                  </p:tgtEl>
+                </p:cond>
+              </p:prevCondLst>
+              <p:nextCondLst>
+                <p:cond evt="onNext" delay="0">
+                  <p:tgtEl>
+                    <p:sldTgt/>
+                  </p:tgtEl>
+                </p:cond>
+              </p:nextCondLst>
+            </p:seq>
+          </p:childTnLst>
+        </p:cTn>
+      </p:par>
+    </p:tnLst>
+    <p:bldLst>
+      <p:bldP spid="5" grpId="0" animBg="1"/>
+    </p:bldLst>
+  </p:timing>
+</p:sld>
+</file>
+
+<file path=ppt/slides/slide30.xml><?xml version="1.0" encoding="utf-8"?>
+<p:sld xmlns:a="http://schemas.openxmlformats.org/drawingml/2006/main" xmlns:r="http://schemas.openxmlformats.org/officeDocument/2006/relationships" xmlns:p="http://schemas.openxmlformats.org/presentationml/2006/main">
+  <p:cSld>
+    <p:spTree>
+      <p:nvGrpSpPr>
+        <p:cNvPr id="1" name=""/>
+        <p:cNvGrpSpPr/>
+        <p:nvPr/>
+      </p:nvGrpSpPr>
+      <p:grpSpPr>
+        <a:xfrm>
+          <a:off x="0" y="0"/>
+          <a:ext cx="0" cy="0"/>
+          <a:chOff x="0" y="0"/>
+          <a:chExt cx="0" cy="0"/>
+        </a:xfrm>
+      </p:grpSpPr>
+      <p:sp>
+        <p:nvSpPr>
+          <p:cNvPr id="2" name="Title 1"/>
+          <p:cNvSpPr>
+            <a:spLocks noGrp="1"/>
+          </p:cNvSpPr>
+          <p:nvPr>
+            <p:ph type="title"/>
+          </p:nvPr>
+        </p:nvSpPr>
+        <p:spPr/>
+        <p:txBody>
+          <a:bodyPr>
+            <a:normAutofit/>
+          </a:bodyPr>
+          <a:lstStyle/>
+          <a:p>
+            <a:r>
+              <a:rPr lang="en-US" sz="3733" dirty="0"/>
+              <a:t>Key to Pipelining: Inserting Pipeline Registers</a:t>
+            </a:r>
+          </a:p>
+        </p:txBody>
+      </p:sp>
+      <p:sp>
+        <p:nvSpPr>
+          <p:cNvPr id="6" name="灯片编号占位符 5"/>
+          <p:cNvSpPr>
+            <a:spLocks noGrp="1"/>
+          </p:cNvSpPr>
+          <p:nvPr>
+            <p:ph type="sldNum" sz="quarter" idx="10"/>
+          </p:nvPr>
+        </p:nvSpPr>
+        <p:spPr/>
+        <p:txBody>
+          <a:bodyPr/>
+          <a:lstStyle/>
+          <a:p>
+            <a:fld id="{D9B6BDF2-6896-4B98-8776-C18582F63BA5}" type="slidenum">
+              <a:rPr lang="zh-TW" altLang="en-US" smtClean="0"/>
+              <a:t>30</a:t>
             </a:fld>
             <a:endParaRPr lang="zh-TW" altLang="en-US"/>
           </a:p>
@@ -42672,7 +43868,7 @@
 </p:sld>
 </file>
 
-<file path=ppt/slides/slide29.xml><?xml version="1.0" encoding="utf-8"?>
+<file path=ppt/slides/slide31.xml><?xml version="1.0" encoding="utf-8"?>
 <p:sld xmlns:a="http://schemas.openxmlformats.org/drawingml/2006/main" xmlns:r="http://schemas.openxmlformats.org/officeDocument/2006/relationships" xmlns:p="http://schemas.openxmlformats.org/presentationml/2006/main">
   <p:cSld>
     <p:spTree>
@@ -42730,7 +43926,7 @@
           <a:p>
             <a:fld id="{D9B6BDF2-6896-4B98-8776-C18582F63BA5}" type="slidenum">
               <a:rPr lang="zh-TW" altLang="en-US" smtClean="0"/>
-              <a:t>29</a:t>
+              <a:t>31</a:t>
             </a:fld>
             <a:endParaRPr lang="zh-TW" altLang="en-US"/>
           </a:p>
@@ -42927,328 +44123,7 @@
 </p:sld>
 </file>
 
-<file path=ppt/slides/slide3.xml><?xml version="1.0" encoding="utf-8"?>
-<p:sld xmlns:a="http://schemas.openxmlformats.org/drawingml/2006/main" xmlns:r="http://schemas.openxmlformats.org/officeDocument/2006/relationships" xmlns:p="http://schemas.openxmlformats.org/presentationml/2006/main">
-  <p:cSld>
-    <p:spTree>
-      <p:nvGrpSpPr>
-        <p:cNvPr id="1" name=""/>
-        <p:cNvGrpSpPr/>
-        <p:nvPr/>
-      </p:nvGrpSpPr>
-      <p:grpSpPr>
-        <a:xfrm>
-          <a:off x="0" y="0"/>
-          <a:ext cx="0" cy="0"/>
-          <a:chOff x="0" y="0"/>
-          <a:chExt cx="0" cy="0"/>
-        </a:xfrm>
-      </p:grpSpPr>
-      <p:sp>
-        <p:nvSpPr>
-          <p:cNvPr id="2" name="Title 1"/>
-          <p:cNvSpPr>
-            <a:spLocks noGrp="1"/>
-          </p:cNvSpPr>
-          <p:nvPr>
-            <p:ph type="title"/>
-          </p:nvPr>
-        </p:nvSpPr>
-        <p:spPr/>
-        <p:txBody>
-          <a:bodyPr/>
-          <a:lstStyle/>
-          <a:p>
-            <a:r>
-              <a:rPr lang="en-US" dirty="0"/>
-              <a:t>Five Stages of the Simple Data Path</a:t>
-            </a:r>
-          </a:p>
-        </p:txBody>
-      </p:sp>
-      <p:sp>
-        <p:nvSpPr>
-          <p:cNvPr id="3" name="Content Placeholder 2"/>
-          <p:cNvSpPr>
-            <a:spLocks noGrp="1"/>
-          </p:cNvSpPr>
-          <p:nvPr>
-            <p:ph idx="1"/>
-          </p:nvPr>
-        </p:nvSpPr>
-        <p:spPr>
-          <a:xfrm>
-            <a:off x="1331053" y="1125537"/>
-            <a:ext cx="10251347" cy="4895851"/>
-          </a:xfrm>
-        </p:spPr>
-        <p:txBody>
-          <a:bodyPr>
-            <a:normAutofit/>
-          </a:bodyPr>
-          <a:lstStyle/>
-          <a:p>
-            <a:r>
-              <a:rPr lang="en-US" dirty="0"/>
-              <a:t>Five stages, one step per stage</a:t>
-            </a:r>
-          </a:p>
-          <a:p>
-            <a:pPr marL="514760" indent="-514760">
-              <a:buFont typeface="+mj-lt"/>
-              <a:buAutoNum type="arabicPeriod"/>
-            </a:pPr>
-            <a:r>
-              <a:rPr lang="en-US" b="1" dirty="0">
-                <a:solidFill>
-                  <a:schemeClr val="accent1"/>
-                </a:solidFill>
-              </a:rPr>
-              <a:t>IF</a:t>
-            </a:r>
-            <a:r>
-              <a:rPr lang="en-US" dirty="0"/>
-              <a:t>: Instruction fetch from (instruction) memory</a:t>
-            </a:r>
-          </a:p>
-          <a:p>
-            <a:pPr marL="514760" indent="-514760">
-              <a:buFont typeface="+mj-lt"/>
-              <a:buAutoNum type="arabicPeriod"/>
-            </a:pPr>
-            <a:r>
-              <a:rPr lang="en-US" b="1" dirty="0">
-                <a:solidFill>
-                  <a:schemeClr val="accent1"/>
-                </a:solidFill>
-              </a:rPr>
-              <a:t>ID</a:t>
-            </a:r>
-            <a:r>
-              <a:rPr lang="en-US" dirty="0"/>
-              <a:t>: Instruction decode &amp; register read</a:t>
-            </a:r>
-          </a:p>
-          <a:p>
-            <a:pPr marL="514760" indent="-514760">
-              <a:buFont typeface="+mj-lt"/>
-              <a:buAutoNum type="arabicPeriod"/>
-            </a:pPr>
-            <a:r>
-              <a:rPr lang="en-US" b="1" dirty="0">
-                <a:solidFill>
-                  <a:schemeClr val="accent1"/>
-                </a:solidFill>
-              </a:rPr>
-              <a:t>EX</a:t>
-            </a:r>
-            <a:r>
-              <a:rPr lang="en-US" dirty="0"/>
-              <a:t>: Execute operation or calculate address</a:t>
-            </a:r>
-          </a:p>
-          <a:p>
-            <a:pPr marL="514760" indent="-514760">
-              <a:buFont typeface="+mj-lt"/>
-              <a:buAutoNum type="arabicPeriod"/>
-            </a:pPr>
-            <a:r>
-              <a:rPr lang="en-US" b="1" dirty="0">
-                <a:solidFill>
-                  <a:schemeClr val="accent1"/>
-                </a:solidFill>
-              </a:rPr>
-              <a:t>MEM</a:t>
-            </a:r>
-            <a:r>
-              <a:rPr lang="en-US" dirty="0"/>
-              <a:t>: Access (data) memory operand</a:t>
-            </a:r>
-          </a:p>
-          <a:p>
-            <a:pPr marL="514760" indent="-514760">
-              <a:buFont typeface="+mj-lt"/>
-              <a:buAutoNum type="arabicPeriod"/>
-            </a:pPr>
-            <a:r>
-              <a:rPr lang="en-US" b="1" dirty="0">
-                <a:solidFill>
-                  <a:schemeClr val="accent1"/>
-                </a:solidFill>
-              </a:rPr>
-              <a:t>WB</a:t>
-            </a:r>
-            <a:r>
-              <a:rPr lang="en-US" dirty="0"/>
-              <a:t>: Write the result back to register</a:t>
-            </a:r>
-          </a:p>
-        </p:txBody>
-      </p:sp>
-      <p:sp>
-        <p:nvSpPr>
-          <p:cNvPr id="6" name="灯片编号占位符 5"/>
-          <p:cNvSpPr>
-            <a:spLocks noGrp="1"/>
-          </p:cNvSpPr>
-          <p:nvPr>
-            <p:ph type="sldNum" sz="quarter" idx="10"/>
-          </p:nvPr>
-        </p:nvSpPr>
-        <p:spPr/>
-        <p:txBody>
-          <a:bodyPr/>
-          <a:lstStyle/>
-          <a:p>
-            <a:fld id="{D9B6BDF2-6896-4B98-8776-C18582F63BA5}" type="slidenum">
-              <a:rPr lang="zh-TW" altLang="en-US" smtClean="0"/>
-              <a:t>3</a:t>
-            </a:fld>
-            <a:endParaRPr lang="zh-TW" altLang="en-US"/>
-          </a:p>
-        </p:txBody>
-      </p:sp>
-      <p:sp>
-        <p:nvSpPr>
-          <p:cNvPr id="5" name="TextBox 4">
-            <a:extLst>
-              <a:ext uri="{FF2B5EF4-FFF2-40B4-BE49-F238E27FC236}">
-                <a16:creationId xmlns:a16="http://schemas.microsoft.com/office/drawing/2014/main" id="{8064FCDE-1E6C-4421-8097-317B854A4BCF}"/>
-              </a:ext>
-            </a:extLst>
-          </p:cNvPr>
-          <p:cNvSpPr txBox="1"/>
-          <p:nvPr/>
-        </p:nvSpPr>
-        <p:spPr>
-          <a:xfrm>
-            <a:off x="1410510" y="5316964"/>
-            <a:ext cx="8638161" cy="830997"/>
-          </a:xfrm>
-          <a:prstGeom prst="rect">
-            <a:avLst/>
-          </a:prstGeom>
-          <a:solidFill>
-            <a:srgbClr val="FFFF00"/>
-          </a:solidFill>
-          <a:ln>
-            <a:solidFill>
-              <a:srgbClr val="FF0000"/>
-            </a:solidFill>
-          </a:ln>
-        </p:spPr>
-        <p:txBody>
-          <a:bodyPr wrap="square" rtlCol="0" anchor="ctr" anchorCtr="1">
-            <a:spAutoFit/>
-          </a:bodyPr>
-          <a:lstStyle/>
-          <a:p>
-            <a:r>
-              <a:rPr lang="en-US" sz="2400" dirty="0">
-                <a:ea typeface="標楷體" pitchFamily="65" charset="-120"/>
-                <a:cs typeface="Calibri" pitchFamily="34" charset="0"/>
-              </a:rPr>
-              <a:t>Initially, this partition is for multi-cycle implementation:</a:t>
-            </a:r>
-          </a:p>
-          <a:p>
-            <a:r>
-              <a:rPr lang="en-US" sz="2400" dirty="0">
-                <a:ea typeface="標楷體" pitchFamily="65" charset="-120"/>
-                <a:cs typeface="Calibri" pitchFamily="34" charset="0"/>
-              </a:rPr>
-              <a:t>an instruction can finish at stage 3, stage 4 or stage 5 </a:t>
-            </a:r>
-          </a:p>
-        </p:txBody>
-      </p:sp>
-    </p:spTree>
-  </p:cSld>
-  <p:clrMapOvr>
-    <a:masterClrMapping/>
-  </p:clrMapOvr>
-  <p:timing>
-    <p:tnLst>
-      <p:par>
-        <p:cTn id="1" dur="indefinite" restart="never" nodeType="tmRoot">
-          <p:childTnLst>
-            <p:seq concurrent="1" nextAc="seek">
-              <p:cTn id="2" dur="indefinite" nodeType="mainSeq">
-                <p:childTnLst>
-                  <p:par>
-                    <p:cTn id="3" fill="hold">
-                      <p:stCondLst>
-                        <p:cond delay="indefinite"/>
-                      </p:stCondLst>
-                      <p:childTnLst>
-                        <p:par>
-                          <p:cTn id="4" fill="hold">
-                            <p:stCondLst>
-                              <p:cond delay="0"/>
-                            </p:stCondLst>
-                            <p:childTnLst>
-                              <p:par>
-                                <p:cTn id="5" presetID="1" presetClass="entr" presetSubtype="0" fill="hold" grpId="0" nodeType="clickEffect">
-                                  <p:stCondLst>
-                                    <p:cond delay="0"/>
-                                  </p:stCondLst>
-                                  <p:childTnLst>
-                                    <p:set>
-                                      <p:cBhvr>
-                                        <p:cTn id="6" dur="1" fill="hold">
-                                          <p:stCondLst>
-                                            <p:cond delay="0"/>
-                                          </p:stCondLst>
-                                        </p:cTn>
-                                        <p:tgtEl>
-                                          <p:spTgt spid="5"/>
-                                        </p:tgtEl>
-                                        <p:attrNameLst>
-                                          <p:attrName>style.visibility</p:attrName>
-                                        </p:attrNameLst>
-                                      </p:cBhvr>
-                                      <p:to>
-                                        <p:strVal val="visible"/>
-                                      </p:to>
-                                    </p:set>
-                                  </p:childTnLst>
-                                </p:cTn>
-                              </p:par>
-                            </p:childTnLst>
-                          </p:cTn>
-                        </p:par>
-                      </p:childTnLst>
-                    </p:cTn>
-                  </p:par>
-                </p:childTnLst>
-              </p:cTn>
-              <p:prevCondLst>
-                <p:cond evt="onPrev" delay="0">
-                  <p:tgtEl>
-                    <p:sldTgt/>
-                  </p:tgtEl>
-                </p:cond>
-              </p:prevCondLst>
-              <p:nextCondLst>
-                <p:cond evt="onNext" delay="0">
-                  <p:tgtEl>
-                    <p:sldTgt/>
-                  </p:tgtEl>
-                </p:cond>
-              </p:nextCondLst>
-            </p:seq>
-          </p:childTnLst>
-        </p:cTn>
-      </p:par>
-    </p:tnLst>
-    <p:bldLst>
-      <p:bldP spid="5" grpId="0" animBg="1"/>
-    </p:bldLst>
-  </p:timing>
-</p:sld>
-</file>
-
-<file path=ppt/slides/slide30.xml><?xml version="1.0" encoding="utf-8"?>
+<file path=ppt/slides/slide32.xml><?xml version="1.0" encoding="utf-8"?>
 <p:sld xmlns:a="http://schemas.openxmlformats.org/drawingml/2006/main" xmlns:r="http://schemas.openxmlformats.org/officeDocument/2006/relationships" xmlns:p="http://schemas.openxmlformats.org/presentationml/2006/main">
   <p:cSld>
     <p:spTree>
@@ -43306,7 +44181,7 @@
           <a:p>
             <a:fld id="{D9B6BDF2-6896-4B98-8776-C18582F63BA5}" type="slidenum">
               <a:rPr lang="zh-TW" altLang="en-US" smtClean="0"/>
-              <a:t>30</a:t>
+              <a:t>32</a:t>
             </a:fld>
             <a:endParaRPr lang="zh-TW" altLang="en-US"/>
           </a:p>
@@ -43503,7 +44378,7 @@
 </p:sld>
 </file>
 
-<file path=ppt/slides/slide31.xml><?xml version="1.0" encoding="utf-8"?>
+<file path=ppt/slides/slide33.xml><?xml version="1.0" encoding="utf-8"?>
 <p:sld xmlns:a="http://schemas.openxmlformats.org/drawingml/2006/main" xmlns:r="http://schemas.openxmlformats.org/officeDocument/2006/relationships" xmlns:p="http://schemas.openxmlformats.org/presentationml/2006/main">
   <p:cSld>
     <p:spTree>
@@ -43561,7 +44436,7 @@
           <a:p>
             <a:fld id="{D9B6BDF2-6896-4B98-8776-C18582F63BA5}" type="slidenum">
               <a:rPr lang="zh-TW" altLang="en-US" smtClean="0"/>
-              <a:t>31</a:t>
+              <a:t>33</a:t>
             </a:fld>
             <a:endParaRPr lang="zh-TW" altLang="en-US"/>
           </a:p>
@@ -43844,7 +44719,7 @@
 </p:sld>
 </file>
 
-<file path=ppt/slides/slide32.xml><?xml version="1.0" encoding="utf-8"?>
+<file path=ppt/slides/slide34.xml><?xml version="1.0" encoding="utf-8"?>
 <p:sld xmlns:a="http://schemas.openxmlformats.org/drawingml/2006/main" xmlns:r="http://schemas.openxmlformats.org/officeDocument/2006/relationships" xmlns:p="http://schemas.openxmlformats.org/presentationml/2006/main">
   <p:cSld>
     <p:spTree>
@@ -43902,7 +44777,7 @@
           <a:p>
             <a:fld id="{D9B6BDF2-6896-4B98-8776-C18582F63BA5}" type="slidenum">
               <a:rPr lang="zh-TW" altLang="en-US" smtClean="0"/>
-              <a:t>32</a:t>
+              <a:t>34</a:t>
             </a:fld>
             <a:endParaRPr lang="zh-TW" altLang="en-US"/>
           </a:p>
@@ -43951,7 +44826,850 @@
 </p:sld>
 </file>
 
-<file path=ppt/slides/slide33.xml><?xml version="1.0" encoding="utf-8"?>
+<file path=ppt/slides/slide35.xml><?xml version="1.0" encoding="utf-8"?>
+<p:sld xmlns:a="http://schemas.openxmlformats.org/drawingml/2006/main" xmlns:r="http://schemas.openxmlformats.org/officeDocument/2006/relationships" xmlns:p="http://schemas.openxmlformats.org/presentationml/2006/main" showMasterPhAnim="0">
+  <p:cSld>
+    <p:spTree>
+      <p:nvGrpSpPr>
+        <p:cNvPr id="1" name=""/>
+        <p:cNvGrpSpPr/>
+        <p:nvPr/>
+      </p:nvGrpSpPr>
+      <p:grpSpPr>
+        <a:xfrm>
+          <a:off x="0" y="0"/>
+          <a:ext cx="0" cy="0"/>
+          <a:chOff x="0" y="0"/>
+          <a:chExt cx="0" cy="0"/>
+        </a:xfrm>
+      </p:grpSpPr>
+      <p:sp>
+        <p:nvSpPr>
+          <p:cNvPr id="11266" name="Rectangle 2"/>
+          <p:cNvSpPr>
+            <a:spLocks noGrp="1" noChangeArrowheads="1"/>
+          </p:cNvSpPr>
+          <p:nvPr>
+            <p:ph type="title"/>
+          </p:nvPr>
+        </p:nvSpPr>
+        <p:spPr>
+          <a:noFill/>
+        </p:spPr>
+        <p:txBody>
+          <a:bodyPr vert="horz" wrap="square" lIns="92075" tIns="46039" rIns="92075" bIns="46039" numCol="1" anchor="ctr" anchorCtr="0" compatLnSpc="1">
+            <a:prstTxWarp prst="textNoShape">
+              <a:avLst/>
+            </a:prstTxWarp>
+          </a:bodyPr>
+          <a:lstStyle/>
+          <a:p>
+            <a:r>
+              <a:rPr lang="en-US" altLang="zh-TW" sz="4400" dirty="0"/>
+              <a:t>Are Pipelined Registers Architecture States?</a:t>
+            </a:r>
+          </a:p>
+        </p:txBody>
+      </p:sp>
+      <p:sp>
+        <p:nvSpPr>
+          <p:cNvPr id="353283" name="Rectangle 3"/>
+          <p:cNvSpPr>
+            <a:spLocks noGrp="1" noChangeArrowheads="1"/>
+          </p:cNvSpPr>
+          <p:nvPr>
+            <p:ph idx="1"/>
+          </p:nvPr>
+        </p:nvSpPr>
+        <p:spPr>
+          <a:xfrm>
+            <a:off x="612844" y="1299861"/>
+            <a:ext cx="10954744" cy="4721560"/>
+          </a:xfrm>
+          <a:noFill/>
+        </p:spPr>
+        <p:txBody>
+          <a:bodyPr vert="horz" wrap="square" lIns="92075" tIns="46039" rIns="92075" bIns="46039" numCol="1" anchor="t" anchorCtr="0" compatLnSpc="1">
+            <a:prstTxWarp prst="textNoShape">
+              <a:avLst/>
+            </a:prstTxWarp>
+          </a:bodyPr>
+          <a:lstStyle/>
+          <a:p>
+            <a:pPr marL="480895" indent="-480895">
+              <a:lnSpc>
+                <a:spcPct val="80000"/>
+              </a:lnSpc>
+            </a:pPr>
+            <a:r>
+              <a:rPr lang="en-US" sz="2800" b="1" i="0" dirty="0">
+                <a:solidFill>
+                  <a:srgbClr val="111827"/>
+                </a:solidFill>
+                <a:effectLst/>
+                <a:ea typeface="Calibri" panose="020F0502020204030204" pitchFamily="34" charset="0"/>
+                <a:cs typeface="Calibri" panose="020F0502020204030204" pitchFamily="34" charset="0"/>
+              </a:rPr>
+              <a:t>No!</a:t>
+            </a:r>
+            <a:r>
+              <a:rPr lang="en-US" sz="2800" b="0" i="0" dirty="0">
+                <a:solidFill>
+                  <a:srgbClr val="111827"/>
+                </a:solidFill>
+                <a:effectLst/>
+                <a:ea typeface="Calibri" panose="020F0502020204030204" pitchFamily="34" charset="0"/>
+                <a:cs typeface="Calibri" panose="020F0502020204030204" pitchFamily="34" charset="0"/>
+              </a:rPr>
+              <a:t>  </a:t>
+            </a:r>
+            <a:r>
+              <a:rPr lang="en-US" sz="2800" b="1" i="0" dirty="0">
+                <a:solidFill>
+                  <a:srgbClr val="111827"/>
+                </a:solidFill>
+                <a:effectLst/>
+                <a:ea typeface="Calibri" panose="020F0502020204030204" pitchFamily="34" charset="0"/>
+                <a:cs typeface="Calibri" panose="020F0502020204030204" pitchFamily="34" charset="0"/>
+              </a:rPr>
+              <a:t>Pipelined registers are </a:t>
+            </a:r>
+            <a:r>
+              <a:rPr lang="en-US" sz="2800" b="1" i="0" dirty="0">
+                <a:solidFill>
+                  <a:srgbClr val="FF0000"/>
+                </a:solidFill>
+                <a:effectLst/>
+                <a:ea typeface="Calibri" panose="020F0502020204030204" pitchFamily="34" charset="0"/>
+                <a:cs typeface="Calibri" panose="020F0502020204030204" pitchFamily="34" charset="0"/>
+              </a:rPr>
+              <a:t>NOT</a:t>
+            </a:r>
+            <a:r>
+              <a:rPr lang="en-US" sz="2800" b="1" i="0" dirty="0">
+                <a:solidFill>
+                  <a:srgbClr val="111827"/>
+                </a:solidFill>
+                <a:effectLst/>
+                <a:ea typeface="Calibri" panose="020F0502020204030204" pitchFamily="34" charset="0"/>
+                <a:cs typeface="Calibri" panose="020F0502020204030204" pitchFamily="34" charset="0"/>
+              </a:rPr>
+              <a:t> architectural states.</a:t>
+            </a:r>
+          </a:p>
+          <a:p>
+            <a:pPr marL="480895" indent="-480895">
+              <a:lnSpc>
+                <a:spcPct val="80000"/>
+              </a:lnSpc>
+            </a:pPr>
+            <a:r>
+              <a:rPr lang="en-US" altLang="zh-TW" sz="2800" b="1" dirty="0">
+                <a:solidFill>
+                  <a:srgbClr val="111827"/>
+                </a:solidFill>
+                <a:ea typeface="Calibri" panose="020F0502020204030204" pitchFamily="34" charset="0"/>
+                <a:cs typeface="Calibri" panose="020F0502020204030204" pitchFamily="34" charset="0"/>
+              </a:rPr>
+              <a:t>Architecture states</a:t>
+            </a:r>
+          </a:p>
+          <a:p>
+            <a:pPr marL="880926" lvl="1" indent="-480895">
+              <a:lnSpc>
+                <a:spcPct val="80000"/>
+              </a:lnSpc>
+            </a:pPr>
+            <a:r>
+              <a:rPr lang="en-US" altLang="zh-TW" sz="2400" dirty="0">
+                <a:solidFill>
+                  <a:srgbClr val="111827"/>
+                </a:solidFill>
+                <a:ea typeface="Calibri" panose="020F0502020204030204" pitchFamily="34" charset="0"/>
+                <a:cs typeface="Calibri" panose="020F0502020204030204" pitchFamily="34" charset="0"/>
+              </a:rPr>
+              <a:t>Registers (general purpose, </a:t>
+            </a:r>
+            <a:r>
+              <a:rPr lang="en-US" altLang="zh-TW" sz="2400" dirty="0" err="1">
+                <a:solidFill>
+                  <a:srgbClr val="111827"/>
+                </a:solidFill>
+                <a:ea typeface="Calibri" panose="020F0502020204030204" pitchFamily="34" charset="0"/>
+                <a:cs typeface="Calibri" panose="020F0502020204030204" pitchFamily="34" charset="0"/>
+              </a:rPr>
+              <a:t>fp</a:t>
+            </a:r>
+            <a:r>
+              <a:rPr lang="en-US" altLang="zh-TW" sz="2400" dirty="0">
+                <a:solidFill>
+                  <a:srgbClr val="111827"/>
+                </a:solidFill>
+                <a:ea typeface="Calibri" panose="020F0502020204030204" pitchFamily="34" charset="0"/>
+                <a:cs typeface="Calibri" panose="020F0502020204030204" pitchFamily="34" charset="0"/>
+              </a:rPr>
+              <a:t>, vector, flags,…)</a:t>
+            </a:r>
+          </a:p>
+          <a:p>
+            <a:pPr marL="880926" lvl="1" indent="-480895">
+              <a:lnSpc>
+                <a:spcPct val="80000"/>
+              </a:lnSpc>
+            </a:pPr>
+            <a:r>
+              <a:rPr lang="en-US" altLang="zh-TW" sz="2400" dirty="0">
+                <a:solidFill>
+                  <a:srgbClr val="111827"/>
+                </a:solidFill>
+                <a:ea typeface="Calibri" panose="020F0502020204030204" pitchFamily="34" charset="0"/>
+                <a:cs typeface="Calibri" panose="020F0502020204030204" pitchFamily="34" charset="0"/>
+              </a:rPr>
+              <a:t>PC</a:t>
+            </a:r>
+          </a:p>
+          <a:p>
+            <a:pPr marL="880926" lvl="1" indent="-480895">
+              <a:lnSpc>
+                <a:spcPct val="80000"/>
+              </a:lnSpc>
+            </a:pPr>
+            <a:r>
+              <a:rPr lang="en-US" altLang="zh-TW" sz="2400" dirty="0">
+                <a:solidFill>
+                  <a:srgbClr val="111827"/>
+                </a:solidFill>
+                <a:ea typeface="Calibri" panose="020F0502020204030204" pitchFamily="34" charset="0"/>
+                <a:cs typeface="Calibri" panose="020F0502020204030204" pitchFamily="34" charset="0"/>
+              </a:rPr>
+              <a:t>Memory</a:t>
+            </a:r>
+          </a:p>
+          <a:p>
+            <a:pPr marL="480895" indent="-480895">
+              <a:lnSpc>
+                <a:spcPct val="80000"/>
+              </a:lnSpc>
+            </a:pPr>
+            <a:r>
+              <a:rPr lang="en-US" altLang="zh-TW" sz="2800" b="1" dirty="0">
+                <a:solidFill>
+                  <a:srgbClr val="111827"/>
+                </a:solidFill>
+                <a:ea typeface="Calibri" panose="020F0502020204030204" pitchFamily="34" charset="0"/>
+                <a:cs typeface="Calibri" panose="020F0502020204030204" pitchFamily="34" charset="0"/>
+              </a:rPr>
+              <a:t>Micro-architecture states</a:t>
+            </a:r>
+          </a:p>
+          <a:p>
+            <a:pPr marL="880926" lvl="1" indent="-480895">
+              <a:lnSpc>
+                <a:spcPct val="80000"/>
+              </a:lnSpc>
+            </a:pPr>
+            <a:r>
+              <a:rPr lang="en-US" altLang="zh-TW" sz="2400" dirty="0">
+                <a:solidFill>
+                  <a:srgbClr val="111827"/>
+                </a:solidFill>
+                <a:ea typeface="Calibri" panose="020F0502020204030204" pitchFamily="34" charset="0"/>
+                <a:cs typeface="Calibri" panose="020F0502020204030204" pitchFamily="34" charset="0"/>
+              </a:rPr>
+              <a:t>Pipelined registers</a:t>
+            </a:r>
+          </a:p>
+          <a:p>
+            <a:pPr marL="880926" lvl="1" indent="-480895">
+              <a:lnSpc>
+                <a:spcPct val="80000"/>
+              </a:lnSpc>
+            </a:pPr>
+            <a:r>
+              <a:rPr lang="en-US" altLang="zh-TW" sz="2400" dirty="0">
+                <a:solidFill>
+                  <a:srgbClr val="111827"/>
+                </a:solidFill>
+                <a:ea typeface="Calibri" panose="020F0502020204030204" pitchFamily="34" charset="0"/>
+                <a:cs typeface="Calibri" panose="020F0502020204030204" pitchFamily="34" charset="0"/>
+              </a:rPr>
+              <a:t>Branch predictors</a:t>
+            </a:r>
+          </a:p>
+          <a:p>
+            <a:pPr marL="880926" lvl="1" indent="-480895">
+              <a:lnSpc>
+                <a:spcPct val="80000"/>
+              </a:lnSpc>
+            </a:pPr>
+            <a:r>
+              <a:rPr lang="en-US" altLang="zh-TW" sz="2400" dirty="0">
+                <a:solidFill>
+                  <a:srgbClr val="111827"/>
+                </a:solidFill>
+                <a:ea typeface="Calibri" panose="020F0502020204030204" pitchFamily="34" charset="0"/>
+                <a:cs typeface="Calibri" panose="020F0502020204030204" pitchFamily="34" charset="0"/>
+              </a:rPr>
+              <a:t>Caches</a:t>
+            </a:r>
+          </a:p>
+          <a:p>
+            <a:pPr marL="880926" lvl="1" indent="-480895">
+              <a:lnSpc>
+                <a:spcPct val="80000"/>
+              </a:lnSpc>
+            </a:pPr>
+            <a:r>
+              <a:rPr lang="en-US" altLang="zh-TW" sz="2400" dirty="0">
+                <a:solidFill>
+                  <a:srgbClr val="111827"/>
+                </a:solidFill>
+                <a:ea typeface="Calibri" panose="020F0502020204030204" pitchFamily="34" charset="0"/>
+                <a:cs typeface="Calibri" panose="020F0502020204030204" pitchFamily="34" charset="0"/>
+              </a:rPr>
+              <a:t>Buffers and </a:t>
+            </a:r>
+            <a:r>
+              <a:rPr lang="en-US" altLang="zh-TW" sz="2400" dirty="0" err="1">
+                <a:solidFill>
+                  <a:srgbClr val="111827"/>
+                </a:solidFill>
+                <a:ea typeface="Calibri" panose="020F0502020204030204" pitchFamily="34" charset="0"/>
+                <a:cs typeface="Calibri" panose="020F0502020204030204" pitchFamily="34" charset="0"/>
+              </a:rPr>
+              <a:t>Quenes</a:t>
+            </a:r>
+            <a:endParaRPr lang="en-US" altLang="zh-TW" sz="2400" dirty="0">
+              <a:solidFill>
+                <a:srgbClr val="111827"/>
+              </a:solidFill>
+              <a:ea typeface="Calibri" panose="020F0502020204030204" pitchFamily="34" charset="0"/>
+              <a:cs typeface="Calibri" panose="020F0502020204030204" pitchFamily="34" charset="0"/>
+            </a:endParaRPr>
+          </a:p>
+          <a:p>
+            <a:pPr marL="880926" lvl="1" indent="-480895">
+              <a:lnSpc>
+                <a:spcPct val="80000"/>
+              </a:lnSpc>
+            </a:pPr>
+            <a:r>
+              <a:rPr lang="en-US" altLang="zh-TW" sz="2400" dirty="0">
+                <a:solidFill>
+                  <a:srgbClr val="111827"/>
+                </a:solidFill>
+                <a:ea typeface="Calibri" panose="020F0502020204030204" pitchFamily="34" charset="0"/>
+                <a:cs typeface="Calibri" panose="020F0502020204030204" pitchFamily="34" charset="0"/>
+              </a:rPr>
+              <a:t>Counters</a:t>
+            </a:r>
+          </a:p>
+          <a:p>
+            <a:pPr marL="880926" lvl="1" indent="-480895">
+              <a:lnSpc>
+                <a:spcPct val="80000"/>
+              </a:lnSpc>
+            </a:pPr>
+            <a:r>
+              <a:rPr lang="en-US" altLang="zh-TW" sz="2400" dirty="0">
+                <a:solidFill>
+                  <a:srgbClr val="111827"/>
+                </a:solidFill>
+                <a:ea typeface="Calibri" panose="020F0502020204030204" pitchFamily="34" charset="0"/>
+                <a:cs typeface="Calibri" panose="020F0502020204030204" pitchFamily="34" charset="0"/>
+              </a:rPr>
+              <a:t>…</a:t>
+            </a:r>
+          </a:p>
+          <a:p>
+            <a:pPr marL="880926" lvl="1" indent="-480895">
+              <a:lnSpc>
+                <a:spcPct val="80000"/>
+              </a:lnSpc>
+            </a:pPr>
+            <a:endParaRPr lang="en-US" altLang="zh-TW" sz="2267" dirty="0">
+              <a:ea typeface="Calibri" panose="020F0502020204030204" pitchFamily="34" charset="0"/>
+              <a:cs typeface="Calibri" panose="020F0502020204030204" pitchFamily="34" charset="0"/>
+            </a:endParaRPr>
+          </a:p>
+        </p:txBody>
+      </p:sp>
+      <p:sp>
+        <p:nvSpPr>
+          <p:cNvPr id="11283" name="投影片編號版面配置區 1"/>
+          <p:cNvSpPr>
+            <a:spLocks noGrp="1"/>
+          </p:cNvSpPr>
+          <p:nvPr>
+            <p:ph type="sldNum" sz="quarter" idx="10"/>
+          </p:nvPr>
+        </p:nvSpPr>
+        <p:spPr>
+          <a:noFill/>
+          <a:extLst>
+            <a:ext uri="{909E8E84-426E-40DD-AFC4-6F175D3DCCD1}">
+              <a14:hiddenFill xmlns:a14="http://schemas.microsoft.com/office/drawing/2010/main">
+                <a:solidFill>
+                  <a:srgbClr val="FFFFFF"/>
+                </a:solidFill>
+              </a14:hiddenFill>
+            </a:ext>
+            <a:ext uri="{91240B29-F687-4F45-9708-019B960494DF}">
+              <a14:hiddenLine xmlns:a14="http://schemas.microsoft.com/office/drawing/2010/main" w="9525">
+                <a:solidFill>
+                  <a:srgbClr val="000000"/>
+                </a:solidFill>
+                <a:miter lim="800000"/>
+                <a:headEnd/>
+                <a:tailEnd/>
+              </a14:hiddenLine>
+            </a:ext>
+          </a:extLst>
+        </p:spPr>
+        <p:txBody>
+          <a:bodyPr/>
+          <a:lstStyle>
+            <a:lvl1pPr>
+              <a:lnSpc>
+                <a:spcPct val="90000"/>
+              </a:lnSpc>
+              <a:spcBef>
+                <a:spcPct val="15000"/>
+              </a:spcBef>
+              <a:buClr>
+                <a:schemeClr val="folHlink"/>
+              </a:buClr>
+              <a:buSzPct val="75000"/>
+              <a:buFont typeface="Wingdings" panose="05000000000000000000" pitchFamily="2" charset="2"/>
+              <a:buChar char="t"/>
+              <a:defRPr sz="2400" b="1">
+                <a:solidFill>
+                  <a:schemeClr val="tx1"/>
+                </a:solidFill>
+                <a:latin typeface="Century Gothic" panose="020B0502020202020204" pitchFamily="34" charset="0"/>
+                <a:ea typeface="標楷體" panose="02010601000101010101" pitchFamily="65" charset="-128"/>
+              </a:defRPr>
+            </a:lvl1pPr>
+            <a:lvl2pPr marL="743355" indent="-286166">
+              <a:lnSpc>
+                <a:spcPct val="90000"/>
+              </a:lnSpc>
+              <a:spcBef>
+                <a:spcPct val="15000"/>
+              </a:spcBef>
+              <a:buClr>
+                <a:srgbClr val="FF9900"/>
+              </a:buClr>
+              <a:buSzPct val="75000"/>
+              <a:buFont typeface="Wingdings" panose="05000000000000000000" pitchFamily="2" charset="2"/>
+              <a:buChar char="l"/>
+              <a:defRPr sz="2200" b="1">
+                <a:solidFill>
+                  <a:schemeClr val="tx1"/>
+                </a:solidFill>
+                <a:latin typeface="Century Gothic" panose="020B0502020202020204" pitchFamily="34" charset="0"/>
+                <a:ea typeface="標楷體" panose="02010601000101010101" pitchFamily="65" charset="-128"/>
+              </a:defRPr>
+            </a:lvl2pPr>
+            <a:lvl3pPr marL="1142971" indent="-228594">
+              <a:lnSpc>
+                <a:spcPct val="90000"/>
+              </a:lnSpc>
+              <a:spcBef>
+                <a:spcPct val="15000"/>
+              </a:spcBef>
+              <a:buClr>
+                <a:schemeClr val="accent2"/>
+              </a:buClr>
+              <a:buSzPct val="75000"/>
+              <a:buFont typeface="Wingdings" panose="05000000000000000000" pitchFamily="2" charset="2"/>
+              <a:buChar char="n"/>
+              <a:defRPr sz="2000" b="1">
+                <a:solidFill>
+                  <a:schemeClr val="tx1"/>
+                </a:solidFill>
+                <a:latin typeface="Century Gothic" panose="020B0502020202020204" pitchFamily="34" charset="0"/>
+                <a:ea typeface="標楷體" panose="02010601000101010101" pitchFamily="65" charset="-128"/>
+              </a:defRPr>
+            </a:lvl3pPr>
+            <a:lvl4pPr marL="1600160" indent="-228594">
+              <a:lnSpc>
+                <a:spcPct val="90000"/>
+              </a:lnSpc>
+              <a:spcBef>
+                <a:spcPct val="15000"/>
+              </a:spcBef>
+              <a:buClr>
+                <a:schemeClr val="hlink"/>
+              </a:buClr>
+              <a:buSzPct val="75000"/>
+              <a:buFont typeface="Monotype Sorts" pitchFamily="2" charset="2"/>
+              <a:buChar char="T"/>
+              <a:defRPr sz="2000">
+                <a:solidFill>
+                  <a:schemeClr val="tx1"/>
+                </a:solidFill>
+                <a:latin typeface="Century Gothic" panose="020B0502020202020204" pitchFamily="34" charset="0"/>
+                <a:ea typeface="標楷體" panose="02010601000101010101" pitchFamily="65" charset="-128"/>
+              </a:defRPr>
+            </a:lvl4pPr>
+            <a:lvl5pPr marL="2057349" indent="-228594">
+              <a:lnSpc>
+                <a:spcPct val="90000"/>
+              </a:lnSpc>
+              <a:spcBef>
+                <a:spcPct val="15000"/>
+              </a:spcBef>
+              <a:buClr>
+                <a:schemeClr val="accent1"/>
+              </a:buClr>
+              <a:buSzPct val="100000"/>
+              <a:buChar char="–"/>
+              <a:defRPr sz="2000">
+                <a:solidFill>
+                  <a:schemeClr val="tx1"/>
+                </a:solidFill>
+                <a:latin typeface="Century Gothic" panose="020B0502020202020204" pitchFamily="34" charset="0"/>
+                <a:ea typeface="標楷體" panose="02010601000101010101" pitchFamily="65" charset="-128"/>
+              </a:defRPr>
+            </a:lvl5pPr>
+            <a:lvl6pPr marL="2514537" indent="-228594" eaLnBrk="0" fontAlgn="base" hangingPunct="0">
+              <a:lnSpc>
+                <a:spcPct val="90000"/>
+              </a:lnSpc>
+              <a:spcBef>
+                <a:spcPct val="15000"/>
+              </a:spcBef>
+              <a:spcAft>
+                <a:spcPct val="0"/>
+              </a:spcAft>
+              <a:buClr>
+                <a:schemeClr val="accent1"/>
+              </a:buClr>
+              <a:buSzPct val="100000"/>
+              <a:buChar char="–"/>
+              <a:defRPr sz="2000">
+                <a:solidFill>
+                  <a:schemeClr val="tx1"/>
+                </a:solidFill>
+                <a:latin typeface="Century Gothic" panose="020B0502020202020204" pitchFamily="34" charset="0"/>
+                <a:ea typeface="標楷體" panose="02010601000101010101" pitchFamily="65" charset="-128"/>
+              </a:defRPr>
+            </a:lvl6pPr>
+            <a:lvl7pPr marL="2971726" indent="-228594" eaLnBrk="0" fontAlgn="base" hangingPunct="0">
+              <a:lnSpc>
+                <a:spcPct val="90000"/>
+              </a:lnSpc>
+              <a:spcBef>
+                <a:spcPct val="15000"/>
+              </a:spcBef>
+              <a:spcAft>
+                <a:spcPct val="0"/>
+              </a:spcAft>
+              <a:buClr>
+                <a:schemeClr val="accent1"/>
+              </a:buClr>
+              <a:buSzPct val="100000"/>
+              <a:buChar char="–"/>
+              <a:defRPr sz="2000">
+                <a:solidFill>
+                  <a:schemeClr val="tx1"/>
+                </a:solidFill>
+                <a:latin typeface="Century Gothic" panose="020B0502020202020204" pitchFamily="34" charset="0"/>
+                <a:ea typeface="標楷體" panose="02010601000101010101" pitchFamily="65" charset="-128"/>
+              </a:defRPr>
+            </a:lvl7pPr>
+            <a:lvl8pPr marL="3428914" indent="-228594" eaLnBrk="0" fontAlgn="base" hangingPunct="0">
+              <a:lnSpc>
+                <a:spcPct val="90000"/>
+              </a:lnSpc>
+              <a:spcBef>
+                <a:spcPct val="15000"/>
+              </a:spcBef>
+              <a:spcAft>
+                <a:spcPct val="0"/>
+              </a:spcAft>
+              <a:buClr>
+                <a:schemeClr val="accent1"/>
+              </a:buClr>
+              <a:buSzPct val="100000"/>
+              <a:buChar char="–"/>
+              <a:defRPr sz="2000">
+                <a:solidFill>
+                  <a:schemeClr val="tx1"/>
+                </a:solidFill>
+                <a:latin typeface="Century Gothic" panose="020B0502020202020204" pitchFamily="34" charset="0"/>
+                <a:ea typeface="標楷體" panose="02010601000101010101" pitchFamily="65" charset="-128"/>
+              </a:defRPr>
+            </a:lvl8pPr>
+            <a:lvl9pPr marL="3886103" indent="-228594" eaLnBrk="0" fontAlgn="base" hangingPunct="0">
+              <a:lnSpc>
+                <a:spcPct val="90000"/>
+              </a:lnSpc>
+              <a:spcBef>
+                <a:spcPct val="15000"/>
+              </a:spcBef>
+              <a:spcAft>
+                <a:spcPct val="0"/>
+              </a:spcAft>
+              <a:buClr>
+                <a:schemeClr val="accent1"/>
+              </a:buClr>
+              <a:buSzPct val="100000"/>
+              <a:buChar char="–"/>
+              <a:defRPr sz="2000">
+                <a:solidFill>
+                  <a:schemeClr val="tx1"/>
+                </a:solidFill>
+                <a:latin typeface="Century Gothic" panose="020B0502020202020204" pitchFamily="34" charset="0"/>
+                <a:ea typeface="標楷體" panose="02010601000101010101" pitchFamily="65" charset="-128"/>
+              </a:defRPr>
+            </a:lvl9pPr>
+          </a:lstStyle>
+          <a:p>
+            <a:pPr>
+              <a:lnSpc>
+                <a:spcPct val="100000"/>
+              </a:lnSpc>
+              <a:spcBef>
+                <a:spcPct val="0"/>
+              </a:spcBef>
+              <a:buClrTx/>
+              <a:buSzTx/>
+              <a:buFontTx/>
+              <a:buNone/>
+            </a:pPr>
+            <a:fld id="{3B372B80-DEA1-4621-B194-1DB2F08AB0C3}" type="slidenum">
+              <a:rPr lang="zh-TW" altLang="en-US" sz="1400" b="0">
+                <a:solidFill>
+                  <a:schemeClr val="bg1"/>
+                </a:solidFill>
+                <a:latin typeface="Arial" panose="020B0604020202090204" pitchFamily="34" charset="0"/>
+                <a:ea typeface="新細明體" panose="02020500000000000000" pitchFamily="18" charset="-120"/>
+              </a:rPr>
+              <a:t>35</a:t>
+            </a:fld>
+            <a:endParaRPr lang="en-US" altLang="zh-TW" sz="1400" b="0" dirty="0">
+              <a:solidFill>
+                <a:schemeClr val="bg1"/>
+              </a:solidFill>
+              <a:latin typeface="Arial" panose="020B0604020202090204" pitchFamily="34" charset="0"/>
+              <a:ea typeface="新細明體" panose="02020500000000000000" pitchFamily="18" charset="-120"/>
+            </a:endParaRPr>
+          </a:p>
+        </p:txBody>
+      </p:sp>
+      <p:sp>
+        <p:nvSpPr>
+          <p:cNvPr id="2" name="TextBox 1">
+            <a:extLst>
+              <a:ext uri="{FF2B5EF4-FFF2-40B4-BE49-F238E27FC236}">
+                <a16:creationId xmlns:a16="http://schemas.microsoft.com/office/drawing/2014/main" id="{9207E2ED-D9A9-4A36-B775-FBF8DF794A73}"/>
+              </a:ext>
+            </a:extLst>
+          </p:cNvPr>
+          <p:cNvSpPr txBox="1"/>
+          <p:nvPr/>
+        </p:nvSpPr>
+        <p:spPr>
+          <a:xfrm>
+            <a:off x="6090216" y="3226037"/>
+            <a:ext cx="5827236" cy="2031325"/>
+          </a:xfrm>
+          <a:prstGeom prst="rect">
+            <a:avLst/>
+          </a:prstGeom>
+          <a:solidFill>
+            <a:schemeClr val="accent5">
+              <a:lumMod val="20000"/>
+              <a:lumOff val="80000"/>
+            </a:schemeClr>
+          </a:solidFill>
+          <a:ln>
+            <a:solidFill>
+              <a:srgbClr val="FF0000"/>
+            </a:solidFill>
+          </a:ln>
+        </p:spPr>
+        <p:txBody>
+          <a:bodyPr wrap="none" rtlCol="0" anchor="ctr" anchorCtr="1">
+            <a:spAutoFit/>
+          </a:bodyPr>
+          <a:lstStyle/>
+          <a:p>
+            <a:r>
+              <a:rPr lang="en-US" b="1" dirty="0">
+                <a:ea typeface="標楷體" pitchFamily="65" charset="-120"/>
+                <a:cs typeface="Calibri" pitchFamily="34" charset="0"/>
+              </a:rPr>
+              <a:t>Architecture states </a:t>
+            </a:r>
+            <a:r>
+              <a:rPr lang="en-US" dirty="0">
+                <a:ea typeface="標楷體" pitchFamily="65" charset="-120"/>
+                <a:cs typeface="Calibri" pitchFamily="34" charset="0"/>
+              </a:rPr>
+              <a:t>are saved during a context switch:</a:t>
+            </a:r>
+          </a:p>
+          <a:p>
+            <a:endParaRPr lang="en-US" dirty="0">
+              <a:ea typeface="標楷體" pitchFamily="65" charset="-120"/>
+              <a:cs typeface="Calibri" pitchFamily="34" charset="0"/>
+            </a:endParaRPr>
+          </a:p>
+          <a:p>
+            <a:pPr marL="342900" indent="-342900">
+              <a:buAutoNum type="arabicParenR"/>
+            </a:pPr>
+            <a:r>
+              <a:rPr lang="en-US" dirty="0">
+                <a:ea typeface="標楷體" pitchFamily="65" charset="-120"/>
+                <a:cs typeface="Calibri" pitchFamily="34" charset="0"/>
+              </a:rPr>
+              <a:t>User-level switch, such as a procedure call</a:t>
+            </a:r>
+          </a:p>
+          <a:p>
+            <a:r>
+              <a:rPr lang="en-US" dirty="0">
+                <a:ea typeface="標楷體" pitchFamily="65" charset="-120"/>
+                <a:cs typeface="Calibri" pitchFamily="34" charset="0"/>
+              </a:rPr>
+              <a:t>      Registers are saved on the runtime program stack</a:t>
+            </a:r>
+          </a:p>
+          <a:p>
+            <a:r>
+              <a:rPr lang="en-US" dirty="0">
+                <a:ea typeface="標楷體" pitchFamily="65" charset="-120"/>
+                <a:cs typeface="Calibri" pitchFamily="34" charset="0"/>
+              </a:rPr>
+              <a:t>2)   System-level switch, such as a process switch</a:t>
+            </a:r>
+          </a:p>
+          <a:p>
+            <a:r>
+              <a:rPr lang="en-US" dirty="0">
+                <a:solidFill>
+                  <a:prstClr val="black"/>
+                </a:solidFill>
+                <a:ea typeface="標楷體" pitchFamily="65" charset="-120"/>
+                <a:cs typeface="Calibri" pitchFamily="34" charset="0"/>
+              </a:rPr>
+              <a:t>      Registers are saved on the PCB (Process Control </a:t>
+            </a:r>
+          </a:p>
+          <a:p>
+            <a:r>
+              <a:rPr lang="en-US" dirty="0">
+                <a:solidFill>
+                  <a:prstClr val="black"/>
+                </a:solidFill>
+                <a:ea typeface="標楷體" pitchFamily="65" charset="-120"/>
+                <a:cs typeface="Calibri" pitchFamily="34" charset="0"/>
+              </a:rPr>
+              <a:t>      Block) or the kernel stack.</a:t>
+            </a:r>
+            <a:endParaRPr lang="en-US" dirty="0">
+              <a:ea typeface="標楷體" pitchFamily="65" charset="-120"/>
+              <a:cs typeface="Calibri" pitchFamily="34" charset="0"/>
+            </a:endParaRPr>
+          </a:p>
+        </p:txBody>
+      </p:sp>
+    </p:spTree>
+    <p:extLst>
+      <p:ext uri="{BB962C8B-B14F-4D97-AF65-F5344CB8AC3E}">
+        <p14:creationId xmlns:p14="http://schemas.microsoft.com/office/powerpoint/2010/main" val="3791682212"/>
+      </p:ext>
+    </p:extLst>
+  </p:cSld>
+  <p:clrMapOvr>
+    <a:masterClrMapping/>
+  </p:clrMapOvr>
+  <p:timing>
+    <p:tnLst>
+      <p:par>
+        <p:cTn id="1" dur="indefinite" restart="never" nodeType="tmRoot">
+          <p:childTnLst>
+            <p:seq concurrent="1" nextAc="seek">
+              <p:cTn id="2" dur="indefinite" nodeType="mainSeq">
+                <p:childTnLst>
+                  <p:par>
+                    <p:cTn id="3" fill="hold">
+                      <p:stCondLst>
+                        <p:cond delay="indefinite"/>
+                      </p:stCondLst>
+                      <p:childTnLst>
+                        <p:par>
+                          <p:cTn id="4" fill="hold">
+                            <p:stCondLst>
+                              <p:cond delay="0"/>
+                            </p:stCondLst>
+                            <p:childTnLst>
+                              <p:par>
+                                <p:cTn id="5" presetID="1" presetClass="entr" presetSubtype="0" fill="hold" grpId="0" nodeType="clickEffect">
+                                  <p:stCondLst>
+                                    <p:cond delay="0"/>
+                                  </p:stCondLst>
+                                  <p:childTnLst>
+                                    <p:set>
+                                      <p:cBhvr>
+                                        <p:cTn id="6" dur="1" fill="hold">
+                                          <p:stCondLst>
+                                            <p:cond delay="0"/>
+                                          </p:stCondLst>
+                                        </p:cTn>
+                                        <p:tgtEl>
+                                          <p:spTgt spid="2"/>
+                                        </p:tgtEl>
+                                        <p:attrNameLst>
+                                          <p:attrName>style.visibility</p:attrName>
+                                        </p:attrNameLst>
+                                      </p:cBhvr>
+                                      <p:to>
+                                        <p:strVal val="visible"/>
+                                      </p:to>
+                                    </p:set>
+                                  </p:childTnLst>
+                                </p:cTn>
+                              </p:par>
+                            </p:childTnLst>
+                          </p:cTn>
+                        </p:par>
+                      </p:childTnLst>
+                    </p:cTn>
+                  </p:par>
+                </p:childTnLst>
+              </p:cTn>
+              <p:prevCondLst>
+                <p:cond evt="onPrev" delay="0">
+                  <p:tgtEl>
+                    <p:sldTgt/>
+                  </p:tgtEl>
+                </p:cond>
+              </p:prevCondLst>
+              <p:nextCondLst>
+                <p:cond evt="onNext" delay="0">
+                  <p:tgtEl>
+                    <p:sldTgt/>
+                  </p:tgtEl>
+                </p:cond>
+              </p:nextCondLst>
+            </p:seq>
+          </p:childTnLst>
+        </p:cTn>
+      </p:par>
+    </p:tnLst>
+    <p:bldLst>
+      <p:bldP spid="2" grpId="0" animBg="1"/>
+    </p:bldLst>
+  </p:timing>
+</p:sld>
+</file>
+
+<file path=ppt/slides/slide36.xml><?xml version="1.0" encoding="utf-8"?>
 <p:sld xmlns:a="http://schemas.openxmlformats.org/drawingml/2006/main" xmlns:r="http://schemas.openxmlformats.org/officeDocument/2006/relationships" xmlns:p="http://schemas.openxmlformats.org/presentationml/2006/main">
   <p:cSld>
     <p:spTree>
@@ -44009,7 +45727,7 @@
           <a:p>
             <a:fld id="{D9B6BDF2-6896-4B98-8776-C18582F63BA5}" type="slidenum">
               <a:rPr lang="zh-TW" altLang="en-US" smtClean="0"/>
-              <a:t>33</a:t>
+              <a:t>36</a:t>
             </a:fld>
             <a:endParaRPr lang="zh-TW" altLang="en-US"/>
           </a:p>
@@ -46945,6 +48663,644 @@
         </p:nvSpPr>
         <p:spPr/>
         <p:txBody>
+          <a:bodyPr>
+            <a:noAutofit/>
+          </a:bodyPr>
+          <a:lstStyle/>
+          <a:p>
+            <a:pPr algn="ctr"/>
+            <a:r>
+              <a:rPr lang="en-US" dirty="0"/>
+              <a:t>Single cycle, Multi-cycle, Pipelining</a:t>
+            </a:r>
+          </a:p>
+        </p:txBody>
+      </p:sp>
+      <p:sp>
+        <p:nvSpPr>
+          <p:cNvPr id="6" name="灯片编号占位符 5"/>
+          <p:cNvSpPr>
+            <a:spLocks noGrp="1"/>
+          </p:cNvSpPr>
+          <p:nvPr>
+            <p:ph type="sldNum" sz="quarter" idx="10"/>
+          </p:nvPr>
+        </p:nvSpPr>
+        <p:spPr/>
+        <p:txBody>
+          <a:bodyPr/>
+          <a:lstStyle/>
+          <a:p>
+            <a:fld id="{D9B6BDF2-6896-4B98-8776-C18582F63BA5}" type="slidenum">
+              <a:rPr lang="zh-TW" altLang="en-US" smtClean="0"/>
+              <a:t>7</a:t>
+            </a:fld>
+            <a:endParaRPr lang="zh-TW" altLang="en-US"/>
+          </a:p>
+        </p:txBody>
+      </p:sp>
+      <p:sp>
+        <p:nvSpPr>
+          <p:cNvPr id="33" name="Content Placeholder 2">
+            <a:extLst>
+              <a:ext uri="{FF2B5EF4-FFF2-40B4-BE49-F238E27FC236}">
+                <a16:creationId xmlns:a16="http://schemas.microsoft.com/office/drawing/2014/main" id="{4E71CA5F-387A-4354-9522-8963C055260A}"/>
+              </a:ext>
+            </a:extLst>
+          </p:cNvPr>
+          <p:cNvSpPr>
+            <a:spLocks noGrp="1"/>
+          </p:cNvSpPr>
+          <p:nvPr>
+            <p:ph idx="1"/>
+          </p:nvPr>
+        </p:nvSpPr>
+        <p:spPr>
+          <a:xfrm>
+            <a:off x="116730" y="1105723"/>
+            <a:ext cx="11886873" cy="1170752"/>
+          </a:xfrm>
+        </p:spPr>
+        <p:txBody>
+          <a:bodyPr>
+            <a:normAutofit fontScale="77500" lnSpcReduction="20000"/>
+          </a:bodyPr>
+          <a:lstStyle/>
+          <a:p>
+            <a:r>
+              <a:rPr lang="en-US" sz="3400" dirty="0"/>
+              <a:t>Using the table from the previous slides</a:t>
+            </a:r>
+          </a:p>
+          <a:p>
+            <a:pPr marL="0" indent="0">
+              <a:buNone/>
+            </a:pPr>
+            <a:r>
+              <a:rPr lang="en-US" sz="3400" dirty="0"/>
+              <a:t>	</a:t>
+            </a:r>
+            <a:r>
+              <a:rPr lang="en-US" sz="3100" dirty="0"/>
+              <a:t>LW takes 5 clock cycles, Add/sub takes 4 clock cycles, Branch takes 3 cycles, and 	SW 	takes 4 cycles</a:t>
+            </a:r>
+          </a:p>
+          <a:p>
+            <a:pPr marL="0" indent="0">
+              <a:buNone/>
+            </a:pPr>
+            <a:endParaRPr lang="en-US" sz="2800" dirty="0"/>
+          </a:p>
+        </p:txBody>
+      </p:sp>
+      <p:sp>
+        <p:nvSpPr>
+          <p:cNvPr id="21" name="TextBox 20">
+            <a:extLst>
+              <a:ext uri="{FF2B5EF4-FFF2-40B4-BE49-F238E27FC236}">
+                <a16:creationId xmlns:a16="http://schemas.microsoft.com/office/drawing/2014/main" id="{11DBCAFA-A59D-4CC8-83AB-20FFA388CDC0}"/>
+              </a:ext>
+            </a:extLst>
+          </p:cNvPr>
+          <p:cNvSpPr txBox="1"/>
+          <p:nvPr/>
+        </p:nvSpPr>
+        <p:spPr>
+          <a:xfrm>
+            <a:off x="1250206" y="3575438"/>
+            <a:ext cx="1569660" cy="400110"/>
+          </a:xfrm>
+          <a:prstGeom prst="rect">
+            <a:avLst/>
+          </a:prstGeom>
+          <a:noFill/>
+        </p:spPr>
+        <p:txBody>
+          <a:bodyPr wrap="none" rtlCol="0" anchor="ctr" anchorCtr="1">
+            <a:spAutoFit/>
+          </a:bodyPr>
+          <a:lstStyle/>
+          <a:p>
+            <a:r>
+              <a:rPr lang="en-US" sz="2000" dirty="0">
+                <a:ea typeface="標楷體" pitchFamily="65" charset="-120"/>
+                <a:cs typeface="Calibri" pitchFamily="34" charset="0"/>
+              </a:rPr>
+              <a:t>Single-cycle</a:t>
+            </a:r>
+          </a:p>
+        </p:txBody>
+      </p:sp>
+      <p:sp>
+        <p:nvSpPr>
+          <p:cNvPr id="23" name="TextBox 22">
+            <a:extLst>
+              <a:ext uri="{FF2B5EF4-FFF2-40B4-BE49-F238E27FC236}">
+                <a16:creationId xmlns:a16="http://schemas.microsoft.com/office/drawing/2014/main" id="{C52E0BA1-ECDF-4475-97EE-777A3D534B52}"/>
+              </a:ext>
+            </a:extLst>
+          </p:cNvPr>
+          <p:cNvSpPr txBox="1"/>
+          <p:nvPr/>
+        </p:nvSpPr>
+        <p:spPr>
+          <a:xfrm>
+            <a:off x="1290737" y="4139474"/>
+            <a:ext cx="1396536" cy="400110"/>
+          </a:xfrm>
+          <a:prstGeom prst="rect">
+            <a:avLst/>
+          </a:prstGeom>
+          <a:noFill/>
+        </p:spPr>
+        <p:txBody>
+          <a:bodyPr wrap="none" rtlCol="0" anchor="ctr" anchorCtr="1">
+            <a:spAutoFit/>
+          </a:bodyPr>
+          <a:lstStyle/>
+          <a:p>
+            <a:r>
+              <a:rPr lang="en-US" sz="2000" dirty="0">
+                <a:ea typeface="標楷體" pitchFamily="65" charset="-120"/>
+                <a:cs typeface="Calibri" pitchFamily="34" charset="0"/>
+              </a:rPr>
+              <a:t>Multi-cycle</a:t>
+            </a:r>
+          </a:p>
+        </p:txBody>
+      </p:sp>
+      <p:sp>
+        <p:nvSpPr>
+          <p:cNvPr id="24" name="TextBox 23">
+            <a:extLst>
+              <a:ext uri="{FF2B5EF4-FFF2-40B4-BE49-F238E27FC236}">
+                <a16:creationId xmlns:a16="http://schemas.microsoft.com/office/drawing/2014/main" id="{CE40FD92-A3C0-482B-A1F2-41A27406B6DF}"/>
+              </a:ext>
+            </a:extLst>
+          </p:cNvPr>
+          <p:cNvSpPr txBox="1"/>
+          <p:nvPr/>
+        </p:nvSpPr>
+        <p:spPr>
+          <a:xfrm>
+            <a:off x="1290737" y="4798031"/>
+            <a:ext cx="1242648" cy="400110"/>
+          </a:xfrm>
+          <a:prstGeom prst="rect">
+            <a:avLst/>
+          </a:prstGeom>
+          <a:noFill/>
+        </p:spPr>
+        <p:txBody>
+          <a:bodyPr wrap="none" rtlCol="0" anchor="ctr" anchorCtr="1">
+            <a:spAutoFit/>
+          </a:bodyPr>
+          <a:lstStyle/>
+          <a:p>
+            <a:r>
+              <a:rPr lang="en-US" sz="2000" dirty="0">
+                <a:ea typeface="標楷體" pitchFamily="65" charset="-120"/>
+                <a:cs typeface="Calibri" pitchFamily="34" charset="0"/>
+              </a:rPr>
+              <a:t>Pipelined</a:t>
+            </a:r>
+          </a:p>
+        </p:txBody>
+      </p:sp>
+      <p:sp>
+        <p:nvSpPr>
+          <p:cNvPr id="22" name="TextBox 21">
+            <a:extLst>
+              <a:ext uri="{FF2B5EF4-FFF2-40B4-BE49-F238E27FC236}">
+                <a16:creationId xmlns:a16="http://schemas.microsoft.com/office/drawing/2014/main" id="{7439248C-391E-4D99-9AA2-991039A40734}"/>
+              </a:ext>
+            </a:extLst>
+          </p:cNvPr>
+          <p:cNvSpPr txBox="1"/>
+          <p:nvPr/>
+        </p:nvSpPr>
+        <p:spPr>
+          <a:xfrm>
+            <a:off x="4853311" y="3532839"/>
+            <a:ext cx="1999265" cy="707886"/>
+          </a:xfrm>
+          <a:prstGeom prst="rect">
+            <a:avLst/>
+          </a:prstGeom>
+          <a:noFill/>
+        </p:spPr>
+        <p:txBody>
+          <a:bodyPr wrap="none" rtlCol="0" anchor="ctr" anchorCtr="1">
+            <a:spAutoFit/>
+          </a:bodyPr>
+          <a:lstStyle/>
+          <a:p>
+            <a:r>
+              <a:rPr lang="en-US" dirty="0">
+                <a:ea typeface="標楷體" pitchFamily="65" charset="-120"/>
+                <a:cs typeface="Calibri" pitchFamily="34" charset="0"/>
+              </a:rPr>
+              <a:t>7 X long cycles</a:t>
+            </a:r>
+          </a:p>
+          <a:p>
+            <a:r>
+              <a:rPr lang="en-US" dirty="0">
+                <a:ea typeface="標楷體" pitchFamily="65" charset="-120"/>
+                <a:cs typeface="Calibri" pitchFamily="34" charset="0"/>
+              </a:rPr>
+              <a:t>(</a:t>
+            </a:r>
+            <a:r>
+              <a:rPr lang="en-US" sz="2200" dirty="0">
+                <a:solidFill>
+                  <a:srgbClr val="FF0000"/>
+                </a:solidFill>
+                <a:ea typeface="標楷體" pitchFamily="65" charset="-120"/>
+                <a:cs typeface="Calibri" pitchFamily="34" charset="0"/>
+              </a:rPr>
+              <a:t>35</a:t>
+            </a:r>
+            <a:r>
+              <a:rPr lang="en-US" dirty="0">
+                <a:ea typeface="標楷體" pitchFamily="65" charset="-120"/>
+                <a:cs typeface="Calibri" pitchFamily="34" charset="0"/>
+              </a:rPr>
+              <a:t> short cycles) </a:t>
+            </a:r>
+          </a:p>
+        </p:txBody>
+      </p:sp>
+      <p:sp>
+        <p:nvSpPr>
+          <p:cNvPr id="26" name="TextBox 25">
+            <a:extLst>
+              <a:ext uri="{FF2B5EF4-FFF2-40B4-BE49-F238E27FC236}">
+                <a16:creationId xmlns:a16="http://schemas.microsoft.com/office/drawing/2014/main" id="{27504DD6-5718-46FD-8404-6CAC3CCA1A12}"/>
+              </a:ext>
+            </a:extLst>
+          </p:cNvPr>
+          <p:cNvSpPr txBox="1"/>
+          <p:nvPr/>
+        </p:nvSpPr>
+        <p:spPr>
+          <a:xfrm>
+            <a:off x="4911018" y="4324141"/>
+            <a:ext cx="4076757" cy="430887"/>
+          </a:xfrm>
+          <a:prstGeom prst="rect">
+            <a:avLst/>
+          </a:prstGeom>
+          <a:noFill/>
+        </p:spPr>
+        <p:txBody>
+          <a:bodyPr wrap="none" rtlCol="0" anchor="ctr" anchorCtr="1">
+            <a:spAutoFit/>
+          </a:bodyPr>
+          <a:lstStyle/>
+          <a:p>
+            <a:r>
+              <a:rPr lang="en-US" dirty="0">
+                <a:ea typeface="標楷體" pitchFamily="65" charset="-120"/>
+                <a:cs typeface="Calibri" pitchFamily="34" charset="0"/>
+              </a:rPr>
+              <a:t>5x2 + 4x2 + 3 + 4x2 = </a:t>
+            </a:r>
+            <a:r>
+              <a:rPr lang="en-US" sz="2200" dirty="0">
+                <a:solidFill>
+                  <a:srgbClr val="FF0000"/>
+                </a:solidFill>
+                <a:ea typeface="標楷體" pitchFamily="65" charset="-120"/>
+                <a:cs typeface="Calibri" pitchFamily="34" charset="0"/>
+              </a:rPr>
+              <a:t>29</a:t>
+            </a:r>
+            <a:r>
+              <a:rPr lang="en-US" dirty="0">
+                <a:ea typeface="標楷體" pitchFamily="65" charset="-120"/>
+                <a:cs typeface="Calibri" pitchFamily="34" charset="0"/>
+              </a:rPr>
+              <a:t> short cycles</a:t>
+            </a:r>
+          </a:p>
+        </p:txBody>
+      </p:sp>
+      <p:sp>
+        <p:nvSpPr>
+          <p:cNvPr id="27" name="TextBox 26">
+            <a:extLst>
+              <a:ext uri="{FF2B5EF4-FFF2-40B4-BE49-F238E27FC236}">
+                <a16:creationId xmlns:a16="http://schemas.microsoft.com/office/drawing/2014/main" id="{98764DFD-5ABE-4EDF-8170-1E7F22730C16}"/>
+              </a:ext>
+            </a:extLst>
+          </p:cNvPr>
+          <p:cNvSpPr txBox="1"/>
+          <p:nvPr/>
+        </p:nvSpPr>
+        <p:spPr>
+          <a:xfrm>
+            <a:off x="4975137" y="4838444"/>
+            <a:ext cx="5184304" cy="430887"/>
+          </a:xfrm>
+          <a:prstGeom prst="rect">
+            <a:avLst/>
+          </a:prstGeom>
+          <a:noFill/>
+        </p:spPr>
+        <p:txBody>
+          <a:bodyPr wrap="none" rtlCol="0" anchor="ctr" anchorCtr="1">
+            <a:spAutoFit/>
+          </a:bodyPr>
+          <a:lstStyle/>
+          <a:p>
+            <a:r>
+              <a:rPr lang="en-US" dirty="0">
+                <a:ea typeface="標楷體" pitchFamily="65" charset="-120"/>
+                <a:cs typeface="Calibri" pitchFamily="34" charset="0"/>
+              </a:rPr>
+              <a:t>7 X short cycles  + 4 pipe drain = </a:t>
+            </a:r>
+            <a:r>
+              <a:rPr lang="en-US" sz="2200" dirty="0">
+                <a:solidFill>
+                  <a:srgbClr val="FF0000"/>
+                </a:solidFill>
+                <a:ea typeface="標楷體" pitchFamily="65" charset="-120"/>
+                <a:cs typeface="Calibri" pitchFamily="34" charset="0"/>
+              </a:rPr>
+              <a:t>11</a:t>
+            </a:r>
+            <a:r>
+              <a:rPr lang="en-US" dirty="0">
+                <a:ea typeface="標楷體" pitchFamily="65" charset="-120"/>
+                <a:cs typeface="Calibri" pitchFamily="34" charset="0"/>
+              </a:rPr>
+              <a:t> short cycles</a:t>
+            </a:r>
+          </a:p>
+        </p:txBody>
+      </p:sp>
+      <p:sp>
+        <p:nvSpPr>
+          <p:cNvPr id="14" name="Content Placeholder 2">
+            <a:extLst>
+              <a:ext uri="{FF2B5EF4-FFF2-40B4-BE49-F238E27FC236}">
+                <a16:creationId xmlns:a16="http://schemas.microsoft.com/office/drawing/2014/main" id="{BA967EAE-83F7-45DA-A5F6-609F589B72C5}"/>
+              </a:ext>
+            </a:extLst>
+          </p:cNvPr>
+          <p:cNvSpPr txBox="1">
+            <a:spLocks/>
+          </p:cNvSpPr>
+          <p:nvPr/>
+        </p:nvSpPr>
+        <p:spPr bwMode="auto">
+          <a:xfrm>
+            <a:off x="301205" y="2348924"/>
+            <a:ext cx="11886873" cy="1080075"/>
+          </a:xfrm>
+          <a:prstGeom prst="rect">
+            <a:avLst/>
+          </a:prstGeom>
+          <a:noFill/>
+          <a:ln w="9525">
+            <a:noFill/>
+            <a:miter lim="800000"/>
+            <a:headEnd/>
+            <a:tailEnd/>
+          </a:ln>
+        </p:spPr>
+        <p:txBody>
+          <a:bodyPr vert="horz" wrap="square" lIns="91440" tIns="45720" rIns="91440" bIns="45720" numCol="1" anchor="t" anchorCtr="0" compatLnSpc="1">
+            <a:prstTxWarp prst="textNoShape">
+              <a:avLst/>
+            </a:prstTxWarp>
+            <a:normAutofit/>
+          </a:bodyPr>
+          <a:lstStyle>
+            <a:lvl1pPr marL="342882" indent="-342882" algn="l" rtl="0" eaLnBrk="1" fontAlgn="base" hangingPunct="1">
+              <a:spcBef>
+                <a:spcPct val="20000"/>
+              </a:spcBef>
+              <a:spcAft>
+                <a:spcPct val="0"/>
+              </a:spcAft>
+              <a:buClr>
+                <a:srgbClr val="0000FF"/>
+              </a:buClr>
+              <a:buSzPct val="80000"/>
+              <a:buFont typeface="Wingdings" pitchFamily="2" charset="2"/>
+              <a:buChar char="l"/>
+              <a:defRPr kumimoji="1" sz="3733">
+                <a:solidFill>
+                  <a:schemeClr val="tx1"/>
+                </a:solidFill>
+                <a:latin typeface="Calibri" pitchFamily="34" charset="0"/>
+                <a:ea typeface="標楷體" pitchFamily="65" charset="-120"/>
+                <a:cs typeface="+mn-cs"/>
+              </a:defRPr>
+            </a:lvl1pPr>
+            <a:lvl2pPr marL="742913" indent="-285737" algn="l" rtl="0" eaLnBrk="1" fontAlgn="base" hangingPunct="1">
+              <a:spcBef>
+                <a:spcPct val="20000"/>
+              </a:spcBef>
+              <a:spcAft>
+                <a:spcPct val="0"/>
+              </a:spcAft>
+              <a:buClr>
+                <a:srgbClr val="0000FF"/>
+              </a:buClr>
+              <a:buSzPct val="90000"/>
+              <a:buFont typeface="Arial" charset="0"/>
+              <a:buChar char="–"/>
+              <a:defRPr kumimoji="1" sz="3200">
+                <a:solidFill>
+                  <a:schemeClr val="tx1"/>
+                </a:solidFill>
+                <a:latin typeface="Calibri" pitchFamily="34" charset="0"/>
+                <a:ea typeface="標楷體" pitchFamily="65" charset="-120"/>
+              </a:defRPr>
+            </a:lvl2pPr>
+            <a:lvl3pPr marL="1142943" indent="-228589" algn="l" rtl="0" eaLnBrk="1" fontAlgn="base" hangingPunct="1">
+              <a:spcBef>
+                <a:spcPct val="20000"/>
+              </a:spcBef>
+              <a:spcAft>
+                <a:spcPct val="0"/>
+              </a:spcAft>
+              <a:buChar char="•"/>
+              <a:defRPr kumimoji="1" sz="2667">
+                <a:solidFill>
+                  <a:schemeClr val="tx1"/>
+                </a:solidFill>
+                <a:latin typeface="Calibri" pitchFamily="34" charset="0"/>
+                <a:ea typeface="標楷體" pitchFamily="65" charset="-120"/>
+                <a:cs typeface="Calibri" pitchFamily="34" charset="0"/>
+              </a:defRPr>
+            </a:lvl3pPr>
+            <a:lvl4pPr marL="1600121" indent="-228589" algn="l" rtl="0" eaLnBrk="1" fontAlgn="base" hangingPunct="1">
+              <a:spcBef>
+                <a:spcPct val="20000"/>
+              </a:spcBef>
+              <a:spcAft>
+                <a:spcPct val="0"/>
+              </a:spcAft>
+              <a:buChar char="–"/>
+              <a:defRPr kumimoji="1" sz="2400">
+                <a:solidFill>
+                  <a:schemeClr val="tx1"/>
+                </a:solidFill>
+                <a:latin typeface="Calibri" pitchFamily="34" charset="0"/>
+                <a:ea typeface="標楷體" pitchFamily="65" charset="-120"/>
+                <a:cs typeface="Calibri" pitchFamily="34" charset="0"/>
+              </a:defRPr>
+            </a:lvl4pPr>
+            <a:lvl5pPr marL="2057298" indent="-228589" algn="l" rtl="0" eaLnBrk="1" fontAlgn="base" hangingPunct="1">
+              <a:spcBef>
+                <a:spcPct val="20000"/>
+              </a:spcBef>
+              <a:spcAft>
+                <a:spcPct val="0"/>
+              </a:spcAft>
+              <a:buChar char="»"/>
+              <a:defRPr kumimoji="1" sz="2133">
+                <a:solidFill>
+                  <a:schemeClr val="tx1"/>
+                </a:solidFill>
+                <a:latin typeface="Calibri" pitchFamily="34" charset="0"/>
+                <a:ea typeface="標楷體" pitchFamily="65" charset="-120"/>
+                <a:cs typeface="Calibri" pitchFamily="34" charset="0"/>
+              </a:defRPr>
+            </a:lvl5pPr>
+            <a:lvl6pPr marL="2514476" indent="-228589" algn="l" rtl="0" eaLnBrk="1" fontAlgn="base" hangingPunct="1">
+              <a:spcBef>
+                <a:spcPct val="20000"/>
+              </a:spcBef>
+              <a:spcAft>
+                <a:spcPct val="0"/>
+              </a:spcAft>
+              <a:buChar char="»"/>
+              <a:defRPr kumimoji="1" sz="2000">
+                <a:solidFill>
+                  <a:schemeClr val="tx1"/>
+                </a:solidFill>
+                <a:latin typeface="+mn-lt"/>
+                <a:ea typeface="+mn-ea"/>
+              </a:defRPr>
+            </a:lvl6pPr>
+            <a:lvl7pPr marL="2971652" indent="-228589" algn="l" rtl="0" eaLnBrk="1" fontAlgn="base" hangingPunct="1">
+              <a:spcBef>
+                <a:spcPct val="20000"/>
+              </a:spcBef>
+              <a:spcAft>
+                <a:spcPct val="0"/>
+              </a:spcAft>
+              <a:buChar char="»"/>
+              <a:defRPr kumimoji="1" sz="2000">
+                <a:solidFill>
+                  <a:schemeClr val="tx1"/>
+                </a:solidFill>
+                <a:latin typeface="+mn-lt"/>
+                <a:ea typeface="+mn-ea"/>
+              </a:defRPr>
+            </a:lvl7pPr>
+            <a:lvl8pPr marL="3428829" indent="-228589" algn="l" rtl="0" eaLnBrk="1" fontAlgn="base" hangingPunct="1">
+              <a:spcBef>
+                <a:spcPct val="20000"/>
+              </a:spcBef>
+              <a:spcAft>
+                <a:spcPct val="0"/>
+              </a:spcAft>
+              <a:buChar char="»"/>
+              <a:defRPr kumimoji="1" sz="2000">
+                <a:solidFill>
+                  <a:schemeClr val="tx1"/>
+                </a:solidFill>
+                <a:latin typeface="+mn-lt"/>
+                <a:ea typeface="+mn-ea"/>
+              </a:defRPr>
+            </a:lvl8pPr>
+            <a:lvl9pPr marL="3886007" indent="-228589" algn="l" rtl="0" eaLnBrk="1" fontAlgn="base" hangingPunct="1">
+              <a:spcBef>
+                <a:spcPct val="20000"/>
+              </a:spcBef>
+              <a:spcAft>
+                <a:spcPct val="0"/>
+              </a:spcAft>
+              <a:buChar char="»"/>
+              <a:defRPr kumimoji="1" sz="2000">
+                <a:solidFill>
+                  <a:schemeClr val="tx1"/>
+                </a:solidFill>
+                <a:latin typeface="+mn-lt"/>
+                <a:ea typeface="+mn-ea"/>
+              </a:defRPr>
+            </a:lvl9pPr>
+          </a:lstStyle>
+          <a:p>
+            <a:pPr marL="0" indent="0">
+              <a:buNone/>
+            </a:pPr>
+            <a:r>
+              <a:rPr lang="en-US" sz="2400" kern="0" dirty="0"/>
+              <a:t>Now, for the following code sequence (assuming all instructions are independent)</a:t>
+            </a:r>
+          </a:p>
+          <a:p>
+            <a:pPr marL="0" indent="0">
+              <a:buFont typeface="Wingdings" pitchFamily="2" charset="2"/>
+              <a:buNone/>
+            </a:pPr>
+            <a:r>
+              <a:rPr lang="en-US" sz="2800" kern="0" dirty="0"/>
+              <a:t>	LW, LW, ADD, SUB, BEQ, SW, SW</a:t>
+            </a:r>
+          </a:p>
+        </p:txBody>
+      </p:sp>
+    </p:spTree>
+    <p:extLst>
+      <p:ext uri="{BB962C8B-B14F-4D97-AF65-F5344CB8AC3E}">
+        <p14:creationId xmlns:p14="http://schemas.microsoft.com/office/powerpoint/2010/main" val="305264386"/>
+      </p:ext>
+    </p:extLst>
+  </p:cSld>
+  <p:clrMapOvr>
+    <a:masterClrMapping/>
+  </p:clrMapOvr>
+</p:sld>
+</file>
+
+<file path=ppt/slides/slide8.xml><?xml version="1.0" encoding="utf-8"?>
+<p:sld xmlns:a="http://schemas.openxmlformats.org/drawingml/2006/main" xmlns:r="http://schemas.openxmlformats.org/officeDocument/2006/relationships" xmlns:p="http://schemas.openxmlformats.org/presentationml/2006/main">
+  <p:cSld>
+    <p:spTree>
+      <p:nvGrpSpPr>
+        <p:cNvPr id="1" name=""/>
+        <p:cNvGrpSpPr/>
+        <p:nvPr/>
+      </p:nvGrpSpPr>
+      <p:grpSpPr>
+        <a:xfrm>
+          <a:off x="0" y="0"/>
+          <a:ext cx="0" cy="0"/>
+          <a:chOff x="0" y="0"/>
+          <a:chExt cx="0" cy="0"/>
+        </a:xfrm>
+      </p:grpSpPr>
+      <p:sp>
+        <p:nvSpPr>
+          <p:cNvPr id="2" name="Title 1"/>
+          <p:cNvSpPr>
+            <a:spLocks noGrp="1"/>
+          </p:cNvSpPr>
+          <p:nvPr>
+            <p:ph type="title"/>
+          </p:nvPr>
+        </p:nvSpPr>
+        <p:spPr/>
+        <p:txBody>
           <a:bodyPr/>
           <a:lstStyle/>
           <a:p>
@@ -47028,7 +49384,7 @@
           <a:p>
             <a:fld id="{D9B6BDF2-6896-4B98-8776-C18582F63BA5}" type="slidenum">
               <a:rPr lang="zh-TW" altLang="en-US" smtClean="0"/>
-              <a:t>7</a:t>
+              <a:t>8</a:t>
             </a:fld>
             <a:endParaRPr lang="zh-TW" altLang="en-US"/>
           </a:p>
@@ -47077,7 +49433,7 @@
 </p:sld>
 </file>
 
-<file path=ppt/slides/slide8.xml><?xml version="1.0" encoding="utf-8"?>
+<file path=ppt/slides/slide9.xml><?xml version="1.0" encoding="utf-8"?>
 <p:sld xmlns:a="http://schemas.openxmlformats.org/drawingml/2006/main" xmlns:r="http://schemas.openxmlformats.org/officeDocument/2006/relationships" xmlns:p="http://schemas.openxmlformats.org/presentationml/2006/main">
   <p:cSld>
     <p:spTree>
@@ -47133,7 +49489,7 @@
           <a:p>
             <a:fld id="{D9B6BDF2-6896-4B98-8776-C18582F63BA5}" type="slidenum">
               <a:rPr lang="zh-TW" altLang="en-US" smtClean="0"/>
-              <a:t>8</a:t>
+              <a:t>9</a:t>
             </a:fld>
             <a:endParaRPr lang="zh-TW" altLang="en-US"/>
           </a:p>
@@ -47173,111 +49529,6 @@
     <p:extLst>
       <p:ext uri="{BB962C8B-B14F-4D97-AF65-F5344CB8AC3E}">
         <p14:creationId xmlns:p14="http://schemas.microsoft.com/office/powerpoint/2010/main" val="2603630396"/>
-      </p:ext>
-    </p:extLst>
-  </p:cSld>
-  <p:clrMapOvr>
-    <a:masterClrMapping/>
-  </p:clrMapOvr>
-</p:sld>
-</file>
-
-<file path=ppt/slides/slide9.xml><?xml version="1.0" encoding="utf-8"?>
-<p:sld xmlns:a="http://schemas.openxmlformats.org/drawingml/2006/main" xmlns:r="http://schemas.openxmlformats.org/officeDocument/2006/relationships" xmlns:p="http://schemas.openxmlformats.org/presentationml/2006/main">
-  <p:cSld>
-    <p:spTree>
-      <p:nvGrpSpPr>
-        <p:cNvPr id="1" name=""/>
-        <p:cNvGrpSpPr/>
-        <p:nvPr/>
-      </p:nvGrpSpPr>
-      <p:grpSpPr>
-        <a:xfrm>
-          <a:off x="0" y="0"/>
-          <a:ext cx="0" cy="0"/>
-          <a:chOff x="0" y="0"/>
-          <a:chExt cx="0" cy="0"/>
-        </a:xfrm>
-      </p:grpSpPr>
-      <p:sp>
-        <p:nvSpPr>
-          <p:cNvPr id="2" name="Title 1"/>
-          <p:cNvSpPr>
-            <a:spLocks noGrp="1"/>
-          </p:cNvSpPr>
-          <p:nvPr>
-            <p:ph type="title"/>
-          </p:nvPr>
-        </p:nvSpPr>
-        <p:spPr/>
-        <p:txBody>
-          <a:bodyPr/>
-          <a:lstStyle/>
-          <a:p>
-            <a:r>
-              <a:rPr lang="en-US" dirty="0"/>
-              <a:t>Pipelined Laundry </a:t>
-            </a:r>
-          </a:p>
-        </p:txBody>
-      </p:sp>
-      <p:sp>
-        <p:nvSpPr>
-          <p:cNvPr id="6" name="灯片编号占位符 5"/>
-          <p:cNvSpPr>
-            <a:spLocks noGrp="1"/>
-          </p:cNvSpPr>
-          <p:nvPr>
-            <p:ph type="sldNum" sz="quarter" idx="10"/>
-          </p:nvPr>
-        </p:nvSpPr>
-        <p:spPr/>
-        <p:txBody>
-          <a:bodyPr/>
-          <a:lstStyle/>
-          <a:p>
-            <a:fld id="{D9B6BDF2-6896-4B98-8776-C18582F63BA5}" type="slidenum">
-              <a:rPr lang="zh-TW" altLang="en-US" smtClean="0"/>
-              <a:t>9</a:t>
-            </a:fld>
-            <a:endParaRPr lang="zh-TW" altLang="en-US"/>
-          </a:p>
-        </p:txBody>
-      </p:sp>
-      <p:pic>
-        <p:nvPicPr>
-          <p:cNvPr id="4" name="Picture 3">
-            <a:extLst>
-              <a:ext uri="{FF2B5EF4-FFF2-40B4-BE49-F238E27FC236}">
-                <a16:creationId xmlns:a16="http://schemas.microsoft.com/office/drawing/2014/main" id="{ADE6F661-4336-4D02-81B3-80A2E34D112C}"/>
-              </a:ext>
-            </a:extLst>
-          </p:cNvPr>
-          <p:cNvPicPr>
-            <a:picLocks noChangeAspect="1"/>
-          </p:cNvPicPr>
-          <p:nvPr/>
-        </p:nvPicPr>
-        <p:blipFill>
-          <a:blip r:embed="rId3"/>
-          <a:stretch>
-            <a:fillRect/>
-          </a:stretch>
-        </p:blipFill>
-        <p:spPr>
-          <a:xfrm>
-            <a:off x="1047045" y="1070042"/>
-            <a:ext cx="10097909" cy="5077839"/>
-          </a:xfrm>
-          <a:prstGeom prst="rect">
-            <a:avLst/>
-          </a:prstGeom>
-        </p:spPr>
-      </p:pic>
-    </p:spTree>
-    <p:extLst>
-      <p:ext uri="{BB962C8B-B14F-4D97-AF65-F5344CB8AC3E}">
-        <p14:creationId xmlns:p14="http://schemas.microsoft.com/office/powerpoint/2010/main" val="2377473766"/>
       </p:ext>
     </p:extLst>
   </p:cSld>

--- a/slide/CA3060-4-Pipeline.pptx
+++ b/slide/CA3060-4-Pipeline.pptx
@@ -155,65 +155,6 @@
     </p:ext>
   </p:extLst>
 </p:presentation>
-</file>
-
-<file path=ppt/changesInfos/changesInfo1.xml><?xml version="1.0" encoding="utf-8"?>
-<pc:chgInfo xmlns:a="http://schemas.openxmlformats.org/drawingml/2006/main" xmlns:r="http://schemas.openxmlformats.org/officeDocument/2006/relationships" xmlns:ac="http://schemas.microsoft.com/office/drawing/2013/main/command" xmlns:pc="http://schemas.microsoft.com/office/powerpoint/2013/main/command">
-  <pc:docChgLst>
-    <pc:chgData name="Chaoyi Sun (SDS,124090550)" userId="7336b744-5857-42bc-9fde-1c1347a32774" providerId="ADAL" clId="{3A35FEB6-D186-4DFE-8550-C935A8639321}"/>
-    <pc:docChg chg="undo custSel modSld">
-      <pc:chgData name="Chaoyi Sun (SDS,124090550)" userId="7336b744-5857-42bc-9fde-1c1347a32774" providerId="ADAL" clId="{3A35FEB6-D186-4DFE-8550-C935A8639321}" dt="2026-03-17T13:37:45.988" v="5" actId="207"/>
-      <pc:docMkLst>
-        <pc:docMk/>
-      </pc:docMkLst>
-      <pc:sldChg chg="modSp mod">
-        <pc:chgData name="Chaoyi Sun (SDS,124090550)" userId="7336b744-5857-42bc-9fde-1c1347a32774" providerId="ADAL" clId="{3A35FEB6-D186-4DFE-8550-C935A8639321}" dt="2026-03-17T13:03:38.869" v="2" actId="20577"/>
-        <pc:sldMkLst>
-          <pc:docMk/>
-          <pc:sldMk cId="0" sldId="293"/>
-        </pc:sldMkLst>
-        <pc:spChg chg="mod">
-          <ac:chgData name="Chaoyi Sun (SDS,124090550)" userId="7336b744-5857-42bc-9fde-1c1347a32774" providerId="ADAL" clId="{3A35FEB6-D186-4DFE-8550-C935A8639321}" dt="2026-03-17T13:03:38.869" v="2" actId="20577"/>
-          <ac:spMkLst>
-            <pc:docMk/>
-            <pc:sldMk cId="0" sldId="293"/>
-            <ac:spMk id="353283" creationId="{00000000-0000-0000-0000-000000000000}"/>
-          </ac:spMkLst>
-        </pc:spChg>
-      </pc:sldChg>
-      <pc:sldChg chg="modSp mod">
-        <pc:chgData name="Chaoyi Sun (SDS,124090550)" userId="7336b744-5857-42bc-9fde-1c1347a32774" providerId="ADAL" clId="{3A35FEB6-D186-4DFE-8550-C935A8639321}" dt="2026-03-17T13:37:45.988" v="5" actId="207"/>
-        <pc:sldMkLst>
-          <pc:docMk/>
-          <pc:sldMk cId="0" sldId="527"/>
-        </pc:sldMkLst>
-        <pc:spChg chg="mod">
-          <ac:chgData name="Chaoyi Sun (SDS,124090550)" userId="7336b744-5857-42bc-9fde-1c1347a32774" providerId="ADAL" clId="{3A35FEB6-D186-4DFE-8550-C935A8639321}" dt="2026-03-17T13:37:45.988" v="5" actId="207"/>
-          <ac:spMkLst>
-            <pc:docMk/>
-            <pc:sldMk cId="0" sldId="527"/>
-            <ac:spMk id="3" creationId="{00000000-0000-0000-0000-000000000000}"/>
-          </ac:spMkLst>
-        </pc:spChg>
-      </pc:sldChg>
-      <pc:sldChg chg="modSp mod">
-        <pc:chgData name="Chaoyi Sun (SDS,124090550)" userId="7336b744-5857-42bc-9fde-1c1347a32774" providerId="ADAL" clId="{3A35FEB6-D186-4DFE-8550-C935A8639321}" dt="2026-03-17T13:37:45.854" v="4" actId="1076"/>
-        <pc:sldMkLst>
-          <pc:docMk/>
-          <pc:sldMk cId="220217435" sldId="673"/>
-        </pc:sldMkLst>
-        <pc:picChg chg="mod">
-          <ac:chgData name="Chaoyi Sun (SDS,124090550)" userId="7336b744-5857-42bc-9fde-1c1347a32774" providerId="ADAL" clId="{3A35FEB6-D186-4DFE-8550-C935A8639321}" dt="2026-03-17T13:37:45.854" v="4" actId="1076"/>
-          <ac:picMkLst>
-            <pc:docMk/>
-            <pc:sldMk cId="220217435" sldId="673"/>
-            <ac:picMk id="3" creationId="{E6005C9C-58FB-4DC1-B70D-7DDB4755C520}"/>
-          </ac:picMkLst>
-        </pc:picChg>
-      </pc:sldChg>
-    </pc:docChg>
-  </pc:docChgLst>
-</pc:chgInfo>
 </file>
 
 <file path=ppt/handoutMasters/handoutMaster1.xml><?xml version="1.0" encoding="utf-8"?>
@@ -16512,7 +16453,7 @@
               <a:buNone/>
             </a:pPr>
             <a:r>
-              <a:rPr kumimoji="1" lang="en-US" altLang="zh-TW" sz="1600" dirty="0">
+              <a:rPr kumimoji="1" lang="en-US" altLang="zh-TW" sz="1600">
                 <a:latin typeface="Times New Roman" panose="02020503050405090304" pitchFamily="18" charset="0"/>
                 <a:ea typeface="新細明體" panose="02020500000000000000" pitchFamily="18" charset="-120"/>
               </a:rPr>
@@ -45663,7 +45604,7 @@
       </p:par>
     </p:tnLst>
     <p:bldLst>
-      <p:bldP spid="2" grpId="0" animBg="1"/>
+      <p:bldP spid="2" grpId="0"/>
     </p:bldLst>
   </p:timing>
 </p:sld>
